--- a/hla_ligand_immunogenicity/report.pptx
+++ b/hla_ligand_immunogenicity/report.pptx
@@ -17,9 +17,10 @@
     <p:sldId id="265" r:id="rId11"/>
     <p:sldId id="266" r:id="rId12"/>
     <p:sldId id="267" r:id="rId13"/>
+    <p:sldId id="268" r:id="rId14"/>
   </p:sldIdLst>
   <p:notesMasterIdLst>
-    <p:notesMasterId r:id="rId14"/>
+    <p:notesMasterId r:id="rId15"/>
   </p:notesMasterIdLst>
   <p:sldSz cx="12192000" cy="6858000"/>
   <p:notesSz cx="6858000" cy="12192000"/>
@@ -801,6 +802,94 @@
             <a:fld id="{F7021451-1387-4CA6-816F-3879F97B5CBC}" type="slidenum">
               <a:rPr lang="en-US"/>
               <a:t>12</a:t>
+            </a:fld>
+            <a:endParaRPr lang="en-US"/>
+          </a:p>
+        </p:txBody>
+      </p:sp>
+    </p:spTree>
+    <p:extLst>
+      <p:ext uri="{BB962C8B-B14F-4D97-AF65-F5344CB8AC3E}">
+        <p14:creationId xmlns:p14="http://schemas.microsoft.com/office/powerpoint/2010/main" val="1024086991"/>
+      </p:ext>
+    </p:extLst>
+  </p:cSld>
+  <p:clrMapOvr>
+    <a:masterClrMapping/>
+  </p:clrMapOvr>
+</p:notes>
+</file>
+
+<file path=ppt/notesSlides/notesSlide13.xml><?xml version="1.0" encoding="utf-8"?>
+<p:notes xmlns:a="http://schemas.openxmlformats.org/drawingml/2006/main" xmlns:r="http://schemas.openxmlformats.org/officeDocument/2006/relationships" xmlns:p="http://schemas.openxmlformats.org/presentationml/2006/main">
+  <p:cSld>
+    <p:spTree>
+      <p:nvGrpSpPr>
+        <p:cNvPr id="1" name=""/>
+        <p:cNvGrpSpPr/>
+        <p:nvPr/>
+      </p:nvGrpSpPr>
+      <p:grpSpPr>
+        <a:xfrm>
+          <a:off x="0" y="0"/>
+          <a:ext cx="0" cy="0"/>
+          <a:chOff x="0" y="0"/>
+          <a:chExt cx="0" cy="0"/>
+        </a:xfrm>
+      </p:grpSpPr>
+      <p:sp>
+        <p:nvSpPr>
+          <p:cNvPr id="2" name="Slide Image Placeholder 1"/>
+          <p:cNvSpPr>
+            <a:spLocks noGrp="1" noRot="1" noChangeAspect="1"/>
+          </p:cNvSpPr>
+          <p:nvPr>
+            <p:ph type="sldImg"/>
+          </p:nvPr>
+        </p:nvSpPr>
+        <p:spPr/>
+      </p:sp>
+      <p:sp>
+        <p:nvSpPr>
+          <p:cNvPr id="3" name="Notes Placeholder 2"/>
+          <p:cNvSpPr>
+            <a:spLocks noGrp="1"/>
+          </p:cNvSpPr>
+          <p:nvPr>
+            <p:ph type="body" idx="1"/>
+          </p:nvPr>
+        </p:nvSpPr>
+        <p:spPr/>
+        <p:txBody>
+          <a:bodyPr/>
+          <a:lstStyle/>
+          <a:p>
+            <a:r>
+              <a:rPr lang="en-US" dirty="0"/>
+              <a:t/>
+            </a:r>
+            <a:endParaRPr lang="en-US" dirty="0"/>
+          </a:p>
+        </p:txBody>
+      </p:sp>
+      <p:sp>
+        <p:nvSpPr>
+          <p:cNvPr id="4" name="Slide Number Placeholder 3"/>
+          <p:cNvSpPr>
+            <a:spLocks noGrp="1"/>
+          </p:cNvSpPr>
+          <p:nvPr>
+            <p:ph type="sldNum" sz="quarter" idx="10"/>
+          </p:nvPr>
+        </p:nvSpPr>
+        <p:spPr/>
+        <p:txBody>
+          <a:bodyPr/>
+          <a:lstStyle/>
+          <a:p>
+            <a:fld id="{F7021451-1387-4CA6-816F-3879F97B5CBC}" type="slidenum">
+              <a:rPr lang="en-US"/>
+              <a:t>13</a:t>
             </a:fld>
             <a:endParaRPr lang="en-US"/>
           </a:p>
@@ -1949,7 +2038,7 @@
                 <a:ea typeface="Calibri" pitchFamily="34" charset="-122"/>
                 <a:cs typeface="Calibri" pitchFamily="34" charset="-120"/>
               </a:rPr>
-              <a:t>25-molecule HLA-DR panel · 97.3% weighted US/EU coverage · benchmarked against 9 comparators and controls</a:t>
+              <a:t>25-molecule HLA-DR panel · 97.3% weighted US/EU coverage · benchmarked against 13 comparators and controls</a:t>
             </a:r>
             <a:endParaRPr lang="en-US" sz="1500" dirty="0"/>
           </a:p>
@@ -2098,6 +2187,1060 @@
                 <a:ea typeface="Calibri" pitchFamily="34" charset="-122"/>
                 <a:cs typeface="Calibri" pitchFamily="34" charset="-120"/>
               </a:rPr>
+              <a:t>MODULE 7 · ADA LAYER</a:t>
+            </a:r>
+            <a:endParaRPr lang="en-US" sz="1050" dirty="0"/>
+          </a:p>
+        </p:txBody>
+      </p:sp>
+      <p:sp>
+        <p:nvSpPr>
+          <p:cNvPr id="3" name="Text 1"/>
+          <p:cNvSpPr/>
+          <p:nvPr/>
+        </p:nvSpPr>
+        <p:spPr>
+          <a:xfrm>
+            <a:off x="566928" y="548640"/>
+            <a:ext cx="11027664" cy="548640"/>
+          </a:xfrm>
+          <a:prstGeom prst="rect">
+            <a:avLst/>
+          </a:prstGeom>
+          <a:noFill/>
+          <a:ln/>
+        </p:spPr>
+        <p:txBody>
+          <a:bodyPr wrap="square" lIns="0" tIns="0" rIns="0" bIns="0" rtlCol="0" anchor="ctr"/>
+          <a:lstStyle/>
+          <a:p>
+            <a:pPr indent="0" marL="0">
+              <a:buNone/>
+            </a:pPr>
+            <a:r>
+              <a:rPr lang="en-US" sz="2700" b="1" dirty="0">
+                <a:solidFill>
+                  <a:srgbClr val="12212E"/>
+                </a:solidFill>
+                <a:latin typeface="Cambria" pitchFamily="34" charset="0"/>
+                <a:ea typeface="Cambria" pitchFamily="34" charset="-122"/>
+                <a:cs typeface="Cambria" pitchFamily="34" charset="-120"/>
+              </a:rPr>
+              <a:t>The measured endpoint is an antibody, not a T cell</a:t>
+            </a:r>
+            <a:endParaRPr lang="en-US" sz="2700" dirty="0"/>
+          </a:p>
+        </p:txBody>
+      </p:sp>
+      <p:pic>
+        <p:nvPicPr>
+          <p:cNvPr id="4" name="Image 0" descr="/home/user/ClaudeCode/hla_ligand_immunogenicity/figures/fig4_tb_coincidence.png">    </p:cNvPr>
+          <p:cNvPicPr>
+            <a:picLocks noChangeAspect="1"/>
+          </p:cNvPicPr>
+          <p:nvPr/>
+        </p:nvPicPr>
+        <p:blipFill>
+          <a:blip r:embed="rId1"/>
+          <a:stretch>
+            <a:fillRect/>
+          </a:stretch>
+        </p:blipFill>
+        <p:spPr>
+          <a:xfrm>
+            <a:off x="566928" y="1115568"/>
+            <a:ext cx="11027664" cy="2834640"/>
+          </a:xfrm>
+          <a:prstGeom prst="rect">
+            <a:avLst/>
+          </a:prstGeom>
+        </p:spPr>
+      </p:pic>
+      <p:sp>
+        <p:nvSpPr>
+          <p:cNvPr id="5" name="Text 2"/>
+          <p:cNvSpPr/>
+          <p:nvPr/>
+        </p:nvSpPr>
+        <p:spPr>
+          <a:xfrm>
+            <a:off x="566928" y="4069080"/>
+            <a:ext cx="11027664" cy="502920"/>
+          </a:xfrm>
+          <a:prstGeom prst="rect">
+            <a:avLst/>
+          </a:prstGeom>
+          <a:noFill/>
+          <a:ln/>
+        </p:spPr>
+        <p:txBody>
+          <a:bodyPr wrap="square" lIns="0" tIns="0" rIns="0" bIns="0" rtlCol="0" anchor="ctr"/>
+          <a:lstStyle/>
+          <a:p>
+            <a:pPr indent="0" marL="0">
+              <a:lnSpc>
+                <a:spcPts val="1600"/>
+              </a:lnSpc>
+              <a:buNone/>
+            </a:pPr>
+            <a:r>
+              <a:rPr lang="en-US" sz="1200" dirty="0">
+                <a:solidFill>
+                  <a:srgbClr val="12212E"/>
+                </a:solidFill>
+                <a:latin typeface="Calibri" pitchFamily="34" charset="0"/>
+                <a:ea typeface="Calibri" pitchFamily="34" charset="-122"/>
+                <a:cs typeface="Calibri" pitchFamily="34" charset="-120"/>
+              </a:rPr>
+              <a:t>A B cell only class-switches with help from a CD4 T cell recognising a peptide from the same protein. The regions worth taking into wet-lab work first are those where a non-self DR cluster and a predicted B-cell epitope coincide — shaded above.</a:t>
+            </a:r>
+            <a:endParaRPr lang="en-US" sz="1200" dirty="0"/>
+          </a:p>
+        </p:txBody>
+      </p:sp>
+      <p:graphicFrame>
+        <p:nvGraphicFramePr>
+          <p:cNvPr id="11" name="Table 0"/>
+          <p:cNvGraphicFramePr>
+            <a:graphicFrameLocks noGrp="1"/>
+          </p:cNvGraphicFramePr>
+          <p:nvPr>
+            <p:extLst>
+              <p:ext uri="{D42A27DB-BD31-4B8C-83A1-F6EECF244321}">
+                <p14:modId xmlns:p14="http://schemas.microsoft.com/office/powerpoint/2010/main" val="1579011935"/>
+              </p:ext>
+            </p:extLst>
+          </p:nvPr>
+        </p:nvGraphicFramePr>
+        <p:xfrm>
+          <a:off x="566928" y="4663440"/>
+          <a:ext cx="11027664" cy="914400"/>
+        </p:xfrm>
+        <a:graphic>
+          <a:graphicData uri="http://schemas.openxmlformats.org/drawingml/2006/table">
+            <a:tbl>
+              <a:tblPr/>
+              <a:tblGrid>
+                <a:gridCol w="1371600"/>
+                <a:gridCol w="1188720"/>
+                <a:gridCol w="1554480"/>
+                <a:gridCol w="1371600"/>
+                <a:gridCol w="1097280"/>
+                <a:gridCol w="4443984"/>
+              </a:tblGrid>
+              <a:tr h="292608">
+                <a:tc>
+                  <a:txBody>
+                    <a:bodyPr/>
+                    <a:lstStyle/>
+                    <a:p>
+                      <a:pPr indent="0" marL="0">
+                        <a:buNone/>
+                      </a:pPr>
+                      <a:r>
+                        <a:rPr lang="en-US" sz="850" b="1" spc="60" kern="0" dirty="0">
+                          <a:solidFill>
+                            <a:srgbClr val="63748A"/>
+                          </a:solidFill>
+                          <a:latin typeface="Calibri" pitchFamily="34" charset="0"/>
+                          <a:ea typeface="Calibri" pitchFamily="34" charset="-122"/>
+                          <a:cs typeface="Calibri" pitchFamily="34" charset="-120"/>
+                        </a:rPr>
+                        <a:t>T-cell cluster</a:t>
+                      </a:r>
+                      <a:endParaRPr lang="en-US" sz="850" dirty="0">
+                        <a:latin typeface="Calibri" charset="0"/>
+                        <a:ea typeface="Calibri" charset="0"/>
+                        <a:cs typeface="Calibri" charset="0"/>
+                      </a:endParaRPr>
+                    </a:p>
+                  </a:txBody>
+                  <a:tcPr marL="91440" marR="91440" marT="45720" marB="45720" anchor="ctr">
+                    <a:lnL w="6350" cap="flat" cmpd="sng" algn="ctr">
+                      <a:solidFill>
+                        <a:srgbClr val="DCE4EC"/>
+                      </a:solidFill>
+                      <a:prstDash val="solid"/>
+                      <a:round/>
+                      <a:headEnd type="none" w="med" len="med"/>
+                      <a:tailEnd type="none" w="med" len="med"/>
+                    </a:lnL>
+                    <a:lnR w="6350" cap="flat" cmpd="sng" algn="ctr">
+                      <a:solidFill>
+                        <a:srgbClr val="DCE4EC"/>
+                      </a:solidFill>
+                      <a:prstDash val="solid"/>
+                      <a:round/>
+                      <a:headEnd type="none" w="med" len="med"/>
+                      <a:tailEnd type="none" w="med" len="med"/>
+                    </a:lnR>
+                    <a:lnT w="6350" cap="flat" cmpd="sng" algn="ctr">
+                      <a:solidFill>
+                        <a:srgbClr val="DCE4EC"/>
+                      </a:solidFill>
+                      <a:prstDash val="solid"/>
+                      <a:round/>
+                      <a:headEnd type="none" w="med" len="med"/>
+                      <a:tailEnd type="none" w="med" len="med"/>
+                    </a:lnT>
+                    <a:lnB w="6350" cap="flat" cmpd="sng" algn="ctr">
+                      <a:solidFill>
+                        <a:srgbClr val="DCE4EC"/>
+                      </a:solidFill>
+                      <a:prstDash val="solid"/>
+                      <a:round/>
+                      <a:headEnd type="none" w="med" len="med"/>
+                      <a:tailEnd type="none" w="med" len="med"/>
+                    </a:lnB>
+                    <a:solidFill>
+                      <a:srgbClr val="F2F6F9"/>
+                    </a:solidFill>
+                  </a:tcPr>
+                </a:tc>
+                <a:tc>
+                  <a:txBody>
+                    <a:bodyPr/>
+                    <a:lstStyle/>
+                    <a:p>
+                      <a:pPr indent="0" marL="0">
+                        <a:buNone/>
+                      </a:pPr>
+                      <a:r>
+                        <a:rPr lang="en-US" sz="850" b="1" spc="60" kern="0" dirty="0">
+                          <a:solidFill>
+                            <a:srgbClr val="63748A"/>
+                          </a:solidFill>
+                          <a:latin typeface="Calibri" pitchFamily="34" charset="0"/>
+                          <a:ea typeface="Calibri" pitchFamily="34" charset="-122"/>
+                          <a:cs typeface="Calibri" pitchFamily="34" charset="-120"/>
+                        </a:rPr>
+                        <a:t>Core</a:t>
+                      </a:r>
+                      <a:endParaRPr lang="en-US" sz="850" dirty="0">
+                        <a:latin typeface="Calibri" charset="0"/>
+                        <a:ea typeface="Calibri" charset="0"/>
+                        <a:cs typeface="Calibri" charset="0"/>
+                      </a:endParaRPr>
+                    </a:p>
+                  </a:txBody>
+                  <a:tcPr marL="91440" marR="91440" marT="45720" marB="45720" anchor="ctr">
+                    <a:lnL w="6350" cap="flat" cmpd="sng" algn="ctr">
+                      <a:solidFill>
+                        <a:srgbClr val="DCE4EC"/>
+                      </a:solidFill>
+                      <a:prstDash val="solid"/>
+                      <a:round/>
+                      <a:headEnd type="none" w="med" len="med"/>
+                      <a:tailEnd type="none" w="med" len="med"/>
+                    </a:lnL>
+                    <a:lnR w="6350" cap="flat" cmpd="sng" algn="ctr">
+                      <a:solidFill>
+                        <a:srgbClr val="DCE4EC"/>
+                      </a:solidFill>
+                      <a:prstDash val="solid"/>
+                      <a:round/>
+                      <a:headEnd type="none" w="med" len="med"/>
+                      <a:tailEnd type="none" w="med" len="med"/>
+                    </a:lnR>
+                    <a:lnT w="6350" cap="flat" cmpd="sng" algn="ctr">
+                      <a:solidFill>
+                        <a:srgbClr val="DCE4EC"/>
+                      </a:solidFill>
+                      <a:prstDash val="solid"/>
+                      <a:round/>
+                      <a:headEnd type="none" w="med" len="med"/>
+                      <a:tailEnd type="none" w="med" len="med"/>
+                    </a:lnT>
+                    <a:lnB w="6350" cap="flat" cmpd="sng" algn="ctr">
+                      <a:solidFill>
+                        <a:srgbClr val="DCE4EC"/>
+                      </a:solidFill>
+                      <a:prstDash val="solid"/>
+                      <a:round/>
+                      <a:headEnd type="none" w="med" len="med"/>
+                      <a:tailEnd type="none" w="med" len="med"/>
+                    </a:lnB>
+                    <a:solidFill>
+                      <a:srgbClr val="F2F6F9"/>
+                    </a:solidFill>
+                  </a:tcPr>
+                </a:tc>
+                <a:tc>
+                  <a:txBody>
+                    <a:bodyPr/>
+                    <a:lstStyle/>
+                    <a:p>
+                      <a:pPr indent="0" marL="0">
+                        <a:buNone/>
+                      </a:pPr>
+                      <a:r>
+                        <a:rPr lang="en-US" sz="850" b="1" spc="60" kern="0" dirty="0">
+                          <a:solidFill>
+                            <a:srgbClr val="63748A"/>
+                          </a:solidFill>
+                          <a:latin typeface="Calibri" pitchFamily="34" charset="0"/>
+                          <a:ea typeface="Calibri" pitchFamily="34" charset="-122"/>
+                          <a:cs typeface="Calibri" pitchFamily="34" charset="-120"/>
+                        </a:rPr>
+                        <a:t>% pop presenting</a:t>
+                      </a:r>
+                      <a:endParaRPr lang="en-US" sz="850" dirty="0">
+                        <a:latin typeface="Calibri" charset="0"/>
+                        <a:ea typeface="Calibri" charset="0"/>
+                        <a:cs typeface="Calibri" charset="0"/>
+                      </a:endParaRPr>
+                    </a:p>
+                  </a:txBody>
+                  <a:tcPr marL="91440" marR="91440" marT="45720" marB="45720" anchor="ctr">
+                    <a:lnL w="6350" cap="flat" cmpd="sng" algn="ctr">
+                      <a:solidFill>
+                        <a:srgbClr val="DCE4EC"/>
+                      </a:solidFill>
+                      <a:prstDash val="solid"/>
+                      <a:round/>
+                      <a:headEnd type="none" w="med" len="med"/>
+                      <a:tailEnd type="none" w="med" len="med"/>
+                    </a:lnL>
+                    <a:lnR w="6350" cap="flat" cmpd="sng" algn="ctr">
+                      <a:solidFill>
+                        <a:srgbClr val="DCE4EC"/>
+                      </a:solidFill>
+                      <a:prstDash val="solid"/>
+                      <a:round/>
+                      <a:headEnd type="none" w="med" len="med"/>
+                      <a:tailEnd type="none" w="med" len="med"/>
+                    </a:lnR>
+                    <a:lnT w="6350" cap="flat" cmpd="sng" algn="ctr">
+                      <a:solidFill>
+                        <a:srgbClr val="DCE4EC"/>
+                      </a:solidFill>
+                      <a:prstDash val="solid"/>
+                      <a:round/>
+                      <a:headEnd type="none" w="med" len="med"/>
+                      <a:tailEnd type="none" w="med" len="med"/>
+                    </a:lnT>
+                    <a:lnB w="6350" cap="flat" cmpd="sng" algn="ctr">
+                      <a:solidFill>
+                        <a:srgbClr val="DCE4EC"/>
+                      </a:solidFill>
+                      <a:prstDash val="solid"/>
+                      <a:round/>
+                      <a:headEnd type="none" w="med" len="med"/>
+                      <a:tailEnd type="none" w="med" len="med"/>
+                    </a:lnB>
+                    <a:solidFill>
+                      <a:srgbClr val="F2F6F9"/>
+                    </a:solidFill>
+                  </a:tcPr>
+                </a:tc>
+                <a:tc>
+                  <a:txBody>
+                    <a:bodyPr/>
+                    <a:lstStyle/>
+                    <a:p>
+                      <a:pPr indent="0" marL="0">
+                        <a:buNone/>
+                      </a:pPr>
+                      <a:r>
+                        <a:rPr lang="en-US" sz="850" b="1" spc="60" kern="0" dirty="0">
+                          <a:solidFill>
+                            <a:srgbClr val="63748A"/>
+                          </a:solidFill>
+                          <a:latin typeface="Calibri" pitchFamily="34" charset="0"/>
+                          <a:ea typeface="Calibri" pitchFamily="34" charset="-122"/>
+                          <a:cs typeface="Calibri" pitchFamily="34" charset="-120"/>
+                        </a:rPr>
+                        <a:t>B-cell region</a:t>
+                      </a:r>
+                      <a:endParaRPr lang="en-US" sz="850" dirty="0">
+                        <a:latin typeface="Calibri" charset="0"/>
+                        <a:ea typeface="Calibri" charset="0"/>
+                        <a:cs typeface="Calibri" charset="0"/>
+                      </a:endParaRPr>
+                    </a:p>
+                  </a:txBody>
+                  <a:tcPr marL="91440" marR="91440" marT="45720" marB="45720" anchor="ctr">
+                    <a:lnL w="6350" cap="flat" cmpd="sng" algn="ctr">
+                      <a:solidFill>
+                        <a:srgbClr val="DCE4EC"/>
+                      </a:solidFill>
+                      <a:prstDash val="solid"/>
+                      <a:round/>
+                      <a:headEnd type="none" w="med" len="med"/>
+                      <a:tailEnd type="none" w="med" len="med"/>
+                    </a:lnL>
+                    <a:lnR w="6350" cap="flat" cmpd="sng" algn="ctr">
+                      <a:solidFill>
+                        <a:srgbClr val="DCE4EC"/>
+                      </a:solidFill>
+                      <a:prstDash val="solid"/>
+                      <a:round/>
+                      <a:headEnd type="none" w="med" len="med"/>
+                      <a:tailEnd type="none" w="med" len="med"/>
+                    </a:lnR>
+                    <a:lnT w="6350" cap="flat" cmpd="sng" algn="ctr">
+                      <a:solidFill>
+                        <a:srgbClr val="DCE4EC"/>
+                      </a:solidFill>
+                      <a:prstDash val="solid"/>
+                      <a:round/>
+                      <a:headEnd type="none" w="med" len="med"/>
+                      <a:tailEnd type="none" w="med" len="med"/>
+                    </a:lnT>
+                    <a:lnB w="6350" cap="flat" cmpd="sng" algn="ctr">
+                      <a:solidFill>
+                        <a:srgbClr val="DCE4EC"/>
+                      </a:solidFill>
+                      <a:prstDash val="solid"/>
+                      <a:round/>
+                      <a:headEnd type="none" w="med" len="med"/>
+                      <a:tailEnd type="none" w="med" len="med"/>
+                    </a:lnB>
+                    <a:solidFill>
+                      <a:srgbClr val="F2F6F9"/>
+                    </a:solidFill>
+                  </a:tcPr>
+                </a:tc>
+                <a:tc>
+                  <a:txBody>
+                    <a:bodyPr/>
+                    <a:lstStyle/>
+                    <a:p>
+                      <a:pPr indent="0" marL="0">
+                        <a:buNone/>
+                      </a:pPr>
+                      <a:r>
+                        <a:rPr lang="en-US" sz="850" b="1" spc="60" kern="0" dirty="0">
+                          <a:solidFill>
+                            <a:srgbClr val="63748A"/>
+                          </a:solidFill>
+                          <a:latin typeface="Calibri" pitchFamily="34" charset="0"/>
+                          <a:ea typeface="Calibri" pitchFamily="34" charset="-122"/>
+                          <a:cs typeface="Calibri" pitchFamily="34" charset="-120"/>
+                        </a:rPr>
+                        <a:t>Overlap (aa)</a:t>
+                      </a:r>
+                      <a:endParaRPr lang="en-US" sz="850" dirty="0">
+                        <a:latin typeface="Calibri" charset="0"/>
+                        <a:ea typeface="Calibri" charset="0"/>
+                        <a:cs typeface="Calibri" charset="0"/>
+                      </a:endParaRPr>
+                    </a:p>
+                  </a:txBody>
+                  <a:tcPr marL="91440" marR="91440" marT="45720" marB="45720" anchor="ctr">
+                    <a:lnL w="6350" cap="flat" cmpd="sng" algn="ctr">
+                      <a:solidFill>
+                        <a:srgbClr val="DCE4EC"/>
+                      </a:solidFill>
+                      <a:prstDash val="solid"/>
+                      <a:round/>
+                      <a:headEnd type="none" w="med" len="med"/>
+                      <a:tailEnd type="none" w="med" len="med"/>
+                    </a:lnL>
+                    <a:lnR w="6350" cap="flat" cmpd="sng" algn="ctr">
+                      <a:solidFill>
+                        <a:srgbClr val="DCE4EC"/>
+                      </a:solidFill>
+                      <a:prstDash val="solid"/>
+                      <a:round/>
+                      <a:headEnd type="none" w="med" len="med"/>
+                      <a:tailEnd type="none" w="med" len="med"/>
+                    </a:lnR>
+                    <a:lnT w="6350" cap="flat" cmpd="sng" algn="ctr">
+                      <a:solidFill>
+                        <a:srgbClr val="DCE4EC"/>
+                      </a:solidFill>
+                      <a:prstDash val="solid"/>
+                      <a:round/>
+                      <a:headEnd type="none" w="med" len="med"/>
+                      <a:tailEnd type="none" w="med" len="med"/>
+                    </a:lnT>
+                    <a:lnB w="6350" cap="flat" cmpd="sng" algn="ctr">
+                      <a:solidFill>
+                        <a:srgbClr val="DCE4EC"/>
+                      </a:solidFill>
+                      <a:prstDash val="solid"/>
+                      <a:round/>
+                      <a:headEnd type="none" w="med" len="med"/>
+                      <a:tailEnd type="none" w="med" len="med"/>
+                    </a:lnB>
+                    <a:solidFill>
+                      <a:srgbClr val="F2F6F9"/>
+                    </a:solidFill>
+                  </a:tcPr>
+                </a:tc>
+                <a:tc>
+                  <a:txBody>
+                    <a:bodyPr/>
+                    <a:lstStyle/>
+                    <a:p>
+                      <a:pPr indent="0" marL="0">
+                        <a:buNone/>
+                      </a:pPr>
+                      <a:r>
+                        <a:rPr lang="en-US" sz="850" b="1" spc="60" kern="0" dirty="0">
+                          <a:solidFill>
+                            <a:srgbClr val="63748A"/>
+                          </a:solidFill>
+                          <a:latin typeface="Calibri" pitchFamily="34" charset="0"/>
+                          <a:ea typeface="Calibri" pitchFamily="34" charset="-122"/>
+                          <a:cs typeface="Calibri" pitchFamily="34" charset="-120"/>
+                        </a:rPr>
+                        <a:t>Region sequence</a:t>
+                      </a:r>
+                      <a:endParaRPr lang="en-US" sz="850" dirty="0">
+                        <a:latin typeface="Calibri" charset="0"/>
+                        <a:ea typeface="Calibri" charset="0"/>
+                        <a:cs typeface="Calibri" charset="0"/>
+                      </a:endParaRPr>
+                    </a:p>
+                  </a:txBody>
+                  <a:tcPr marL="91440" marR="91440" marT="45720" marB="45720" anchor="ctr">
+                    <a:lnL w="6350" cap="flat" cmpd="sng" algn="ctr">
+                      <a:solidFill>
+                        <a:srgbClr val="DCE4EC"/>
+                      </a:solidFill>
+                      <a:prstDash val="solid"/>
+                      <a:round/>
+                      <a:headEnd type="none" w="med" len="med"/>
+                      <a:tailEnd type="none" w="med" len="med"/>
+                    </a:lnL>
+                    <a:lnR w="6350" cap="flat" cmpd="sng" algn="ctr">
+                      <a:solidFill>
+                        <a:srgbClr val="DCE4EC"/>
+                      </a:solidFill>
+                      <a:prstDash val="solid"/>
+                      <a:round/>
+                      <a:headEnd type="none" w="med" len="med"/>
+                      <a:tailEnd type="none" w="med" len="med"/>
+                    </a:lnR>
+                    <a:lnT w="6350" cap="flat" cmpd="sng" algn="ctr">
+                      <a:solidFill>
+                        <a:srgbClr val="DCE4EC"/>
+                      </a:solidFill>
+                      <a:prstDash val="solid"/>
+                      <a:round/>
+                      <a:headEnd type="none" w="med" len="med"/>
+                      <a:tailEnd type="none" w="med" len="med"/>
+                    </a:lnT>
+                    <a:lnB w="6350" cap="flat" cmpd="sng" algn="ctr">
+                      <a:solidFill>
+                        <a:srgbClr val="DCE4EC"/>
+                      </a:solidFill>
+                      <a:prstDash val="solid"/>
+                      <a:round/>
+                      <a:headEnd type="none" w="med" len="med"/>
+                      <a:tailEnd type="none" w="med" len="med"/>
+                    </a:lnB>
+                    <a:solidFill>
+                      <a:srgbClr val="F2F6F9"/>
+                    </a:solidFill>
+                  </a:tcPr>
+                </a:tc>
+              </a:tr>
+              <a:tr h="292608">
+                <a:tc>
+                  <a:txBody>
+                    <a:bodyPr/>
+                    <a:lstStyle/>
+                    <a:p>
+                      <a:pPr indent="0" marL="0">
+                        <a:buNone/>
+                      </a:pPr>
+                      <a:r>
+                        <a:rPr lang="en-US" sz="1000" dirty="0">
+                          <a:solidFill>
+                            <a:srgbClr val="12212E"/>
+                          </a:solidFill>
+                          <a:latin typeface="Calibri" pitchFamily="34" charset="0"/>
+                          <a:ea typeface="Calibri" pitchFamily="34" charset="-122"/>
+                          <a:cs typeface="Calibri" pitchFamily="34" charset="-120"/>
+                        </a:rPr>
+                        <a:t>47-56</a:t>
+                      </a:r>
+                      <a:endParaRPr lang="en-US" sz="1000" dirty="0">
+                        <a:latin typeface="Calibri" charset="0"/>
+                        <a:ea typeface="Calibri" charset="0"/>
+                        <a:cs typeface="Calibri" charset="0"/>
+                      </a:endParaRPr>
+                    </a:p>
+                  </a:txBody>
+                  <a:tcPr marL="91440" marR="91440" marT="45720" marB="45720" anchor="ctr">
+                    <a:lnL w="6350" cap="flat" cmpd="sng" algn="ctr">
+                      <a:solidFill>
+                        <a:srgbClr val="DCE4EC"/>
+                      </a:solidFill>
+                      <a:prstDash val="solid"/>
+                      <a:round/>
+                      <a:headEnd type="none" w="med" len="med"/>
+                      <a:tailEnd type="none" w="med" len="med"/>
+                    </a:lnL>
+                    <a:lnR w="6350" cap="flat" cmpd="sng" algn="ctr">
+                      <a:solidFill>
+                        <a:srgbClr val="DCE4EC"/>
+                      </a:solidFill>
+                      <a:prstDash val="solid"/>
+                      <a:round/>
+                      <a:headEnd type="none" w="med" len="med"/>
+                      <a:tailEnd type="none" w="med" len="med"/>
+                    </a:lnR>
+                    <a:lnT w="6350" cap="flat" cmpd="sng" algn="ctr">
+                      <a:solidFill>
+                        <a:srgbClr val="DCE4EC"/>
+                      </a:solidFill>
+                      <a:prstDash val="solid"/>
+                      <a:round/>
+                      <a:headEnd type="none" w="med" len="med"/>
+                      <a:tailEnd type="none" w="med" len="med"/>
+                    </a:lnT>
+                    <a:lnB w="6350" cap="flat" cmpd="sng" algn="ctr">
+                      <a:solidFill>
+                        <a:srgbClr val="DCE4EC"/>
+                      </a:solidFill>
+                      <a:prstDash val="solid"/>
+                      <a:round/>
+                      <a:headEnd type="none" w="med" len="med"/>
+                      <a:tailEnd type="none" w="med" len="med"/>
+                    </a:lnB>
+                  </a:tcPr>
+                </a:tc>
+                <a:tc>
+                  <a:txBody>
+                    <a:bodyPr/>
+                    <a:lstStyle/>
+                    <a:p>
+                      <a:pPr indent="0" marL="0">
+                        <a:buNone/>
+                      </a:pPr>
+                      <a:r>
+                        <a:rPr lang="en-US" sz="1000" b="1" dirty="0">
+                          <a:solidFill>
+                            <a:srgbClr val="12212E"/>
+                          </a:solidFill>
+                          <a:latin typeface="Courier New" pitchFamily="34" charset="0"/>
+                          <a:ea typeface="Courier New" pitchFamily="34" charset="-122"/>
+                          <a:cs typeface="Courier New" pitchFamily="34" charset="-120"/>
+                        </a:rPr>
+                        <a:t>FVAVQDITA</a:t>
+                      </a:r>
+                      <a:endParaRPr lang="en-US" sz="1000" dirty="0">
+                        <a:latin typeface="Courier New" charset="0"/>
+                        <a:ea typeface="Courier New" charset="0"/>
+                        <a:cs typeface="Courier New" charset="0"/>
+                      </a:endParaRPr>
+                    </a:p>
+                  </a:txBody>
+                  <a:tcPr marL="91440" marR="91440" marT="45720" marB="45720" anchor="ctr">
+                    <a:lnL w="6350" cap="flat" cmpd="sng" algn="ctr">
+                      <a:solidFill>
+                        <a:srgbClr val="DCE4EC"/>
+                      </a:solidFill>
+                      <a:prstDash val="solid"/>
+                      <a:round/>
+                      <a:headEnd type="none" w="med" len="med"/>
+                      <a:tailEnd type="none" w="med" len="med"/>
+                    </a:lnL>
+                    <a:lnR w="6350" cap="flat" cmpd="sng" algn="ctr">
+                      <a:solidFill>
+                        <a:srgbClr val="DCE4EC"/>
+                      </a:solidFill>
+                      <a:prstDash val="solid"/>
+                      <a:round/>
+                      <a:headEnd type="none" w="med" len="med"/>
+                      <a:tailEnd type="none" w="med" len="med"/>
+                    </a:lnR>
+                    <a:lnT w="6350" cap="flat" cmpd="sng" algn="ctr">
+                      <a:solidFill>
+                        <a:srgbClr val="DCE4EC"/>
+                      </a:solidFill>
+                      <a:prstDash val="solid"/>
+                      <a:round/>
+                      <a:headEnd type="none" w="med" len="med"/>
+                      <a:tailEnd type="none" w="med" len="med"/>
+                    </a:lnT>
+                    <a:lnB w="6350" cap="flat" cmpd="sng" algn="ctr">
+                      <a:solidFill>
+                        <a:srgbClr val="DCE4EC"/>
+                      </a:solidFill>
+                      <a:prstDash val="solid"/>
+                      <a:round/>
+                      <a:headEnd type="none" w="med" len="med"/>
+                      <a:tailEnd type="none" w="med" len="med"/>
+                    </a:lnB>
+                  </a:tcPr>
+                </a:tc>
+                <a:tc>
+                  <a:txBody>
+                    <a:bodyPr/>
+                    <a:lstStyle/>
+                    <a:p>
+                      <a:pPr algn="r" indent="0" marL="0">
+                        <a:buNone/>
+                      </a:pPr>
+                      <a:r>
+                        <a:rPr lang="en-US" sz="1000" b="1" dirty="0">
+                          <a:solidFill>
+                            <a:srgbClr val="12212E"/>
+                          </a:solidFill>
+                          <a:latin typeface="Calibri" pitchFamily="34" charset="0"/>
+                          <a:ea typeface="Calibri" pitchFamily="34" charset="-122"/>
+                          <a:cs typeface="Calibri" pitchFamily="34" charset="-120"/>
+                        </a:rPr>
+                        <a:t>28.5%</a:t>
+                      </a:r>
+                      <a:endParaRPr lang="en-US" sz="1000" dirty="0">
+                        <a:latin typeface="Calibri" charset="0"/>
+                        <a:ea typeface="Calibri" charset="0"/>
+                        <a:cs typeface="Calibri" charset="0"/>
+                      </a:endParaRPr>
+                    </a:p>
+                  </a:txBody>
+                  <a:tcPr marL="91440" marR="91440" marT="45720" marB="45720" anchor="ctr">
+                    <a:lnL w="6350" cap="flat" cmpd="sng" algn="ctr">
+                      <a:solidFill>
+                        <a:srgbClr val="DCE4EC"/>
+                      </a:solidFill>
+                      <a:prstDash val="solid"/>
+                      <a:round/>
+                      <a:headEnd type="none" w="med" len="med"/>
+                      <a:tailEnd type="none" w="med" len="med"/>
+                    </a:lnL>
+                    <a:lnR w="6350" cap="flat" cmpd="sng" algn="ctr">
+                      <a:solidFill>
+                        <a:srgbClr val="DCE4EC"/>
+                      </a:solidFill>
+                      <a:prstDash val="solid"/>
+                      <a:round/>
+                      <a:headEnd type="none" w="med" len="med"/>
+                      <a:tailEnd type="none" w="med" len="med"/>
+                    </a:lnR>
+                    <a:lnT w="6350" cap="flat" cmpd="sng" algn="ctr">
+                      <a:solidFill>
+                        <a:srgbClr val="DCE4EC"/>
+                      </a:solidFill>
+                      <a:prstDash val="solid"/>
+                      <a:round/>
+                      <a:headEnd type="none" w="med" len="med"/>
+                      <a:tailEnd type="none" w="med" len="med"/>
+                    </a:lnT>
+                    <a:lnB w="6350" cap="flat" cmpd="sng" algn="ctr">
+                      <a:solidFill>
+                        <a:srgbClr val="DCE4EC"/>
+                      </a:solidFill>
+                      <a:prstDash val="solid"/>
+                      <a:round/>
+                      <a:headEnd type="none" w="med" len="med"/>
+                      <a:tailEnd type="none" w="med" len="med"/>
+                    </a:lnB>
+                  </a:tcPr>
+                </a:tc>
+                <a:tc>
+                  <a:txBody>
+                    <a:bodyPr/>
+                    <a:lstStyle/>
+                    <a:p>
+                      <a:pPr indent="0" marL="0">
+                        <a:buNone/>
+                      </a:pPr>
+                      <a:r>
+                        <a:rPr lang="en-US" sz="1000" dirty="0">
+                          <a:solidFill>
+                            <a:srgbClr val="12212E"/>
+                          </a:solidFill>
+                          <a:latin typeface="Calibri" pitchFamily="34" charset="0"/>
+                          <a:ea typeface="Calibri" pitchFamily="34" charset="-122"/>
+                          <a:cs typeface="Calibri" pitchFamily="34" charset="-120"/>
+                        </a:rPr>
+                        <a:t>53-63</a:t>
+                      </a:r>
+                      <a:endParaRPr lang="en-US" sz="1000" dirty="0">
+                        <a:latin typeface="Calibri" charset="0"/>
+                        <a:ea typeface="Calibri" charset="0"/>
+                        <a:cs typeface="Calibri" charset="0"/>
+                      </a:endParaRPr>
+                    </a:p>
+                  </a:txBody>
+                  <a:tcPr marL="91440" marR="91440" marT="45720" marB="45720" anchor="ctr">
+                    <a:lnL w="6350" cap="flat" cmpd="sng" algn="ctr">
+                      <a:solidFill>
+                        <a:srgbClr val="DCE4EC"/>
+                      </a:solidFill>
+                      <a:prstDash val="solid"/>
+                      <a:round/>
+                      <a:headEnd type="none" w="med" len="med"/>
+                      <a:tailEnd type="none" w="med" len="med"/>
+                    </a:lnL>
+                    <a:lnR w="6350" cap="flat" cmpd="sng" algn="ctr">
+                      <a:solidFill>
+                        <a:srgbClr val="DCE4EC"/>
+                      </a:solidFill>
+                      <a:prstDash val="solid"/>
+                      <a:round/>
+                      <a:headEnd type="none" w="med" len="med"/>
+                      <a:tailEnd type="none" w="med" len="med"/>
+                    </a:lnR>
+                    <a:lnT w="6350" cap="flat" cmpd="sng" algn="ctr">
+                      <a:solidFill>
+                        <a:srgbClr val="DCE4EC"/>
+                      </a:solidFill>
+                      <a:prstDash val="solid"/>
+                      <a:round/>
+                      <a:headEnd type="none" w="med" len="med"/>
+                      <a:tailEnd type="none" w="med" len="med"/>
+                    </a:lnT>
+                    <a:lnB w="6350" cap="flat" cmpd="sng" algn="ctr">
+                      <a:solidFill>
+                        <a:srgbClr val="DCE4EC"/>
+                      </a:solidFill>
+                      <a:prstDash val="solid"/>
+                      <a:round/>
+                      <a:headEnd type="none" w="med" len="med"/>
+                      <a:tailEnd type="none" w="med" len="med"/>
+                    </a:lnB>
+                  </a:tcPr>
+                </a:tc>
+                <a:tc>
+                  <a:txBody>
+                    <a:bodyPr/>
+                    <a:lstStyle/>
+                    <a:p>
+                      <a:pPr algn="r" indent="0" marL="0">
+                        <a:buNone/>
+                      </a:pPr>
+                      <a:r>
+                        <a:rPr lang="en-US" sz="1000" dirty="0">
+                          <a:solidFill>
+                            <a:srgbClr val="12212E"/>
+                          </a:solidFill>
+                          <a:latin typeface="Calibri" pitchFamily="34" charset="0"/>
+                          <a:ea typeface="Calibri" pitchFamily="34" charset="-122"/>
+                          <a:cs typeface="Calibri" pitchFamily="34" charset="-120"/>
+                        </a:rPr>
+                        <a:t>4</a:t>
+                      </a:r>
+                      <a:endParaRPr lang="en-US" sz="1000" dirty="0">
+                        <a:latin typeface="Calibri" charset="0"/>
+                        <a:ea typeface="Calibri" charset="0"/>
+                        <a:cs typeface="Calibri" charset="0"/>
+                      </a:endParaRPr>
+                    </a:p>
+                  </a:txBody>
+                  <a:tcPr marL="91440" marR="91440" marT="45720" marB="45720" anchor="ctr">
+                    <a:lnL w="6350" cap="flat" cmpd="sng" algn="ctr">
+                      <a:solidFill>
+                        <a:srgbClr val="DCE4EC"/>
+                      </a:solidFill>
+                      <a:prstDash val="solid"/>
+                      <a:round/>
+                      <a:headEnd type="none" w="med" len="med"/>
+                      <a:tailEnd type="none" w="med" len="med"/>
+                    </a:lnL>
+                    <a:lnR w="6350" cap="flat" cmpd="sng" algn="ctr">
+                      <a:solidFill>
+                        <a:srgbClr val="DCE4EC"/>
+                      </a:solidFill>
+                      <a:prstDash val="solid"/>
+                      <a:round/>
+                      <a:headEnd type="none" w="med" len="med"/>
+                      <a:tailEnd type="none" w="med" len="med"/>
+                    </a:lnR>
+                    <a:lnT w="6350" cap="flat" cmpd="sng" algn="ctr">
+                      <a:solidFill>
+                        <a:srgbClr val="DCE4EC"/>
+                      </a:solidFill>
+                      <a:prstDash val="solid"/>
+                      <a:round/>
+                      <a:headEnd type="none" w="med" len="med"/>
+                      <a:tailEnd type="none" w="med" len="med"/>
+                    </a:lnT>
+                    <a:lnB w="6350" cap="flat" cmpd="sng" algn="ctr">
+                      <a:solidFill>
+                        <a:srgbClr val="DCE4EC"/>
+                      </a:solidFill>
+                      <a:prstDash val="solid"/>
+                      <a:round/>
+                      <a:headEnd type="none" w="med" len="med"/>
+                      <a:tailEnd type="none" w="med" len="med"/>
+                    </a:lnB>
+                  </a:tcPr>
+                </a:tc>
+                <a:tc>
+                  <a:txBody>
+                    <a:bodyPr/>
+                    <a:lstStyle/>
+                    <a:p>
+                      <a:pPr indent="0" marL="0">
+                        <a:buNone/>
+                      </a:pPr>
+                      <a:r>
+                        <a:rPr lang="en-US" sz="850" dirty="0">
+                          <a:solidFill>
+                            <a:srgbClr val="12212E"/>
+                          </a:solidFill>
+                          <a:latin typeface="Courier New" pitchFamily="34" charset="0"/>
+                          <a:ea typeface="Courier New" pitchFamily="34" charset="-122"/>
+                          <a:cs typeface="Courier New" pitchFamily="34" charset="-120"/>
+                        </a:rPr>
+                        <a:t>ITASNTHYSSA</a:t>
+                      </a:r>
+                      <a:endParaRPr lang="en-US" sz="850" dirty="0">
+                        <a:latin typeface="Courier New" charset="0"/>
+                        <a:ea typeface="Courier New" charset="0"/>
+                        <a:cs typeface="Courier New" charset="0"/>
+                      </a:endParaRPr>
+                    </a:p>
+                  </a:txBody>
+                  <a:tcPr marL="91440" marR="91440" marT="45720" marB="45720" anchor="ctr">
+                    <a:lnL w="6350" cap="flat" cmpd="sng" algn="ctr">
+                      <a:solidFill>
+                        <a:srgbClr val="DCE4EC"/>
+                      </a:solidFill>
+                      <a:prstDash val="solid"/>
+                      <a:round/>
+                      <a:headEnd type="none" w="med" len="med"/>
+                      <a:tailEnd type="none" w="med" len="med"/>
+                    </a:lnL>
+                    <a:lnR w="6350" cap="flat" cmpd="sng" algn="ctr">
+                      <a:solidFill>
+                        <a:srgbClr val="DCE4EC"/>
+                      </a:solidFill>
+                      <a:prstDash val="solid"/>
+                      <a:round/>
+                      <a:headEnd type="none" w="med" len="med"/>
+                      <a:tailEnd type="none" w="med" len="med"/>
+                    </a:lnR>
+                    <a:lnT w="6350" cap="flat" cmpd="sng" algn="ctr">
+                      <a:solidFill>
+                        <a:srgbClr val="DCE4EC"/>
+                      </a:solidFill>
+                      <a:prstDash val="solid"/>
+                      <a:round/>
+                      <a:headEnd type="none" w="med" len="med"/>
+                      <a:tailEnd type="none" w="med" len="med"/>
+                    </a:lnT>
+                    <a:lnB w="6350" cap="flat" cmpd="sng" algn="ctr">
+                      <a:solidFill>
+                        <a:srgbClr val="DCE4EC"/>
+                      </a:solidFill>
+                      <a:prstDash val="solid"/>
+                      <a:round/>
+                      <a:headEnd type="none" w="med" len="med"/>
+                      <a:tailEnd type="none" w="med" len="med"/>
+                    </a:lnB>
+                  </a:tcPr>
+                </a:tc>
+              </a:tr>
+            </a:tbl>
+          </a:graphicData>
+        </a:graphic>
+      </p:graphicFrame>
+      <p:sp>
+        <p:nvSpPr>
+          <p:cNvPr id="7" name="Text 3"/>
+          <p:cNvSpPr/>
+          <p:nvPr/>
+        </p:nvSpPr>
+        <p:spPr>
+          <a:xfrm>
+            <a:off x="566928" y="6172200"/>
+            <a:ext cx="11027664" cy="502920"/>
+          </a:xfrm>
+          <a:prstGeom prst="rect">
+            <a:avLst/>
+          </a:prstGeom>
+          <a:noFill/>
+          <a:ln/>
+        </p:spPr>
+        <p:txBody>
+          <a:bodyPr wrap="square" lIns="0" tIns="0" rIns="0" bIns="0" rtlCol="0" anchor="ctr"/>
+          <a:lstStyle/>
+          <a:p>
+            <a:pPr indent="0" marL="0">
+              <a:lnSpc>
+                <a:spcPts val="1200"/>
+              </a:lnSpc>
+              <a:buNone/>
+            </a:pPr>
+            <a:r>
+              <a:rPr lang="en-US" sz="950" i="1" dirty="0">
+                <a:solidFill>
+                  <a:srgbClr val="63748A"/>
+                </a:solidFill>
+                <a:latin typeface="Calibri" pitchFamily="34" charset="0"/>
+                <a:ea typeface="Calibri" pitchFamily="34" charset="-122"/>
+                <a:cs typeface="Calibri" pitchFamily="34" charset="-120"/>
+              </a:rPr>
+              <a:t>BepiPred-2.0 linear B-cell propensity is the weakest model in this pipeline — most real ADA epitopes are conformational. This layer prioritises regions; it is never a standalone claim.</a:t>
+            </a:r>
+            <a:endParaRPr lang="en-US" sz="950" dirty="0"/>
+          </a:p>
+        </p:txBody>
+      </p:sp>
+    </p:spTree>
+  </p:cSld>
+  <p:clrMapOvr>
+    <a:masterClrMapping/>
+  </p:clrMapOvr>
+</p:sld>
+</file>
+
+<file path=ppt/slides/slide11.xml><?xml version="1.0" encoding="utf-8"?>
+<p:sld xmlns:a="http://schemas.openxmlformats.org/drawingml/2006/main" xmlns:r="http://schemas.openxmlformats.org/officeDocument/2006/relationships" xmlns:p="http://schemas.openxmlformats.org/presentationml/2006/main">
+  <p:cSld name="Slide 11">
+    <p:bg>
+      <p:bgPr>
+        <a:solidFill>
+          <a:srgbClr val="FFFFFF"/>
+        </a:solidFill>
+      </p:bgPr>
+    </p:bg>
+    <p:spTree>
+      <p:nvGrpSpPr>
+        <p:cNvPr id="1" name=""/>
+        <p:cNvGrpSpPr/>
+        <p:nvPr/>
+      </p:nvGrpSpPr>
+      <p:grpSpPr>
+        <a:xfrm>
+          <a:off x="0" y="0"/>
+          <a:ext cx="0" cy="0"/>
+          <a:chOff x="0" y="0"/>
+          <a:chExt cx="0" cy="0"/>
+        </a:xfrm>
+      </p:grpSpPr>
+      <p:sp>
+        <p:nvSpPr>
+          <p:cNvPr id="2" name="Text 0"/>
+          <p:cNvSpPr/>
+          <p:nvPr/>
+        </p:nvSpPr>
+        <p:spPr>
+          <a:xfrm>
+            <a:off x="566928" y="310896"/>
+            <a:ext cx="11027664" cy="219456"/>
+          </a:xfrm>
+          <a:prstGeom prst="rect">
+            <a:avLst/>
+          </a:prstGeom>
+          <a:noFill/>
+          <a:ln/>
+        </p:spPr>
+        <p:txBody>
+          <a:bodyPr wrap="square" lIns="0" tIns="0" rIns="0" bIns="0" rtlCol="0" anchor="ctr"/>
+          <a:lstStyle/>
+          <a:p>
+            <a:pPr indent="0" marL="0">
+              <a:buNone/>
+            </a:pPr>
+            <a:r>
+              <a:rPr lang="en-US" sz="1050" b="1" spc="160" kern="0" dirty="0">
+                <a:solidFill>
+                  <a:srgbClr val="2F6F9F"/>
+                </a:solidFill>
+                <a:latin typeface="Calibri" pitchFamily="34" charset="0"/>
+                <a:ea typeface="Calibri" pitchFamily="34" charset="-122"/>
+                <a:cs typeface="Calibri" pitchFamily="34" charset="-120"/>
+              </a:rPr>
               <a:t>MODULE 8 · EXPOSURE CONTEXT</a:t>
             </a:r>
             <a:endParaRPr lang="en-US" sz="1050" dirty="0"/>
@@ -2145,7 +3288,7 @@
       </p:sp>
       <p:graphicFrame>
         <p:nvGraphicFramePr>
-          <p:cNvPr id="11" name="Table 0"/>
+          <p:cNvPr id="12" name="Table 0"/>
           <p:cNvGraphicFramePr>
             <a:graphicFrameLocks noGrp="1"/>
           </p:cNvGraphicFramePr>
@@ -3852,9 +4995,9 @@
 </p:sld>
 </file>
 
-<file path=ppt/slides/slide11.xml><?xml version="1.0" encoding="utf-8"?>
+<file path=ppt/slides/slide12.xml><?xml version="1.0" encoding="utf-8"?>
 <p:sld xmlns:a="http://schemas.openxmlformats.org/drawingml/2006/main" xmlns:r="http://schemas.openxmlformats.org/officeDocument/2006/relationships" xmlns:p="http://schemas.openxmlformats.org/presentationml/2006/main">
-  <p:cSld name="Slide 11">
+  <p:cSld name="Slide 12">
     <p:bg>
       <p:bgPr>
         <a:solidFill>
@@ -4069,7 +5212,7 @@
       </p:sp>
       <p:graphicFrame>
         <p:nvGraphicFramePr>
-          <p:cNvPr id="12" name="Table 0"/>
+          <p:cNvPr id="13" name="Table 0"/>
           <p:cNvGraphicFramePr>
             <a:graphicFrameLocks noGrp="1"/>
           </p:cNvGraphicFramePr>
@@ -8353,9 +9496,9 @@
 </p:sld>
 </file>
 
-<file path=ppt/slides/slide12.xml><?xml version="1.0" encoding="utf-8"?>
+<file path=ppt/slides/slide13.xml><?xml version="1.0" encoding="utf-8"?>
 <p:sld xmlns:a="http://schemas.openxmlformats.org/drawingml/2006/main" xmlns:r="http://schemas.openxmlformats.org/officeDocument/2006/relationships" xmlns:p="http://schemas.openxmlformats.org/presentationml/2006/main">
-  <p:cSld name="Slide 12">
+  <p:cSld name="Slide 13">
     <p:bg>
       <p:bgPr>
         <a:solidFill>
@@ -10242,7 +11385,7 @@
                 <a:ea typeface="Calibri" pitchFamily="34" charset="-122"/>
                 <a:cs typeface="Calibri" pitchFamily="34" charset="-120"/>
               </a:rPr>
-              <a:t>Requiring the binding-affinity head to agree with eluted-ligand scoring removed 16% of strong-binder calls across the batch — peptides that look presented but do not measurably bind.</a:t>
+              <a:t>Requiring the binding-affinity head to agree with eluted-ligand scoring removed 18% of strong-binder calls across the batch — peptides that look presented but do not measurably bind.</a:t>
             </a:r>
             <a:endParaRPr lang="en-US" sz="1150" dirty="0"/>
           </a:p>
@@ -10992,7 +12135,7 @@
                           <a:ea typeface="Calibri" pitchFamily="34" charset="-122"/>
                           <a:cs typeface="Calibri" pitchFamily="34" charset="-120"/>
                         </a:rPr>
-                        <a:t>Eluted-ligand scoring alone over-calls: it rewards motif-like peptides with poor measured affinity. Requiring EL and BA agreement dropped 16% of strong-binder calls.</a:t>
+                        <a:t>Eluted-ligand scoring alone over-calls: it rewards motif-like peptides with poor measured affinity. Requiring EL and BA agreement dropped 18% of strong-binder calls.</a:t>
                       </a:r>
                       <a:endParaRPr lang="en-US" sz="950" dirty="0">
                         <a:latin typeface="Calibri" charset="0"/>
@@ -12122,7 +13265,7 @@
                 <a:ea typeface="Cambria" pitchFamily="34" charset="-122"/>
                 <a:cs typeface="Cambria" pitchFamily="34" charset="-120"/>
               </a:rPr>
-              <a:t>203 → 170   </a:t>
+              <a:t>266 → 218   </a:t>
             </a:r>
             <a:pPr indent="0" marL="0">
               <a:lnSpc>
@@ -12139,7 +13282,7 @@
                 <a:ea typeface="Calibri" pitchFamily="34" charset="-122"/>
                 <a:cs typeface="Calibri" pitchFamily="34" charset="-120"/>
               </a:rPr>
-              <a:t>strong-binder calls across the batch once the binding-affinity head has to agree with eluted-ligand scoring (BA %Rank &lt; 10). 16% of EL-only calls are peptides that look presented but do not measurably bind; every downstream number uses the consensus call.</a:t>
+              <a:t>strong-binder calls across the batch once the binding-affinity head has to agree with eluted-ligand scoring (BA %Rank &lt; 10). 18% of EL-only calls are peptides that look presented but do not measurably bind; every downstream number uses the consensus call.</a:t>
             </a:r>
             <a:endParaRPr lang="en-US" sz="1200" dirty="0"/>
           </a:p>
@@ -12357,7 +13500,7 @@
                 <a:ea typeface="Cambria" pitchFamily="34" charset="-122"/>
                 <a:cs typeface="Cambria" pitchFamily="34" charset="-120"/>
               </a:rPr>
-              <a:t>17.6%</a:t>
+              <a:t>20.9%</a:t>
             </a:r>
             <a:endParaRPr lang="en-US" sz="2600" dirty="0"/>
           </a:p>
@@ -12504,7 +13647,7 @@
                 <a:ea typeface="Cambria" pitchFamily="34" charset="-122"/>
                 <a:cs typeface="Cambria" pitchFamily="34" charset="-120"/>
               </a:rPr>
-              <a:t>4.7%</a:t>
+              <a:t>3.8%</a:t>
             </a:r>
             <a:endParaRPr lang="en-US" sz="2600" dirty="0"/>
           </a:p>
@@ -12651,7 +13794,7 @@
                 <a:ea typeface="Cambria" pitchFamily="34" charset="-122"/>
                 <a:cs typeface="Cambria" pitchFamily="34" charset="-120"/>
               </a:rPr>
-              <a:t>20.14×</a:t>
+              <a:t>27.21×</a:t>
             </a:r>
             <a:endParaRPr lang="en-US" sz="2600" dirty="0"/>
           </a:p>
@@ -12732,7 +13875,7 @@
                 <a:ea typeface="Calibri" pitchFamily="34" charset="-122"/>
                 <a:cs typeface="Calibri" pitchFamily="34" charset="-120"/>
               </a:rPr>
-              <a:t>real cores 22.4% vs shuffled-sequence null 1.1%</a:t>
+              <a:t>real cores 24.8% vs shuffled-sequence null 0.9%</a:t>
             </a:r>
             <a:endParaRPr lang="en-US" sz="950" dirty="0"/>
           </a:p>
@@ -12792,7 +13935,7 @@
                 <a:ea typeface="Calibri" pitchFamily="34" charset="-122"/>
                 <a:cs typeface="Calibri" pitchFamily="34" charset="-120"/>
               </a:rPr>
-              <a:t>Re-running the identical screen on cores drawn from shuffled versions of the same sequences — same composition, no real self-similarity — gives 1.1% at the 8/9 cut against 22.4% for real cores. A 5-of-9 "TCR-face" screen, the obvious shortcut, was tried first and discarded: with only five positions specified it matches the human proteome by chance several times per query and flags nearly everything.</a:t>
+              <a:t>Re-running the identical screen on cores drawn from shuffled versions of the same sequences — same composition, no real self-similarity — gives 0.9% at the 8/9 cut against 24.8% for real cores. A 5-of-9 "TCR-face" screen, the obvious shortcut, was tried first and discarded: with only five positions specified it matches the human proteome by chance several times per query and flags nearly everything.</a:t>
             </a:r>
             <a:endParaRPr lang="en-US" sz="1300" dirty="0"/>
           </a:p>
@@ -12974,6 +14117,1785 @@
                 <a:ea typeface="Calibri" pitchFamily="34" charset="-122"/>
                 <a:cs typeface="Calibri" pitchFamily="34" charset="-120"/>
               </a:rPr>
+              <a:t>MODULE 4 · BOUNDARY CONTROLS</a:t>
+            </a:r>
+            <a:endParaRPr lang="en-US" sz="1050" dirty="0"/>
+          </a:p>
+        </p:txBody>
+      </p:sp>
+      <p:sp>
+        <p:nvSpPr>
+          <p:cNvPr id="3" name="Text 1"/>
+          <p:cNvSpPr/>
+          <p:nvPr/>
+        </p:nvSpPr>
+        <p:spPr>
+          <a:xfrm>
+            <a:off x="566928" y="548640"/>
+            <a:ext cx="11027664" cy="548640"/>
+          </a:xfrm>
+          <a:prstGeom prst="rect">
+            <a:avLst/>
+          </a:prstGeom>
+          <a:noFill/>
+          <a:ln/>
+        </p:spPr>
+        <p:txBody>
+          <a:bodyPr wrap="square" lIns="0" tIns="0" rIns="0" bIns="0" rtlCol="0" anchor="ctr"/>
+          <a:lstStyle/>
+          <a:p>
+            <a:pPr indent="0" marL="0">
+              <a:buNone/>
+            </a:pPr>
+            <a:r>
+              <a:rPr lang="en-US" sz="2700" b="1" dirty="0">
+                <a:solidFill>
+                  <a:srgbClr val="12212E"/>
+                </a:solidFill>
+                <a:latin typeface="Cambria" pitchFamily="34" charset="0"/>
+                <a:ea typeface="Cambria" pitchFamily="34" charset="-122"/>
+                <a:cs typeface="Cambria" pitchFamily="34" charset="-120"/>
+              </a:rPr>
+              <a:t>Where the filter is wrong, measured</a:t>
+            </a:r>
+            <a:endParaRPr lang="en-US" sz="2700" dirty="0"/>
+          </a:p>
+        </p:txBody>
+      </p:sp>
+      <p:sp>
+        <p:nvSpPr>
+          <p:cNvPr id="4" name="Text 2"/>
+          <p:cNvSpPr/>
+          <p:nvPr/>
+        </p:nvSpPr>
+        <p:spPr>
+          <a:xfrm>
+            <a:off x="566928" y="1170432"/>
+            <a:ext cx="11027664" cy="457200"/>
+          </a:xfrm>
+          <a:prstGeom prst="rect">
+            <a:avLst/>
+          </a:prstGeom>
+          <a:noFill/>
+          <a:ln/>
+        </p:spPr>
+        <p:txBody>
+          <a:bodyPr wrap="square" lIns="0" tIns="0" rIns="0" bIns="0" rtlCol="0" anchor="ctr"/>
+          <a:lstStyle/>
+          <a:p>
+            <a:pPr indent="0" marL="0">
+              <a:lnSpc>
+                <a:spcPts val="1600"/>
+              </a:lnSpc>
+              <a:buNone/>
+            </a:pPr>
+            <a:r>
+              <a:rPr lang="en-US" sz="1200" dirty="0">
+                <a:solidFill>
+                  <a:srgbClr val="12212E"/>
+                </a:solidFill>
+                <a:latin typeface="Calibri" pitchFamily="34" charset="0"/>
+                <a:ea typeface="Calibri" pitchFamily="34" charset="-122"/>
+                <a:cs typeface="Calibri" pitchFamily="34" charset="-120"/>
+              </a:rPr>
+              <a:t>The filter's rule is “self implies tolerated”. That is right often enough to be worth applying and wrong often enough to be worth measuring, so the batch carries two controls that sit on the boundary.</a:t>
+            </a:r>
+            <a:endParaRPr lang="en-US" sz="1200" dirty="0"/>
+          </a:p>
+        </p:txBody>
+      </p:sp>
+      <p:graphicFrame>
+        <p:nvGraphicFramePr>
+          <p:cNvPr id="8" name="Table 0"/>
+          <p:cNvGraphicFramePr>
+            <a:graphicFrameLocks noGrp="1"/>
+          </p:cNvGraphicFramePr>
+          <p:nvPr>
+            <p:extLst>
+              <p:ext uri="{D42A27DB-BD31-4B8C-83A1-F6EECF244321}">
+                <p14:modId xmlns:p14="http://schemas.microsoft.com/office/powerpoint/2010/main" val="1579011935"/>
+              </p:ext>
+            </p:extLst>
+          </p:nvPr>
+        </p:nvGraphicFramePr>
+        <p:xfrm>
+          <a:off x="566928" y="1783080"/>
+          <a:ext cx="11027664" cy="914400"/>
+        </p:xfrm>
+        <a:graphic>
+          <a:graphicData uri="http://schemas.openxmlformats.org/drawingml/2006/table">
+            <a:tbl>
+              <a:tblPr/>
+              <a:tblGrid>
+                <a:gridCol w="2286000"/>
+                <a:gridCol w="2011680"/>
+                <a:gridCol w="1371600"/>
+                <a:gridCol w="914400"/>
+                <a:gridCol w="1463040"/>
+                <a:gridCol w="1463040"/>
+                <a:gridCol w="1517904"/>
+              </a:tblGrid>
+              <a:tr h="347472">
+                <a:tc>
+                  <a:txBody>
+                    <a:bodyPr/>
+                    <a:lstStyle/>
+                    <a:p>
+                      <a:pPr indent="0" marL="0">
+                        <a:buNone/>
+                      </a:pPr>
+                      <a:r>
+                        <a:rPr lang="en-US" sz="850" b="1" spc="60" kern="0" dirty="0">
+                          <a:solidFill>
+                            <a:srgbClr val="63748A"/>
+                          </a:solidFill>
+                          <a:latin typeface="Calibri" pitchFamily="34" charset="0"/>
+                          <a:ea typeface="Calibri" pitchFamily="34" charset="-122"/>
+                          <a:cs typeface="Calibri" pitchFamily="34" charset="-120"/>
+                        </a:rPr>
+                        <a:t>Control</a:t>
+                      </a:r>
+                      <a:endParaRPr lang="en-US" sz="850" dirty="0">
+                        <a:latin typeface="Calibri" charset="0"/>
+                        <a:ea typeface="Calibri" charset="0"/>
+                        <a:cs typeface="Calibri" charset="0"/>
+                      </a:endParaRPr>
+                    </a:p>
+                  </a:txBody>
+                  <a:tcPr marL="91440" marR="91440" marT="45720" marB="45720" anchor="ctr">
+                    <a:lnL w="6350" cap="flat" cmpd="sng" algn="ctr">
+                      <a:solidFill>
+                        <a:srgbClr val="DCE4EC"/>
+                      </a:solidFill>
+                      <a:prstDash val="solid"/>
+                      <a:round/>
+                      <a:headEnd type="none" w="med" len="med"/>
+                      <a:tailEnd type="none" w="med" len="med"/>
+                    </a:lnL>
+                    <a:lnR w="6350" cap="flat" cmpd="sng" algn="ctr">
+                      <a:solidFill>
+                        <a:srgbClr val="DCE4EC"/>
+                      </a:solidFill>
+                      <a:prstDash val="solid"/>
+                      <a:round/>
+                      <a:headEnd type="none" w="med" len="med"/>
+                      <a:tailEnd type="none" w="med" len="med"/>
+                    </a:lnR>
+                    <a:lnT w="6350" cap="flat" cmpd="sng" algn="ctr">
+                      <a:solidFill>
+                        <a:srgbClr val="DCE4EC"/>
+                      </a:solidFill>
+                      <a:prstDash val="solid"/>
+                      <a:round/>
+                      <a:headEnd type="none" w="med" len="med"/>
+                      <a:tailEnd type="none" w="med" len="med"/>
+                    </a:lnT>
+                    <a:lnB w="6350" cap="flat" cmpd="sng" algn="ctr">
+                      <a:solidFill>
+                        <a:srgbClr val="DCE4EC"/>
+                      </a:solidFill>
+                      <a:prstDash val="solid"/>
+                      <a:round/>
+                      <a:headEnd type="none" w="med" len="med"/>
+                      <a:tailEnd type="none" w="med" len="med"/>
+                    </a:lnB>
+                    <a:solidFill>
+                      <a:srgbClr val="F2F6F9"/>
+                    </a:solidFill>
+                  </a:tcPr>
+                </a:tc>
+                <a:tc>
+                  <a:txBody>
+                    <a:bodyPr/>
+                    <a:lstStyle/>
+                    <a:p>
+                      <a:pPr indent="0" marL="0">
+                        <a:buNone/>
+                      </a:pPr>
+                      <a:r>
+                        <a:rPr lang="en-US" sz="850" b="1" spc="60" kern="0" dirty="0">
+                          <a:solidFill>
+                            <a:srgbClr val="63748A"/>
+                          </a:solidFill>
+                          <a:latin typeface="Calibri" pitchFamily="34" charset="0"/>
+                          <a:ea typeface="Calibri" pitchFamily="34" charset="-122"/>
+                          <a:cs typeface="Calibri" pitchFamily="34" charset="-120"/>
+                        </a:rPr>
+                        <a:t>Role</a:t>
+                      </a:r>
+                      <a:endParaRPr lang="en-US" sz="850" dirty="0">
+                        <a:latin typeface="Calibri" charset="0"/>
+                        <a:ea typeface="Calibri" charset="0"/>
+                        <a:cs typeface="Calibri" charset="0"/>
+                      </a:endParaRPr>
+                    </a:p>
+                  </a:txBody>
+                  <a:tcPr marL="91440" marR="91440" marT="45720" marB="45720" anchor="ctr">
+                    <a:lnL w="6350" cap="flat" cmpd="sng" algn="ctr">
+                      <a:solidFill>
+                        <a:srgbClr val="DCE4EC"/>
+                      </a:solidFill>
+                      <a:prstDash val="solid"/>
+                      <a:round/>
+                      <a:headEnd type="none" w="med" len="med"/>
+                      <a:tailEnd type="none" w="med" len="med"/>
+                    </a:lnL>
+                    <a:lnR w="6350" cap="flat" cmpd="sng" algn="ctr">
+                      <a:solidFill>
+                        <a:srgbClr val="DCE4EC"/>
+                      </a:solidFill>
+                      <a:prstDash val="solid"/>
+                      <a:round/>
+                      <a:headEnd type="none" w="med" len="med"/>
+                      <a:tailEnd type="none" w="med" len="med"/>
+                    </a:lnR>
+                    <a:lnT w="6350" cap="flat" cmpd="sng" algn="ctr">
+                      <a:solidFill>
+                        <a:srgbClr val="DCE4EC"/>
+                      </a:solidFill>
+                      <a:prstDash val="solid"/>
+                      <a:round/>
+                      <a:headEnd type="none" w="med" len="med"/>
+                      <a:tailEnd type="none" w="med" len="med"/>
+                    </a:lnT>
+                    <a:lnB w="6350" cap="flat" cmpd="sng" algn="ctr">
+                      <a:solidFill>
+                        <a:srgbClr val="DCE4EC"/>
+                      </a:solidFill>
+                      <a:prstDash val="solid"/>
+                      <a:round/>
+                      <a:headEnd type="none" w="med" len="med"/>
+                      <a:tailEnd type="none" w="med" len="med"/>
+                    </a:lnB>
+                    <a:solidFill>
+                      <a:srgbClr val="F2F6F9"/>
+                    </a:solidFill>
+                  </a:tcPr>
+                </a:tc>
+                <a:tc>
+                  <a:txBody>
+                    <a:bodyPr/>
+                    <a:lstStyle/>
+                    <a:p>
+                      <a:pPr indent="0" marL="0">
+                        <a:buNone/>
+                      </a:pPr>
+                      <a:r>
+                        <a:rPr lang="en-US" sz="850" b="1" spc="60" kern="0" dirty="0">
+                          <a:solidFill>
+                            <a:srgbClr val="63748A"/>
+                          </a:solidFill>
+                          <a:latin typeface="Calibri" pitchFamily="34" charset="0"/>
+                          <a:ea typeface="Calibri" pitchFamily="34" charset="-122"/>
+                          <a:cs typeface="Calibri" pitchFamily="34" charset="-120"/>
+                        </a:rPr>
+                        <a:t>DR at %Rank&lt;1</a:t>
+                      </a:r>
+                      <a:endParaRPr lang="en-US" sz="850" dirty="0">
+                        <a:latin typeface="Calibri" charset="0"/>
+                        <a:ea typeface="Calibri" charset="0"/>
+                        <a:cs typeface="Calibri" charset="0"/>
+                      </a:endParaRPr>
+                    </a:p>
+                  </a:txBody>
+                  <a:tcPr marL="91440" marR="91440" marT="45720" marB="45720" anchor="ctr">
+                    <a:lnL w="6350" cap="flat" cmpd="sng" algn="ctr">
+                      <a:solidFill>
+                        <a:srgbClr val="DCE4EC"/>
+                      </a:solidFill>
+                      <a:prstDash val="solid"/>
+                      <a:round/>
+                      <a:headEnd type="none" w="med" len="med"/>
+                      <a:tailEnd type="none" w="med" len="med"/>
+                    </a:lnL>
+                    <a:lnR w="6350" cap="flat" cmpd="sng" algn="ctr">
+                      <a:solidFill>
+                        <a:srgbClr val="DCE4EC"/>
+                      </a:solidFill>
+                      <a:prstDash val="solid"/>
+                      <a:round/>
+                      <a:headEnd type="none" w="med" len="med"/>
+                      <a:tailEnd type="none" w="med" len="med"/>
+                    </a:lnR>
+                    <a:lnT w="6350" cap="flat" cmpd="sng" algn="ctr">
+                      <a:solidFill>
+                        <a:srgbClr val="DCE4EC"/>
+                      </a:solidFill>
+                      <a:prstDash val="solid"/>
+                      <a:round/>
+                      <a:headEnd type="none" w="med" len="med"/>
+                      <a:tailEnd type="none" w="med" len="med"/>
+                    </a:lnT>
+                    <a:lnB w="6350" cap="flat" cmpd="sng" algn="ctr">
+                      <a:solidFill>
+                        <a:srgbClr val="DCE4EC"/>
+                      </a:solidFill>
+                      <a:prstDash val="solid"/>
+                      <a:round/>
+                      <a:headEnd type="none" w="med" len="med"/>
+                      <a:tailEnd type="none" w="med" len="med"/>
+                    </a:lnB>
+                    <a:solidFill>
+                      <a:srgbClr val="F2F6F9"/>
+                    </a:solidFill>
+                  </a:tcPr>
+                </a:tc>
+                <a:tc>
+                  <a:txBody>
+                    <a:bodyPr/>
+                    <a:lstStyle/>
+                    <a:p>
+                      <a:pPr indent="0" marL="0">
+                        <a:buNone/>
+                      </a:pPr>
+                      <a:r>
+                        <a:rPr lang="en-US" sz="850" b="1" spc="60" kern="0" dirty="0">
+                          <a:solidFill>
+                            <a:srgbClr val="63748A"/>
+                          </a:solidFill>
+                          <a:latin typeface="Calibri" pitchFamily="34" charset="0"/>
+                          <a:ea typeface="Calibri" pitchFamily="34" charset="-122"/>
+                          <a:cs typeface="Calibri" pitchFamily="34" charset="-120"/>
+                        </a:rPr>
+                        <a:t>at &lt;5</a:t>
+                      </a:r>
+                      <a:endParaRPr lang="en-US" sz="850" dirty="0">
+                        <a:latin typeface="Calibri" charset="0"/>
+                        <a:ea typeface="Calibri" charset="0"/>
+                        <a:cs typeface="Calibri" charset="0"/>
+                      </a:endParaRPr>
+                    </a:p>
+                  </a:txBody>
+                  <a:tcPr marL="91440" marR="91440" marT="45720" marB="45720" anchor="ctr">
+                    <a:lnL w="6350" cap="flat" cmpd="sng" algn="ctr">
+                      <a:solidFill>
+                        <a:srgbClr val="DCE4EC"/>
+                      </a:solidFill>
+                      <a:prstDash val="solid"/>
+                      <a:round/>
+                      <a:headEnd type="none" w="med" len="med"/>
+                      <a:tailEnd type="none" w="med" len="med"/>
+                    </a:lnL>
+                    <a:lnR w="6350" cap="flat" cmpd="sng" algn="ctr">
+                      <a:solidFill>
+                        <a:srgbClr val="DCE4EC"/>
+                      </a:solidFill>
+                      <a:prstDash val="solid"/>
+                      <a:round/>
+                      <a:headEnd type="none" w="med" len="med"/>
+                      <a:tailEnd type="none" w="med" len="med"/>
+                    </a:lnR>
+                    <a:lnT w="6350" cap="flat" cmpd="sng" algn="ctr">
+                      <a:solidFill>
+                        <a:srgbClr val="DCE4EC"/>
+                      </a:solidFill>
+                      <a:prstDash val="solid"/>
+                      <a:round/>
+                      <a:headEnd type="none" w="med" len="med"/>
+                      <a:tailEnd type="none" w="med" len="med"/>
+                    </a:lnT>
+                    <a:lnB w="6350" cap="flat" cmpd="sng" algn="ctr">
+                      <a:solidFill>
+                        <a:srgbClr val="DCE4EC"/>
+                      </a:solidFill>
+                      <a:prstDash val="solid"/>
+                      <a:round/>
+                      <a:headEnd type="none" w="med" len="med"/>
+                      <a:tailEnd type="none" w="med" len="med"/>
+                    </a:lnB>
+                    <a:solidFill>
+                      <a:srgbClr val="F2F6F9"/>
+                    </a:solidFill>
+                  </a:tcPr>
+                </a:tc>
+                <a:tc>
+                  <a:txBody>
+                    <a:bodyPr/>
+                    <a:lstStyle/>
+                    <a:p>
+                      <a:pPr indent="0" marL="0">
+                        <a:buNone/>
+                      </a:pPr>
+                      <a:r>
+                        <a:rPr lang="en-US" sz="850" b="1" spc="60" kern="0" dirty="0">
+                          <a:solidFill>
+                            <a:srgbClr val="63748A"/>
+                          </a:solidFill>
+                          <a:latin typeface="Calibri" pitchFamily="34" charset="0"/>
+                          <a:ea typeface="Calibri" pitchFamily="34" charset="-122"/>
+                          <a:cs typeface="Calibri" pitchFamily="34" charset="-120"/>
+                        </a:rPr>
+                        <a:t>Cores tolerised</a:t>
+                      </a:r>
+                      <a:endParaRPr lang="en-US" sz="850" dirty="0">
+                        <a:latin typeface="Calibri" charset="0"/>
+                        <a:ea typeface="Calibri" charset="0"/>
+                        <a:cs typeface="Calibri" charset="0"/>
+                      </a:endParaRPr>
+                    </a:p>
+                  </a:txBody>
+                  <a:tcPr marL="91440" marR="91440" marT="45720" marB="45720" anchor="ctr">
+                    <a:lnL w="6350" cap="flat" cmpd="sng" algn="ctr">
+                      <a:solidFill>
+                        <a:srgbClr val="DCE4EC"/>
+                      </a:solidFill>
+                      <a:prstDash val="solid"/>
+                      <a:round/>
+                      <a:headEnd type="none" w="med" len="med"/>
+                      <a:tailEnd type="none" w="med" len="med"/>
+                    </a:lnL>
+                    <a:lnR w="6350" cap="flat" cmpd="sng" algn="ctr">
+                      <a:solidFill>
+                        <a:srgbClr val="DCE4EC"/>
+                      </a:solidFill>
+                      <a:prstDash val="solid"/>
+                      <a:round/>
+                      <a:headEnd type="none" w="med" len="med"/>
+                      <a:tailEnd type="none" w="med" len="med"/>
+                    </a:lnR>
+                    <a:lnT w="6350" cap="flat" cmpd="sng" algn="ctr">
+                      <a:solidFill>
+                        <a:srgbClr val="DCE4EC"/>
+                      </a:solidFill>
+                      <a:prstDash val="solid"/>
+                      <a:round/>
+                      <a:headEnd type="none" w="med" len="med"/>
+                      <a:tailEnd type="none" w="med" len="med"/>
+                    </a:lnT>
+                    <a:lnB w="6350" cap="flat" cmpd="sng" algn="ctr">
+                      <a:solidFill>
+                        <a:srgbClr val="DCE4EC"/>
+                      </a:solidFill>
+                      <a:prstDash val="solid"/>
+                      <a:round/>
+                      <a:headEnd type="none" w="med" len="med"/>
+                      <a:tailEnd type="none" w="med" len="med"/>
+                    </a:lnB>
+                    <a:solidFill>
+                      <a:srgbClr val="F2F6F9"/>
+                    </a:solidFill>
+                  </a:tcPr>
+                </a:tc>
+                <a:tc>
+                  <a:txBody>
+                    <a:bodyPr/>
+                    <a:lstStyle/>
+                    <a:p>
+                      <a:pPr indent="0" marL="0">
+                        <a:buNone/>
+                      </a:pPr>
+                      <a:r>
+                        <a:rPr lang="en-US" sz="850" b="1" spc="60" kern="0" dirty="0">
+                          <a:solidFill>
+                            <a:srgbClr val="63748A"/>
+                          </a:solidFill>
+                          <a:latin typeface="Calibri" pitchFamily="34" charset="0"/>
+                          <a:ea typeface="Calibri" pitchFamily="34" charset="-122"/>
+                          <a:cs typeface="Calibri" pitchFamily="34" charset="-120"/>
+                        </a:rPr>
+                        <a:t>pIRS unfiltered</a:t>
+                      </a:r>
+                      <a:endParaRPr lang="en-US" sz="850" dirty="0">
+                        <a:latin typeface="Calibri" charset="0"/>
+                        <a:ea typeface="Calibri" charset="0"/>
+                        <a:cs typeface="Calibri" charset="0"/>
+                      </a:endParaRPr>
+                    </a:p>
+                  </a:txBody>
+                  <a:tcPr marL="91440" marR="91440" marT="45720" marB="45720" anchor="ctr">
+                    <a:lnL w="6350" cap="flat" cmpd="sng" algn="ctr">
+                      <a:solidFill>
+                        <a:srgbClr val="DCE4EC"/>
+                      </a:solidFill>
+                      <a:prstDash val="solid"/>
+                      <a:round/>
+                      <a:headEnd type="none" w="med" len="med"/>
+                      <a:tailEnd type="none" w="med" len="med"/>
+                    </a:lnL>
+                    <a:lnR w="6350" cap="flat" cmpd="sng" algn="ctr">
+                      <a:solidFill>
+                        <a:srgbClr val="DCE4EC"/>
+                      </a:solidFill>
+                      <a:prstDash val="solid"/>
+                      <a:round/>
+                      <a:headEnd type="none" w="med" len="med"/>
+                      <a:tailEnd type="none" w="med" len="med"/>
+                    </a:lnR>
+                    <a:lnT w="6350" cap="flat" cmpd="sng" algn="ctr">
+                      <a:solidFill>
+                        <a:srgbClr val="DCE4EC"/>
+                      </a:solidFill>
+                      <a:prstDash val="solid"/>
+                      <a:round/>
+                      <a:headEnd type="none" w="med" len="med"/>
+                      <a:tailEnd type="none" w="med" len="med"/>
+                    </a:lnT>
+                    <a:lnB w="6350" cap="flat" cmpd="sng" algn="ctr">
+                      <a:solidFill>
+                        <a:srgbClr val="DCE4EC"/>
+                      </a:solidFill>
+                      <a:prstDash val="solid"/>
+                      <a:round/>
+                      <a:headEnd type="none" w="med" len="med"/>
+                      <a:tailEnd type="none" w="med" len="med"/>
+                    </a:lnB>
+                    <a:solidFill>
+                      <a:srgbClr val="F2F6F9"/>
+                    </a:solidFill>
+                  </a:tcPr>
+                </a:tc>
+                <a:tc>
+                  <a:txBody>
+                    <a:bodyPr/>
+                    <a:lstStyle/>
+                    <a:p>
+                      <a:pPr indent="0" marL="0">
+                        <a:buNone/>
+                      </a:pPr>
+                      <a:r>
+                        <a:rPr lang="en-US" sz="850" b="1" spc="60" kern="0" dirty="0">
+                          <a:solidFill>
+                            <a:srgbClr val="63748A"/>
+                          </a:solidFill>
+                          <a:latin typeface="Calibri" pitchFamily="34" charset="0"/>
+                          <a:ea typeface="Calibri" pitchFamily="34" charset="-122"/>
+                          <a:cs typeface="Calibri" pitchFamily="34" charset="-120"/>
+                        </a:rPr>
+                        <a:t>pIRS filtered</a:t>
+                      </a:r>
+                      <a:endParaRPr lang="en-US" sz="850" dirty="0">
+                        <a:latin typeface="Calibri" charset="0"/>
+                        <a:ea typeface="Calibri" charset="0"/>
+                        <a:cs typeface="Calibri" charset="0"/>
+                      </a:endParaRPr>
+                    </a:p>
+                  </a:txBody>
+                  <a:tcPr marL="91440" marR="91440" marT="45720" marB="45720" anchor="ctr">
+                    <a:lnL w="6350" cap="flat" cmpd="sng" algn="ctr">
+                      <a:solidFill>
+                        <a:srgbClr val="DCE4EC"/>
+                      </a:solidFill>
+                      <a:prstDash val="solid"/>
+                      <a:round/>
+                      <a:headEnd type="none" w="med" len="med"/>
+                      <a:tailEnd type="none" w="med" len="med"/>
+                    </a:lnL>
+                    <a:lnR w="6350" cap="flat" cmpd="sng" algn="ctr">
+                      <a:solidFill>
+                        <a:srgbClr val="DCE4EC"/>
+                      </a:solidFill>
+                      <a:prstDash val="solid"/>
+                      <a:round/>
+                      <a:headEnd type="none" w="med" len="med"/>
+                      <a:tailEnd type="none" w="med" len="med"/>
+                    </a:lnR>
+                    <a:lnT w="6350" cap="flat" cmpd="sng" algn="ctr">
+                      <a:solidFill>
+                        <a:srgbClr val="DCE4EC"/>
+                      </a:solidFill>
+                      <a:prstDash val="solid"/>
+                      <a:round/>
+                      <a:headEnd type="none" w="med" len="med"/>
+                      <a:tailEnd type="none" w="med" len="med"/>
+                    </a:lnT>
+                    <a:lnB w="6350" cap="flat" cmpd="sng" algn="ctr">
+                      <a:solidFill>
+                        <a:srgbClr val="DCE4EC"/>
+                      </a:solidFill>
+                      <a:prstDash val="solid"/>
+                      <a:round/>
+                      <a:headEnd type="none" w="med" len="med"/>
+                      <a:tailEnd type="none" w="med" len="med"/>
+                    </a:lnB>
+                    <a:solidFill>
+                      <a:srgbClr val="F2F6F9"/>
+                    </a:solidFill>
+                  </a:tcPr>
+                </a:tc>
+              </a:tr>
+              <a:tr h="347472">
+                <a:tc>
+                  <a:txBody>
+                    <a:bodyPr/>
+                    <a:lstStyle/>
+                    <a:p>
+                      <a:pPr indent="0" marL="0">
+                        <a:buNone/>
+                      </a:pPr>
+                      <a:r>
+                        <a:rPr lang="en-US" sz="900" b="1" dirty="0">
+                          <a:solidFill>
+                            <a:srgbClr val="12212E"/>
+                          </a:solidFill>
+                          <a:latin typeface="Courier New" pitchFamily="34" charset="0"/>
+                          <a:ea typeface="Courier New" pitchFamily="34" charset="-122"/>
+                          <a:cs typeface="Courier New" pitchFamily="34" charset="-120"/>
+                        </a:rPr>
+                        <a:t>MBP_85_99</a:t>
+                      </a:r>
+                      <a:endParaRPr lang="en-US" sz="900" dirty="0">
+                        <a:latin typeface="Courier New" charset="0"/>
+                        <a:ea typeface="Courier New" charset="0"/>
+                        <a:cs typeface="Courier New" charset="0"/>
+                      </a:endParaRPr>
+                    </a:p>
+                  </a:txBody>
+                  <a:tcPr marL="91440" marR="91440" marT="45720" marB="45720" anchor="ctr">
+                    <a:lnL w="6350" cap="flat" cmpd="sng" algn="ctr">
+                      <a:solidFill>
+                        <a:srgbClr val="DCE4EC"/>
+                      </a:solidFill>
+                      <a:prstDash val="solid"/>
+                      <a:round/>
+                      <a:headEnd type="none" w="med" len="med"/>
+                      <a:tailEnd type="none" w="med" len="med"/>
+                    </a:lnL>
+                    <a:lnR w="6350" cap="flat" cmpd="sng" algn="ctr">
+                      <a:solidFill>
+                        <a:srgbClr val="DCE4EC"/>
+                      </a:solidFill>
+                      <a:prstDash val="solid"/>
+                      <a:round/>
+                      <a:headEnd type="none" w="med" len="med"/>
+                      <a:tailEnd type="none" w="med" len="med"/>
+                    </a:lnR>
+                    <a:lnT w="6350" cap="flat" cmpd="sng" algn="ctr">
+                      <a:solidFill>
+                        <a:srgbClr val="DCE4EC"/>
+                      </a:solidFill>
+                      <a:prstDash val="solid"/>
+                      <a:round/>
+                      <a:headEnd type="none" w="med" len="med"/>
+                      <a:tailEnd type="none" w="med" len="med"/>
+                    </a:lnT>
+                    <a:lnB w="6350" cap="flat" cmpd="sng" algn="ctr">
+                      <a:solidFill>
+                        <a:srgbClr val="DCE4EC"/>
+                      </a:solidFill>
+                      <a:prstDash val="solid"/>
+                      <a:round/>
+                      <a:headEnd type="none" w="med" len="med"/>
+                      <a:tailEnd type="none" w="med" len="med"/>
+                    </a:lnB>
+                  </a:tcPr>
+                </a:tc>
+                <a:tc>
+                  <a:txBody>
+                    <a:bodyPr/>
+                    <a:lstStyle/>
+                    <a:p>
+                      <a:pPr indent="0" marL="0">
+                        <a:buNone/>
+                      </a:pPr>
+                      <a:r>
+                        <a:rPr lang="en-US" sz="900" dirty="0">
+                          <a:solidFill>
+                            <a:srgbClr val="C9752B"/>
+                          </a:solidFill>
+                          <a:latin typeface="Calibri" pitchFamily="34" charset="0"/>
+                          <a:ea typeface="Calibri" pitchFamily="34" charset="-122"/>
+                          <a:cs typeface="Calibri" pitchFamily="34" charset="-120"/>
+                        </a:rPr>
+                        <a:t>self immunogenic control</a:t>
+                      </a:r>
+                      <a:endParaRPr lang="en-US" sz="900" dirty="0">
+                        <a:latin typeface="Calibri" charset="0"/>
+                        <a:ea typeface="Calibri" charset="0"/>
+                        <a:cs typeface="Calibri" charset="0"/>
+                      </a:endParaRPr>
+                    </a:p>
+                  </a:txBody>
+                  <a:tcPr marL="91440" marR="91440" marT="45720" marB="45720" anchor="ctr">
+                    <a:lnL w="6350" cap="flat" cmpd="sng" algn="ctr">
+                      <a:solidFill>
+                        <a:srgbClr val="DCE4EC"/>
+                      </a:solidFill>
+                      <a:prstDash val="solid"/>
+                      <a:round/>
+                      <a:headEnd type="none" w="med" len="med"/>
+                      <a:tailEnd type="none" w="med" len="med"/>
+                    </a:lnL>
+                    <a:lnR w="6350" cap="flat" cmpd="sng" algn="ctr">
+                      <a:solidFill>
+                        <a:srgbClr val="DCE4EC"/>
+                      </a:solidFill>
+                      <a:prstDash val="solid"/>
+                      <a:round/>
+                      <a:headEnd type="none" w="med" len="med"/>
+                      <a:tailEnd type="none" w="med" len="med"/>
+                    </a:lnR>
+                    <a:lnT w="6350" cap="flat" cmpd="sng" algn="ctr">
+                      <a:solidFill>
+                        <a:srgbClr val="DCE4EC"/>
+                      </a:solidFill>
+                      <a:prstDash val="solid"/>
+                      <a:round/>
+                      <a:headEnd type="none" w="med" len="med"/>
+                      <a:tailEnd type="none" w="med" len="med"/>
+                    </a:lnT>
+                    <a:lnB w="6350" cap="flat" cmpd="sng" algn="ctr">
+                      <a:solidFill>
+                        <a:srgbClr val="DCE4EC"/>
+                      </a:solidFill>
+                      <a:prstDash val="solid"/>
+                      <a:round/>
+                      <a:headEnd type="none" w="med" len="med"/>
+                      <a:tailEnd type="none" w="med" len="med"/>
+                    </a:lnB>
+                  </a:tcPr>
+                </a:tc>
+                <a:tc>
+                  <a:txBody>
+                    <a:bodyPr/>
+                    <a:lstStyle/>
+                    <a:p>
+                      <a:pPr algn="r" indent="0" marL="0">
+                        <a:buNone/>
+                      </a:pPr>
+                      <a:r>
+                        <a:rPr lang="en-US" sz="1000" dirty="0">
+                          <a:solidFill>
+                            <a:srgbClr val="12212E"/>
+                          </a:solidFill>
+                          <a:latin typeface="Calibri" pitchFamily="34" charset="0"/>
+                          <a:ea typeface="Calibri" pitchFamily="34" charset="-122"/>
+                          <a:cs typeface="Calibri" pitchFamily="34" charset="-120"/>
+                        </a:rPr>
+                        <a:t>10/25</a:t>
+                      </a:r>
+                      <a:endParaRPr lang="en-US" sz="1000" dirty="0">
+                        <a:latin typeface="Calibri" charset="0"/>
+                        <a:ea typeface="Calibri" charset="0"/>
+                        <a:cs typeface="Calibri" charset="0"/>
+                      </a:endParaRPr>
+                    </a:p>
+                  </a:txBody>
+                  <a:tcPr marL="91440" marR="91440" marT="45720" marB="45720" anchor="ctr">
+                    <a:lnL w="6350" cap="flat" cmpd="sng" algn="ctr">
+                      <a:solidFill>
+                        <a:srgbClr val="DCE4EC"/>
+                      </a:solidFill>
+                      <a:prstDash val="solid"/>
+                      <a:round/>
+                      <a:headEnd type="none" w="med" len="med"/>
+                      <a:tailEnd type="none" w="med" len="med"/>
+                    </a:lnL>
+                    <a:lnR w="6350" cap="flat" cmpd="sng" algn="ctr">
+                      <a:solidFill>
+                        <a:srgbClr val="DCE4EC"/>
+                      </a:solidFill>
+                      <a:prstDash val="solid"/>
+                      <a:round/>
+                      <a:headEnd type="none" w="med" len="med"/>
+                      <a:tailEnd type="none" w="med" len="med"/>
+                    </a:lnR>
+                    <a:lnT w="6350" cap="flat" cmpd="sng" algn="ctr">
+                      <a:solidFill>
+                        <a:srgbClr val="DCE4EC"/>
+                      </a:solidFill>
+                      <a:prstDash val="solid"/>
+                      <a:round/>
+                      <a:headEnd type="none" w="med" len="med"/>
+                      <a:tailEnd type="none" w="med" len="med"/>
+                    </a:lnT>
+                    <a:lnB w="6350" cap="flat" cmpd="sng" algn="ctr">
+                      <a:solidFill>
+                        <a:srgbClr val="DCE4EC"/>
+                      </a:solidFill>
+                      <a:prstDash val="solid"/>
+                      <a:round/>
+                      <a:headEnd type="none" w="med" len="med"/>
+                      <a:tailEnd type="none" w="med" len="med"/>
+                    </a:lnB>
+                  </a:tcPr>
+                </a:tc>
+                <a:tc>
+                  <a:txBody>
+                    <a:bodyPr/>
+                    <a:lstStyle/>
+                    <a:p>
+                      <a:pPr algn="r" indent="0" marL="0">
+                        <a:buNone/>
+                      </a:pPr>
+                      <a:r>
+                        <a:rPr lang="en-US" sz="1000" dirty="0">
+                          <a:solidFill>
+                            <a:srgbClr val="12212E"/>
+                          </a:solidFill>
+                          <a:latin typeface="Calibri" pitchFamily="34" charset="0"/>
+                          <a:ea typeface="Calibri" pitchFamily="34" charset="-122"/>
+                          <a:cs typeface="Calibri" pitchFamily="34" charset="-120"/>
+                        </a:rPr>
+                        <a:t>20/25</a:t>
+                      </a:r>
+                      <a:endParaRPr lang="en-US" sz="1000" dirty="0">
+                        <a:latin typeface="Calibri" charset="0"/>
+                        <a:ea typeface="Calibri" charset="0"/>
+                        <a:cs typeface="Calibri" charset="0"/>
+                      </a:endParaRPr>
+                    </a:p>
+                  </a:txBody>
+                  <a:tcPr marL="91440" marR="91440" marT="45720" marB="45720" anchor="ctr">
+                    <a:lnL w="6350" cap="flat" cmpd="sng" algn="ctr">
+                      <a:solidFill>
+                        <a:srgbClr val="DCE4EC"/>
+                      </a:solidFill>
+                      <a:prstDash val="solid"/>
+                      <a:round/>
+                      <a:headEnd type="none" w="med" len="med"/>
+                      <a:tailEnd type="none" w="med" len="med"/>
+                    </a:lnL>
+                    <a:lnR w="6350" cap="flat" cmpd="sng" algn="ctr">
+                      <a:solidFill>
+                        <a:srgbClr val="DCE4EC"/>
+                      </a:solidFill>
+                      <a:prstDash val="solid"/>
+                      <a:round/>
+                      <a:headEnd type="none" w="med" len="med"/>
+                      <a:tailEnd type="none" w="med" len="med"/>
+                    </a:lnR>
+                    <a:lnT w="6350" cap="flat" cmpd="sng" algn="ctr">
+                      <a:solidFill>
+                        <a:srgbClr val="DCE4EC"/>
+                      </a:solidFill>
+                      <a:prstDash val="solid"/>
+                      <a:round/>
+                      <a:headEnd type="none" w="med" len="med"/>
+                      <a:tailEnd type="none" w="med" len="med"/>
+                    </a:lnT>
+                    <a:lnB w="6350" cap="flat" cmpd="sng" algn="ctr">
+                      <a:solidFill>
+                        <a:srgbClr val="DCE4EC"/>
+                      </a:solidFill>
+                      <a:prstDash val="solid"/>
+                      <a:round/>
+                      <a:headEnd type="none" w="med" len="med"/>
+                      <a:tailEnd type="none" w="med" len="med"/>
+                    </a:lnB>
+                  </a:tcPr>
+                </a:tc>
+                <a:tc>
+                  <a:txBody>
+                    <a:bodyPr/>
+                    <a:lstStyle/>
+                    <a:p>
+                      <a:pPr algn="r" indent="0" marL="0">
+                        <a:buNone/>
+                      </a:pPr>
+                      <a:r>
+                        <a:rPr lang="en-US" sz="1000" dirty="0">
+                          <a:solidFill>
+                            <a:srgbClr val="12212E"/>
+                          </a:solidFill>
+                          <a:latin typeface="Calibri" pitchFamily="34" charset="0"/>
+                          <a:ea typeface="Calibri" pitchFamily="34" charset="-122"/>
+                          <a:cs typeface="Calibri" pitchFamily="34" charset="-120"/>
+                        </a:rPr>
+                        <a:t>3/3</a:t>
+                      </a:r>
+                      <a:endParaRPr lang="en-US" sz="1000" dirty="0">
+                        <a:latin typeface="Calibri" charset="0"/>
+                        <a:ea typeface="Calibri" charset="0"/>
+                        <a:cs typeface="Calibri" charset="0"/>
+                      </a:endParaRPr>
+                    </a:p>
+                  </a:txBody>
+                  <a:tcPr marL="91440" marR="91440" marT="45720" marB="45720" anchor="ctr">
+                    <a:lnL w="6350" cap="flat" cmpd="sng" algn="ctr">
+                      <a:solidFill>
+                        <a:srgbClr val="DCE4EC"/>
+                      </a:solidFill>
+                      <a:prstDash val="solid"/>
+                      <a:round/>
+                      <a:headEnd type="none" w="med" len="med"/>
+                      <a:tailEnd type="none" w="med" len="med"/>
+                    </a:lnL>
+                    <a:lnR w="6350" cap="flat" cmpd="sng" algn="ctr">
+                      <a:solidFill>
+                        <a:srgbClr val="DCE4EC"/>
+                      </a:solidFill>
+                      <a:prstDash val="solid"/>
+                      <a:round/>
+                      <a:headEnd type="none" w="med" len="med"/>
+                      <a:tailEnd type="none" w="med" len="med"/>
+                    </a:lnR>
+                    <a:lnT w="6350" cap="flat" cmpd="sng" algn="ctr">
+                      <a:solidFill>
+                        <a:srgbClr val="DCE4EC"/>
+                      </a:solidFill>
+                      <a:prstDash val="solid"/>
+                      <a:round/>
+                      <a:headEnd type="none" w="med" len="med"/>
+                      <a:tailEnd type="none" w="med" len="med"/>
+                    </a:lnT>
+                    <a:lnB w="6350" cap="flat" cmpd="sng" algn="ctr">
+                      <a:solidFill>
+                        <a:srgbClr val="DCE4EC"/>
+                      </a:solidFill>
+                      <a:prstDash val="solid"/>
+                      <a:round/>
+                      <a:headEnd type="none" w="med" len="med"/>
+                      <a:tailEnd type="none" w="med" len="med"/>
+                    </a:lnB>
+                  </a:tcPr>
+                </a:tc>
+                <a:tc>
+                  <a:txBody>
+                    <a:bodyPr/>
+                    <a:lstStyle/>
+                    <a:p>
+                      <a:pPr algn="r" indent="0" marL="0">
+                        <a:buNone/>
+                      </a:pPr>
+                      <a:r>
+                        <a:rPr lang="en-US" sz="1000" dirty="0">
+                          <a:solidFill>
+                            <a:srgbClr val="12212E"/>
+                          </a:solidFill>
+                          <a:latin typeface="Calibri" pitchFamily="34" charset="0"/>
+                          <a:ea typeface="Calibri" pitchFamily="34" charset="-122"/>
+                          <a:cs typeface="Calibri" pitchFamily="34" charset="-120"/>
+                        </a:rPr>
+                        <a:t>1.19</a:t>
+                      </a:r>
+                      <a:endParaRPr lang="en-US" sz="1000" dirty="0">
+                        <a:latin typeface="Calibri" charset="0"/>
+                        <a:ea typeface="Calibri" charset="0"/>
+                        <a:cs typeface="Calibri" charset="0"/>
+                      </a:endParaRPr>
+                    </a:p>
+                  </a:txBody>
+                  <a:tcPr marL="91440" marR="91440" marT="45720" marB="45720" anchor="ctr">
+                    <a:lnL w="6350" cap="flat" cmpd="sng" algn="ctr">
+                      <a:solidFill>
+                        <a:srgbClr val="DCE4EC"/>
+                      </a:solidFill>
+                      <a:prstDash val="solid"/>
+                      <a:round/>
+                      <a:headEnd type="none" w="med" len="med"/>
+                      <a:tailEnd type="none" w="med" len="med"/>
+                    </a:lnL>
+                    <a:lnR w="6350" cap="flat" cmpd="sng" algn="ctr">
+                      <a:solidFill>
+                        <a:srgbClr val="DCE4EC"/>
+                      </a:solidFill>
+                      <a:prstDash val="solid"/>
+                      <a:round/>
+                      <a:headEnd type="none" w="med" len="med"/>
+                      <a:tailEnd type="none" w="med" len="med"/>
+                    </a:lnR>
+                    <a:lnT w="6350" cap="flat" cmpd="sng" algn="ctr">
+                      <a:solidFill>
+                        <a:srgbClr val="DCE4EC"/>
+                      </a:solidFill>
+                      <a:prstDash val="solid"/>
+                      <a:round/>
+                      <a:headEnd type="none" w="med" len="med"/>
+                      <a:tailEnd type="none" w="med" len="med"/>
+                    </a:lnT>
+                    <a:lnB w="6350" cap="flat" cmpd="sng" algn="ctr">
+                      <a:solidFill>
+                        <a:srgbClr val="DCE4EC"/>
+                      </a:solidFill>
+                      <a:prstDash val="solid"/>
+                      <a:round/>
+                      <a:headEnd type="none" w="med" len="med"/>
+                      <a:tailEnd type="none" w="med" len="med"/>
+                    </a:lnB>
+                  </a:tcPr>
+                </a:tc>
+                <a:tc>
+                  <a:txBody>
+                    <a:bodyPr/>
+                    <a:lstStyle/>
+                    <a:p>
+                      <a:pPr algn="r" indent="0" marL="0">
+                        <a:buNone/>
+                      </a:pPr>
+                      <a:r>
+                        <a:rPr lang="en-US" sz="1000" b="1" dirty="0">
+                          <a:solidFill>
+                            <a:srgbClr val="12212E"/>
+                          </a:solidFill>
+                          <a:latin typeface="Calibri" pitchFamily="34" charset="0"/>
+                          <a:ea typeface="Calibri" pitchFamily="34" charset="-122"/>
+                          <a:cs typeface="Calibri" pitchFamily="34" charset="-120"/>
+                        </a:rPr>
+                        <a:t>0.00</a:t>
+                      </a:r>
+                      <a:endParaRPr lang="en-US" sz="1000" dirty="0">
+                        <a:latin typeface="Calibri" charset="0"/>
+                        <a:ea typeface="Calibri" charset="0"/>
+                        <a:cs typeface="Calibri" charset="0"/>
+                      </a:endParaRPr>
+                    </a:p>
+                  </a:txBody>
+                  <a:tcPr marL="91440" marR="91440" marT="45720" marB="45720" anchor="ctr">
+                    <a:lnL w="6350" cap="flat" cmpd="sng" algn="ctr">
+                      <a:solidFill>
+                        <a:srgbClr val="DCE4EC"/>
+                      </a:solidFill>
+                      <a:prstDash val="solid"/>
+                      <a:round/>
+                      <a:headEnd type="none" w="med" len="med"/>
+                      <a:tailEnd type="none" w="med" len="med"/>
+                    </a:lnL>
+                    <a:lnR w="6350" cap="flat" cmpd="sng" algn="ctr">
+                      <a:solidFill>
+                        <a:srgbClr val="DCE4EC"/>
+                      </a:solidFill>
+                      <a:prstDash val="solid"/>
+                      <a:round/>
+                      <a:headEnd type="none" w="med" len="med"/>
+                      <a:tailEnd type="none" w="med" len="med"/>
+                    </a:lnR>
+                    <a:lnT w="6350" cap="flat" cmpd="sng" algn="ctr">
+                      <a:solidFill>
+                        <a:srgbClr val="DCE4EC"/>
+                      </a:solidFill>
+                      <a:prstDash val="solid"/>
+                      <a:round/>
+                      <a:headEnd type="none" w="med" len="med"/>
+                      <a:tailEnd type="none" w="med" len="med"/>
+                    </a:lnT>
+                    <a:lnB w="6350" cap="flat" cmpd="sng" algn="ctr">
+                      <a:solidFill>
+                        <a:srgbClr val="DCE4EC"/>
+                      </a:solidFill>
+                      <a:prstDash val="solid"/>
+                      <a:round/>
+                      <a:headEnd type="none" w="med" len="med"/>
+                      <a:tailEnd type="none" w="med" len="med"/>
+                    </a:lnB>
+                  </a:tcPr>
+                </a:tc>
+              </a:tr>
+              <a:tr h="347472">
+                <a:tc>
+                  <a:txBody>
+                    <a:bodyPr/>
+                    <a:lstStyle/>
+                    <a:p>
+                      <a:pPr indent="0" marL="0">
+                        <a:buNone/>
+                      </a:pPr>
+                      <a:r>
+                        <a:rPr lang="en-US" sz="900" b="1" dirty="0">
+                          <a:solidFill>
+                            <a:srgbClr val="12212E"/>
+                          </a:solidFill>
+                          <a:latin typeface="Courier New" pitchFamily="34" charset="0"/>
+                          <a:ea typeface="Courier New" pitchFamily="34" charset="-122"/>
+                          <a:cs typeface="Courier New" pitchFamily="34" charset="-120"/>
+                        </a:rPr>
+                        <a:t>CLIP_87_101</a:t>
+                      </a:r>
+                      <a:endParaRPr lang="en-US" sz="900" dirty="0">
+                        <a:latin typeface="Courier New" charset="0"/>
+                        <a:ea typeface="Courier New" charset="0"/>
+                        <a:cs typeface="Courier New" charset="0"/>
+                      </a:endParaRPr>
+                    </a:p>
+                  </a:txBody>
+                  <a:tcPr marL="91440" marR="91440" marT="45720" marB="45720" anchor="ctr">
+                    <a:lnL w="6350" cap="flat" cmpd="sng" algn="ctr">
+                      <a:solidFill>
+                        <a:srgbClr val="DCE4EC"/>
+                      </a:solidFill>
+                      <a:prstDash val="solid"/>
+                      <a:round/>
+                      <a:headEnd type="none" w="med" len="med"/>
+                      <a:tailEnd type="none" w="med" len="med"/>
+                    </a:lnL>
+                    <a:lnR w="6350" cap="flat" cmpd="sng" algn="ctr">
+                      <a:solidFill>
+                        <a:srgbClr val="DCE4EC"/>
+                      </a:solidFill>
+                      <a:prstDash val="solid"/>
+                      <a:round/>
+                      <a:headEnd type="none" w="med" len="med"/>
+                      <a:tailEnd type="none" w="med" len="med"/>
+                    </a:lnR>
+                    <a:lnT w="6350" cap="flat" cmpd="sng" algn="ctr">
+                      <a:solidFill>
+                        <a:srgbClr val="DCE4EC"/>
+                      </a:solidFill>
+                      <a:prstDash val="solid"/>
+                      <a:round/>
+                      <a:headEnd type="none" w="med" len="med"/>
+                      <a:tailEnd type="none" w="med" len="med"/>
+                    </a:lnT>
+                    <a:lnB w="6350" cap="flat" cmpd="sng" algn="ctr">
+                      <a:solidFill>
+                        <a:srgbClr val="DCE4EC"/>
+                      </a:solidFill>
+                      <a:prstDash val="solid"/>
+                      <a:round/>
+                      <a:headEnd type="none" w="med" len="med"/>
+                      <a:tailEnd type="none" w="med" len="med"/>
+                    </a:lnB>
+                  </a:tcPr>
+                </a:tc>
+                <a:tc>
+                  <a:txBody>
+                    <a:bodyPr/>
+                    <a:lstStyle/>
+                    <a:p>
+                      <a:pPr indent="0" marL="0">
+                        <a:buNone/>
+                      </a:pPr>
+                      <a:r>
+                        <a:rPr lang="en-US" sz="900" dirty="0">
+                          <a:solidFill>
+                            <a:srgbClr val="C9752B"/>
+                          </a:solidFill>
+                          <a:latin typeface="Calibri" pitchFamily="34" charset="0"/>
+                          <a:ea typeface="Calibri" pitchFamily="34" charset="-122"/>
+                          <a:cs typeface="Calibri" pitchFamily="34" charset="-120"/>
+                        </a:rPr>
+                        <a:t>tolerised binder control</a:t>
+                      </a:r>
+                      <a:endParaRPr lang="en-US" sz="900" dirty="0">
+                        <a:latin typeface="Calibri" charset="0"/>
+                        <a:ea typeface="Calibri" charset="0"/>
+                        <a:cs typeface="Calibri" charset="0"/>
+                      </a:endParaRPr>
+                    </a:p>
+                  </a:txBody>
+                  <a:tcPr marL="91440" marR="91440" marT="45720" marB="45720" anchor="ctr">
+                    <a:lnL w="6350" cap="flat" cmpd="sng" algn="ctr">
+                      <a:solidFill>
+                        <a:srgbClr val="DCE4EC"/>
+                      </a:solidFill>
+                      <a:prstDash val="solid"/>
+                      <a:round/>
+                      <a:headEnd type="none" w="med" len="med"/>
+                      <a:tailEnd type="none" w="med" len="med"/>
+                    </a:lnL>
+                    <a:lnR w="6350" cap="flat" cmpd="sng" algn="ctr">
+                      <a:solidFill>
+                        <a:srgbClr val="DCE4EC"/>
+                      </a:solidFill>
+                      <a:prstDash val="solid"/>
+                      <a:round/>
+                      <a:headEnd type="none" w="med" len="med"/>
+                      <a:tailEnd type="none" w="med" len="med"/>
+                    </a:lnR>
+                    <a:lnT w="6350" cap="flat" cmpd="sng" algn="ctr">
+                      <a:solidFill>
+                        <a:srgbClr val="DCE4EC"/>
+                      </a:solidFill>
+                      <a:prstDash val="solid"/>
+                      <a:round/>
+                      <a:headEnd type="none" w="med" len="med"/>
+                      <a:tailEnd type="none" w="med" len="med"/>
+                    </a:lnT>
+                    <a:lnB w="6350" cap="flat" cmpd="sng" algn="ctr">
+                      <a:solidFill>
+                        <a:srgbClr val="DCE4EC"/>
+                      </a:solidFill>
+                      <a:prstDash val="solid"/>
+                      <a:round/>
+                      <a:headEnd type="none" w="med" len="med"/>
+                      <a:tailEnd type="none" w="med" len="med"/>
+                    </a:lnB>
+                  </a:tcPr>
+                </a:tc>
+                <a:tc>
+                  <a:txBody>
+                    <a:bodyPr/>
+                    <a:lstStyle/>
+                    <a:p>
+                      <a:pPr algn="r" indent="0" marL="0">
+                        <a:buNone/>
+                      </a:pPr>
+                      <a:r>
+                        <a:rPr lang="en-US" sz="1000" dirty="0">
+                          <a:solidFill>
+                            <a:srgbClr val="12212E"/>
+                          </a:solidFill>
+                          <a:latin typeface="Calibri" pitchFamily="34" charset="0"/>
+                          <a:ea typeface="Calibri" pitchFamily="34" charset="-122"/>
+                          <a:cs typeface="Calibri" pitchFamily="34" charset="-120"/>
+                        </a:rPr>
+                        <a:t>1/25</a:t>
+                      </a:r>
+                      <a:endParaRPr lang="en-US" sz="1000" dirty="0">
+                        <a:latin typeface="Calibri" charset="0"/>
+                        <a:ea typeface="Calibri" charset="0"/>
+                        <a:cs typeface="Calibri" charset="0"/>
+                      </a:endParaRPr>
+                    </a:p>
+                  </a:txBody>
+                  <a:tcPr marL="91440" marR="91440" marT="45720" marB="45720" anchor="ctr">
+                    <a:lnL w="6350" cap="flat" cmpd="sng" algn="ctr">
+                      <a:solidFill>
+                        <a:srgbClr val="DCE4EC"/>
+                      </a:solidFill>
+                      <a:prstDash val="solid"/>
+                      <a:round/>
+                      <a:headEnd type="none" w="med" len="med"/>
+                      <a:tailEnd type="none" w="med" len="med"/>
+                    </a:lnL>
+                    <a:lnR w="6350" cap="flat" cmpd="sng" algn="ctr">
+                      <a:solidFill>
+                        <a:srgbClr val="DCE4EC"/>
+                      </a:solidFill>
+                      <a:prstDash val="solid"/>
+                      <a:round/>
+                      <a:headEnd type="none" w="med" len="med"/>
+                      <a:tailEnd type="none" w="med" len="med"/>
+                    </a:lnR>
+                    <a:lnT w="6350" cap="flat" cmpd="sng" algn="ctr">
+                      <a:solidFill>
+                        <a:srgbClr val="DCE4EC"/>
+                      </a:solidFill>
+                      <a:prstDash val="solid"/>
+                      <a:round/>
+                      <a:headEnd type="none" w="med" len="med"/>
+                      <a:tailEnd type="none" w="med" len="med"/>
+                    </a:lnT>
+                    <a:lnB w="6350" cap="flat" cmpd="sng" algn="ctr">
+                      <a:solidFill>
+                        <a:srgbClr val="DCE4EC"/>
+                      </a:solidFill>
+                      <a:prstDash val="solid"/>
+                      <a:round/>
+                      <a:headEnd type="none" w="med" len="med"/>
+                      <a:tailEnd type="none" w="med" len="med"/>
+                    </a:lnB>
+                  </a:tcPr>
+                </a:tc>
+                <a:tc>
+                  <a:txBody>
+                    <a:bodyPr/>
+                    <a:lstStyle/>
+                    <a:p>
+                      <a:pPr algn="r" indent="0" marL="0">
+                        <a:buNone/>
+                      </a:pPr>
+                      <a:r>
+                        <a:rPr lang="en-US" sz="1000" dirty="0">
+                          <a:solidFill>
+                            <a:srgbClr val="12212E"/>
+                          </a:solidFill>
+                          <a:latin typeface="Calibri" pitchFamily="34" charset="0"/>
+                          <a:ea typeface="Calibri" pitchFamily="34" charset="-122"/>
+                          <a:cs typeface="Calibri" pitchFamily="34" charset="-120"/>
+                        </a:rPr>
+                        <a:t>7/25</a:t>
+                      </a:r>
+                      <a:endParaRPr lang="en-US" sz="1000" dirty="0">
+                        <a:latin typeface="Calibri" charset="0"/>
+                        <a:ea typeface="Calibri" charset="0"/>
+                        <a:cs typeface="Calibri" charset="0"/>
+                      </a:endParaRPr>
+                    </a:p>
+                  </a:txBody>
+                  <a:tcPr marL="91440" marR="91440" marT="45720" marB="45720" anchor="ctr">
+                    <a:lnL w="6350" cap="flat" cmpd="sng" algn="ctr">
+                      <a:solidFill>
+                        <a:srgbClr val="DCE4EC"/>
+                      </a:solidFill>
+                      <a:prstDash val="solid"/>
+                      <a:round/>
+                      <a:headEnd type="none" w="med" len="med"/>
+                      <a:tailEnd type="none" w="med" len="med"/>
+                    </a:lnL>
+                    <a:lnR w="6350" cap="flat" cmpd="sng" algn="ctr">
+                      <a:solidFill>
+                        <a:srgbClr val="DCE4EC"/>
+                      </a:solidFill>
+                      <a:prstDash val="solid"/>
+                      <a:round/>
+                      <a:headEnd type="none" w="med" len="med"/>
+                      <a:tailEnd type="none" w="med" len="med"/>
+                    </a:lnR>
+                    <a:lnT w="6350" cap="flat" cmpd="sng" algn="ctr">
+                      <a:solidFill>
+                        <a:srgbClr val="DCE4EC"/>
+                      </a:solidFill>
+                      <a:prstDash val="solid"/>
+                      <a:round/>
+                      <a:headEnd type="none" w="med" len="med"/>
+                      <a:tailEnd type="none" w="med" len="med"/>
+                    </a:lnT>
+                    <a:lnB w="6350" cap="flat" cmpd="sng" algn="ctr">
+                      <a:solidFill>
+                        <a:srgbClr val="DCE4EC"/>
+                      </a:solidFill>
+                      <a:prstDash val="solid"/>
+                      <a:round/>
+                      <a:headEnd type="none" w="med" len="med"/>
+                      <a:tailEnd type="none" w="med" len="med"/>
+                    </a:lnB>
+                  </a:tcPr>
+                </a:tc>
+                <a:tc>
+                  <a:txBody>
+                    <a:bodyPr/>
+                    <a:lstStyle/>
+                    <a:p>
+                      <a:pPr algn="r" indent="0" marL="0">
+                        <a:buNone/>
+                      </a:pPr>
+                      <a:r>
+                        <a:rPr lang="en-US" sz="1000" dirty="0">
+                          <a:solidFill>
+                            <a:srgbClr val="12212E"/>
+                          </a:solidFill>
+                          <a:latin typeface="Calibri" pitchFamily="34" charset="0"/>
+                          <a:ea typeface="Calibri" pitchFamily="34" charset="-122"/>
+                          <a:cs typeface="Calibri" pitchFamily="34" charset="-120"/>
+                        </a:rPr>
+                        <a:t>1/1</a:t>
+                      </a:r>
+                      <a:endParaRPr lang="en-US" sz="1000" dirty="0">
+                        <a:latin typeface="Calibri" charset="0"/>
+                        <a:ea typeface="Calibri" charset="0"/>
+                        <a:cs typeface="Calibri" charset="0"/>
+                      </a:endParaRPr>
+                    </a:p>
+                  </a:txBody>
+                  <a:tcPr marL="91440" marR="91440" marT="45720" marB="45720" anchor="ctr">
+                    <a:lnL w="6350" cap="flat" cmpd="sng" algn="ctr">
+                      <a:solidFill>
+                        <a:srgbClr val="DCE4EC"/>
+                      </a:solidFill>
+                      <a:prstDash val="solid"/>
+                      <a:round/>
+                      <a:headEnd type="none" w="med" len="med"/>
+                      <a:tailEnd type="none" w="med" len="med"/>
+                    </a:lnL>
+                    <a:lnR w="6350" cap="flat" cmpd="sng" algn="ctr">
+                      <a:solidFill>
+                        <a:srgbClr val="DCE4EC"/>
+                      </a:solidFill>
+                      <a:prstDash val="solid"/>
+                      <a:round/>
+                      <a:headEnd type="none" w="med" len="med"/>
+                      <a:tailEnd type="none" w="med" len="med"/>
+                    </a:lnR>
+                    <a:lnT w="6350" cap="flat" cmpd="sng" algn="ctr">
+                      <a:solidFill>
+                        <a:srgbClr val="DCE4EC"/>
+                      </a:solidFill>
+                      <a:prstDash val="solid"/>
+                      <a:round/>
+                      <a:headEnd type="none" w="med" len="med"/>
+                      <a:tailEnd type="none" w="med" len="med"/>
+                    </a:lnT>
+                    <a:lnB w="6350" cap="flat" cmpd="sng" algn="ctr">
+                      <a:solidFill>
+                        <a:srgbClr val="DCE4EC"/>
+                      </a:solidFill>
+                      <a:prstDash val="solid"/>
+                      <a:round/>
+                      <a:headEnd type="none" w="med" len="med"/>
+                      <a:tailEnd type="none" w="med" len="med"/>
+                    </a:lnB>
+                  </a:tcPr>
+                </a:tc>
+                <a:tc>
+                  <a:txBody>
+                    <a:bodyPr/>
+                    <a:lstStyle/>
+                    <a:p>
+                      <a:pPr algn="r" indent="0" marL="0">
+                        <a:buNone/>
+                      </a:pPr>
+                      <a:r>
+                        <a:rPr lang="en-US" sz="1000" dirty="0">
+                          <a:solidFill>
+                            <a:srgbClr val="12212E"/>
+                          </a:solidFill>
+                          <a:latin typeface="Calibri" pitchFamily="34" charset="0"/>
+                          <a:ea typeface="Calibri" pitchFamily="34" charset="-122"/>
+                          <a:cs typeface="Calibri" pitchFamily="34" charset="-120"/>
+                        </a:rPr>
+                        <a:t>0.00</a:t>
+                      </a:r>
+                      <a:endParaRPr lang="en-US" sz="1000" dirty="0">
+                        <a:latin typeface="Calibri" charset="0"/>
+                        <a:ea typeface="Calibri" charset="0"/>
+                        <a:cs typeface="Calibri" charset="0"/>
+                      </a:endParaRPr>
+                    </a:p>
+                  </a:txBody>
+                  <a:tcPr marL="91440" marR="91440" marT="45720" marB="45720" anchor="ctr">
+                    <a:lnL w="6350" cap="flat" cmpd="sng" algn="ctr">
+                      <a:solidFill>
+                        <a:srgbClr val="DCE4EC"/>
+                      </a:solidFill>
+                      <a:prstDash val="solid"/>
+                      <a:round/>
+                      <a:headEnd type="none" w="med" len="med"/>
+                      <a:tailEnd type="none" w="med" len="med"/>
+                    </a:lnL>
+                    <a:lnR w="6350" cap="flat" cmpd="sng" algn="ctr">
+                      <a:solidFill>
+                        <a:srgbClr val="DCE4EC"/>
+                      </a:solidFill>
+                      <a:prstDash val="solid"/>
+                      <a:round/>
+                      <a:headEnd type="none" w="med" len="med"/>
+                      <a:tailEnd type="none" w="med" len="med"/>
+                    </a:lnR>
+                    <a:lnT w="6350" cap="flat" cmpd="sng" algn="ctr">
+                      <a:solidFill>
+                        <a:srgbClr val="DCE4EC"/>
+                      </a:solidFill>
+                      <a:prstDash val="solid"/>
+                      <a:round/>
+                      <a:headEnd type="none" w="med" len="med"/>
+                      <a:tailEnd type="none" w="med" len="med"/>
+                    </a:lnT>
+                    <a:lnB w="6350" cap="flat" cmpd="sng" algn="ctr">
+                      <a:solidFill>
+                        <a:srgbClr val="DCE4EC"/>
+                      </a:solidFill>
+                      <a:prstDash val="solid"/>
+                      <a:round/>
+                      <a:headEnd type="none" w="med" len="med"/>
+                      <a:tailEnd type="none" w="med" len="med"/>
+                    </a:lnB>
+                  </a:tcPr>
+                </a:tc>
+                <a:tc>
+                  <a:txBody>
+                    <a:bodyPr/>
+                    <a:lstStyle/>
+                    <a:p>
+                      <a:pPr algn="r" indent="0" marL="0">
+                        <a:buNone/>
+                      </a:pPr>
+                      <a:r>
+                        <a:rPr lang="en-US" sz="1000" b="1" dirty="0">
+                          <a:solidFill>
+                            <a:srgbClr val="12212E"/>
+                          </a:solidFill>
+                          <a:latin typeface="Calibri" pitchFamily="34" charset="0"/>
+                          <a:ea typeface="Calibri" pitchFamily="34" charset="-122"/>
+                          <a:cs typeface="Calibri" pitchFamily="34" charset="-120"/>
+                        </a:rPr>
+                        <a:t>0.00</a:t>
+                      </a:r>
+                      <a:endParaRPr lang="en-US" sz="1000" dirty="0">
+                        <a:latin typeface="Calibri" charset="0"/>
+                        <a:ea typeface="Calibri" charset="0"/>
+                        <a:cs typeface="Calibri" charset="0"/>
+                      </a:endParaRPr>
+                    </a:p>
+                  </a:txBody>
+                  <a:tcPr marL="91440" marR="91440" marT="45720" marB="45720" anchor="ctr">
+                    <a:lnL w="6350" cap="flat" cmpd="sng" algn="ctr">
+                      <a:solidFill>
+                        <a:srgbClr val="DCE4EC"/>
+                      </a:solidFill>
+                      <a:prstDash val="solid"/>
+                      <a:round/>
+                      <a:headEnd type="none" w="med" len="med"/>
+                      <a:tailEnd type="none" w="med" len="med"/>
+                    </a:lnL>
+                    <a:lnR w="6350" cap="flat" cmpd="sng" algn="ctr">
+                      <a:solidFill>
+                        <a:srgbClr val="DCE4EC"/>
+                      </a:solidFill>
+                      <a:prstDash val="solid"/>
+                      <a:round/>
+                      <a:headEnd type="none" w="med" len="med"/>
+                      <a:tailEnd type="none" w="med" len="med"/>
+                    </a:lnR>
+                    <a:lnT w="6350" cap="flat" cmpd="sng" algn="ctr">
+                      <a:solidFill>
+                        <a:srgbClr val="DCE4EC"/>
+                      </a:solidFill>
+                      <a:prstDash val="solid"/>
+                      <a:round/>
+                      <a:headEnd type="none" w="med" len="med"/>
+                      <a:tailEnd type="none" w="med" len="med"/>
+                    </a:lnT>
+                    <a:lnB w="6350" cap="flat" cmpd="sng" algn="ctr">
+                      <a:solidFill>
+                        <a:srgbClr val="DCE4EC"/>
+                      </a:solidFill>
+                      <a:prstDash val="solid"/>
+                      <a:round/>
+                      <a:headEnd type="none" w="med" len="med"/>
+                      <a:tailEnd type="none" w="med" len="med"/>
+                    </a:lnB>
+                  </a:tcPr>
+                </a:tc>
+              </a:tr>
+            </a:tbl>
+          </a:graphicData>
+        </a:graphic>
+      </p:graphicFrame>
+      <p:sp>
+        <p:nvSpPr>
+          <p:cNvPr id="6" name="Shape 3"/>
+          <p:cNvSpPr/>
+          <p:nvPr/>
+        </p:nvSpPr>
+        <p:spPr>
+          <a:xfrm>
+            <a:off x="566928" y="3017520"/>
+            <a:ext cx="11027664" cy="1783080"/>
+          </a:xfrm>
+          <a:prstGeom prst="roundRect">
+            <a:avLst>
+              <a:gd name="adj" fmla="val 3077"/>
+            </a:avLst>
+          </a:prstGeom>
+          <a:solidFill>
+            <a:srgbClr val="FBF1F1"/>
+          </a:solidFill>
+          <a:ln w="9525">
+            <a:solidFill>
+              <a:srgbClr val="E8CDCD"/>
+            </a:solidFill>
+            <a:prstDash val="solid"/>
+          </a:ln>
+        </p:spPr>
+      </p:sp>
+      <p:sp>
+        <p:nvSpPr>
+          <p:cNvPr id="7" name="Text 4"/>
+          <p:cNvSpPr/>
+          <p:nvPr/>
+        </p:nvSpPr>
+        <p:spPr>
+          <a:xfrm>
+            <a:off x="768096" y="3127248"/>
+            <a:ext cx="10625328" cy="1572768"/>
+          </a:xfrm>
+          <a:prstGeom prst="rect">
+            <a:avLst/>
+          </a:prstGeom>
+          <a:noFill/>
+          <a:ln/>
+        </p:spPr>
+        <p:txBody>
+          <a:bodyPr wrap="square" lIns="0" tIns="0" rIns="0" bIns="0" rtlCol="0" anchor="ctr"/>
+          <a:lstStyle/>
+          <a:p>
+            <a:pPr indent="0" marL="0">
+              <a:lnSpc>
+                <a:spcPts val="1400"/>
+              </a:lnSpc>
+              <a:buNone/>
+            </a:pPr>
+            <a:r>
+              <a:rPr lang="en-US" sz="1100" b="1" dirty="0">
+                <a:solidFill>
+                  <a:srgbClr val="B23B3B"/>
+                </a:solidFill>
+                <a:latin typeface="Calibri" pitchFamily="34" charset="0"/>
+                <a:ea typeface="Calibri" pitchFamily="34" charset="-122"/>
+                <a:cs typeface="Calibri" pitchFamily="34" charset="-120"/>
+              </a:rPr>
+              <a:t>The filter suppresses a real epitope, and this is the clearest example.
+</a:t>
+            </a:r>
+            <a:pPr indent="0" marL="0">
+              <a:lnSpc>
+                <a:spcPts val="1400"/>
+              </a:lnSpc>
+              <a:buNone/>
+            </a:pPr>
+            <a:r>
+              <a:rPr lang="en-US" sz="1100" dirty="0">
+                <a:solidFill>
+                  <a:srgbClr val="12212E"/>
+                </a:solidFill>
+                <a:latin typeface="Calibri" pitchFamily="34" charset="0"/>
+                <a:ea typeface="Calibri" pitchFamily="34" charset="-122"/>
+                <a:cs typeface="Calibri" pitchFamily="34" charset="-120"/>
+              </a:rPr>
+              <a:t>Myelin basic protein 85–99 is a human self peptide with positive DR-restricted T-cell assays on 10 distinct DR molecules in IEDB. On this panel it is the broadest binder in the entire batch — 10/25 DR molecules at the strong-binder tier, unfiltered pIRS 1.19, higher than any ligand here. The tolerance filter takes it to 0.00.</a:t>
+            </a:r>
+            <a:endParaRPr lang="en-US" sz="1100" dirty="0"/>
+          </a:p>
+          <a:p>
+            <a:pPr indent="0" marL="0">
+              <a:lnSpc>
+                <a:spcPts val="1400"/>
+              </a:lnSpc>
+              <a:buNone/>
+            </a:pPr>
+            <a:endParaRPr lang="en-US" sz="1100" dirty="0"/>
+          </a:p>
+          <a:p>
+            <a:pPr indent="0" marL="0">
+              <a:lnSpc>
+                <a:spcPts val="1400"/>
+              </a:lnSpc>
+              <a:buNone/>
+            </a:pPr>
+            <a:r>
+              <a:rPr lang="en-US" sz="1100" dirty="0">
+                <a:solidFill>
+                  <a:srgbClr val="12212E"/>
+                </a:solidFill>
+                <a:latin typeface="Calibri" pitchFamily="34" charset="0"/>
+                <a:ea typeface="Calibri" pitchFamily="34" charset="-122"/>
+                <a:cs typeface="Calibri" pitchFamily="34" charset="-120"/>
+              </a:rPr>
+              <a:t>That is the filter working as designed and being wrong. Self-derived epitopes exist — autoimmunity is what they are — and a sequence-identity filter cannot see the difference. It is safe for an affinity ligand because a foreign scaffold's framework similarity to human germline is the case it was built for; it is not safe for anything where self-reactivity is the question.</a:t>
+            </a:r>
+            <a:endParaRPr lang="en-US" sz="1100" dirty="0"/>
+          </a:p>
+        </p:txBody>
+      </p:sp>
+      <p:sp>
+        <p:nvSpPr>
+          <p:cNvPr id="8" name="Text 5"/>
+          <p:cNvSpPr/>
+          <p:nvPr/>
+        </p:nvSpPr>
+        <p:spPr>
+          <a:xfrm>
+            <a:off x="566928" y="4956048"/>
+            <a:ext cx="11027664" cy="658368"/>
+          </a:xfrm>
+          <a:prstGeom prst="rect">
+            <a:avLst/>
+          </a:prstGeom>
+          <a:noFill/>
+          <a:ln/>
+        </p:spPr>
+        <p:txBody>
+          <a:bodyPr wrap="square" lIns="0" tIns="0" rIns="0" bIns="0" rtlCol="0" anchor="ctr"/>
+          <a:lstStyle/>
+          <a:p>
+            <a:pPr indent="0" marL="0">
+              <a:lnSpc>
+                <a:spcPts val="1500"/>
+              </a:lnSpc>
+              <a:buNone/>
+            </a:pPr>
+            <a:r>
+              <a:rPr lang="en-US" sz="1150" dirty="0">
+                <a:solidFill>
+                  <a:srgbClr val="12212E"/>
+                </a:solidFill>
+                <a:latin typeface="Calibri" pitchFamily="34" charset="0"/>
+                <a:ea typeface="Calibri" pitchFamily="34" charset="-122"/>
+                <a:cs typeface="Calibri" pitchFamily="34" charset="-120"/>
+              </a:rPr>
+              <a:t>The opposite control behaves too. CLIP occupies the groove of essentially every DR molecule as the invariant chain's placeholder, yet carries no positive human DR T-cell record in IEDB. Here it reaches 7/25 at the weak tier and 1/25 at the strong tier, and ends at pIRS 0.00 — binding strength alone is not being read as risk.</a:t>
+            </a:r>
+            <a:endParaRPr lang="en-US" sz="1150" dirty="0"/>
+          </a:p>
+        </p:txBody>
+      </p:sp>
+      <p:sp>
+        <p:nvSpPr>
+          <p:cNvPr id="9" name="Text 6"/>
+          <p:cNvSpPr/>
+          <p:nvPr/>
+        </p:nvSpPr>
+        <p:spPr>
+          <a:xfrm>
+            <a:off x="566928" y="5897880"/>
+            <a:ext cx="11027664" cy="502920"/>
+          </a:xfrm>
+          <a:prstGeom prst="rect">
+            <a:avLst/>
+          </a:prstGeom>
+          <a:noFill/>
+          <a:ln/>
+        </p:spPr>
+        <p:txBody>
+          <a:bodyPr wrap="square" lIns="0" tIns="0" rIns="0" bIns="0" rtlCol="0" anchor="ctr"/>
+          <a:lstStyle/>
+          <a:p>
+            <a:pPr indent="0" marL="0">
+              <a:lnSpc>
+                <a:spcPts val="1200"/>
+              </a:lnSpc>
+              <a:buNone/>
+            </a:pPr>
+            <a:r>
+              <a:rPr lang="en-US" sz="950" i="1" dirty="0">
+                <a:solidFill>
+                  <a:srgbClr val="63748A"/>
+                </a:solidFill>
+                <a:latin typeface="Calibri" pitchFamily="34" charset="0"/>
+                <a:ea typeface="Calibri" pitchFamily="34" charset="-122"/>
+                <a:cs typeface="Calibri" pitchFamily="34" charset="-120"/>
+              </a:rPr>
+              <a:t>Both controls' roles were checked against IEDB before assignment. They do not pass or fail the batch — they put a number on two things the filter cannot do.</a:t>
+            </a:r>
+            <a:endParaRPr lang="en-US" sz="950" dirty="0"/>
+          </a:p>
+        </p:txBody>
+      </p:sp>
+    </p:spTree>
+  </p:cSld>
+  <p:clrMapOvr>
+    <a:masterClrMapping/>
+  </p:clrMapOvr>
+</p:sld>
+</file>
+
+<file path=ppt/slides/slide8.xml><?xml version="1.0" encoding="utf-8"?>
+<p:sld xmlns:a="http://schemas.openxmlformats.org/drawingml/2006/main" xmlns:r="http://schemas.openxmlformats.org/officeDocument/2006/relationships" xmlns:p="http://schemas.openxmlformats.org/presentationml/2006/main">
+  <p:cSld name="Slide 8">
+    <p:bg>
+      <p:bgPr>
+        <a:solidFill>
+          <a:srgbClr val="FFFFFF"/>
+        </a:solidFill>
+      </p:bgPr>
+    </p:bg>
+    <p:spTree>
+      <p:nvGrpSpPr>
+        <p:cNvPr id="1" name=""/>
+        <p:cNvGrpSpPr/>
+        <p:nvPr/>
+      </p:nvGrpSpPr>
+      <p:grpSpPr>
+        <a:xfrm>
+          <a:off x="0" y="0"/>
+          <a:ext cx="0" cy="0"/>
+          <a:chOff x="0" y="0"/>
+          <a:chExt cx="0" cy="0"/>
+        </a:xfrm>
+      </p:grpSpPr>
+      <p:sp>
+        <p:nvSpPr>
+          <p:cNvPr id="2" name="Text 0"/>
+          <p:cNvSpPr/>
+          <p:nvPr/>
+        </p:nvSpPr>
+        <p:spPr>
+          <a:xfrm>
+            <a:off x="566928" y="310896"/>
+            <a:ext cx="11027664" cy="219456"/>
+          </a:xfrm>
+          <a:prstGeom prst="rect">
+            <a:avLst/>
+          </a:prstGeom>
+          <a:noFill/>
+          <a:ln/>
+        </p:spPr>
+        <p:txBody>
+          <a:bodyPr wrap="square" lIns="0" tIns="0" rIns="0" bIns="0" rtlCol="0" anchor="ctr"/>
+          <a:lstStyle/>
+          <a:p>
+            <a:pPr indent="0" marL="0">
+              <a:buNone/>
+            </a:pPr>
+            <a:r>
+              <a:rPr lang="en-US" sz="1050" b="1" spc="160" kern="0" dirty="0">
+                <a:solidFill>
+                  <a:srgbClr val="2F6F9F"/>
+                </a:solidFill>
+                <a:latin typeface="Calibri" pitchFamily="34" charset="0"/>
+                <a:ea typeface="Calibri" pitchFamily="34" charset="-122"/>
+                <a:cs typeface="Calibri" pitchFamily="34" charset="-120"/>
+              </a:rPr>
               <a:t>MODULES 5–6 · SCORING</a:t>
             </a:r>
             <a:endParaRPr lang="en-US" sz="1050" dirty="0"/>
@@ -13045,7 +15967,7 @@
       </p:pic>
       <p:graphicFrame>
         <p:nvGraphicFramePr>
-          <p:cNvPr id="8" name="Table 0"/>
+          <p:cNvPr id="9" name="Table 0"/>
           <p:cNvGraphicFramePr>
             <a:graphicFrameLocks noGrp="1"/>
           </p:cNvGraphicFramePr>
@@ -13348,7 +16270,7 @@
                           <a:ea typeface="Calibri" pitchFamily="34" charset="-122"/>
                           <a:cs typeface="Calibri" pitchFamily="34" charset="-120"/>
                         </a:rPr>
-                        <a:t>TT_p2_region 5/25 DR at %Rank&lt;5 (0 at &lt;1, best 1.4); TT_p30_region 5/25 DR at %Rank&lt;5 (2 at &lt;1, best 0.64)</a:t>
+                        <a:t>HA_306_318_region 8/25 DR at %Rank&lt;5 (2 at &lt;1, best 0.46); TT_p2_region 15/25 DR at %Rank&lt;5 (6 at &lt;1, best 0.06); TT_p30_region 5/25 DR at %Rank&lt;5 (2 at &lt;1, best 0.64)</a:t>
                       </a:r>
                       <a:endParaRPr lang="en-US" sz="900" dirty="0">
                         <a:latin typeface="Calibri" charset="0"/>
@@ -13742,7 +16664,7 @@
                           <a:ea typeface="Calibri" pitchFamily="34" charset="-122"/>
                           <a:cs typeface="Calibri" pitchFamily="34" charset="-120"/>
                         </a:rPr>
-                        <a:t>mean score drop: self 100.0% vs ligands 10.6%</a:t>
+                        <a:t>mean score drop: self 100.0% vs ligands 9.1%</a:t>
                       </a:r>
                       <a:endParaRPr lang="en-US" sz="900" dirty="0">
                         <a:latin typeface="Calibri" charset="0"/>
@@ -14065,9 +16987,9 @@
 </p:sld>
 </file>
 
-<file path=ppt/slides/slide8.xml><?xml version="1.0" encoding="utf-8"?>
+<file path=ppt/slides/slide9.xml><?xml version="1.0" encoding="utf-8"?>
 <p:sld xmlns:a="http://schemas.openxmlformats.org/drawingml/2006/main" xmlns:r="http://schemas.openxmlformats.org/officeDocument/2006/relationships" xmlns:p="http://schemas.openxmlformats.org/presentationml/2006/main">
-  <p:cSld name="Slide 8">
+  <p:cSld name="Slide 9">
     <p:bg>
       <p:bgPr>
         <a:solidFill>
@@ -14169,7 +17091,7 @@
       </p:sp>
       <p:graphicFrame>
         <p:nvGraphicFramePr>
-          <p:cNvPr id="9" name="Table 0"/>
+          <p:cNvPr id="10" name="Table 0"/>
           <p:cNvGraphicFramePr>
             <a:graphicFrameLocks noGrp="1"/>
           </p:cNvGraphicFramePr>
@@ -16878,7 +19800,7 @@
       </p:sp>
       <p:graphicFrame>
         <p:nvGraphicFramePr>
-          <p:cNvPr id="17" name="Table 1"/>
+          <p:cNvPr id="19" name="Table 1"/>
           <p:cNvGraphicFramePr>
             <a:graphicFrameLocks noGrp="1"/>
           </p:cNvGraphicFramePr>
@@ -20068,1060 +22990,6 @@
           </a:graphicData>
         </a:graphic>
       </p:graphicFrame>
-    </p:spTree>
-  </p:cSld>
-  <p:clrMapOvr>
-    <a:masterClrMapping/>
-  </p:clrMapOvr>
-</p:sld>
-</file>
-
-<file path=ppt/slides/slide9.xml><?xml version="1.0" encoding="utf-8"?>
-<p:sld xmlns:a="http://schemas.openxmlformats.org/drawingml/2006/main" xmlns:r="http://schemas.openxmlformats.org/officeDocument/2006/relationships" xmlns:p="http://schemas.openxmlformats.org/presentationml/2006/main">
-  <p:cSld name="Slide 9">
-    <p:bg>
-      <p:bgPr>
-        <a:solidFill>
-          <a:srgbClr val="FFFFFF"/>
-        </a:solidFill>
-      </p:bgPr>
-    </p:bg>
-    <p:spTree>
-      <p:nvGrpSpPr>
-        <p:cNvPr id="1" name=""/>
-        <p:cNvGrpSpPr/>
-        <p:nvPr/>
-      </p:nvGrpSpPr>
-      <p:grpSpPr>
-        <a:xfrm>
-          <a:off x="0" y="0"/>
-          <a:ext cx="0" cy="0"/>
-          <a:chOff x="0" y="0"/>
-          <a:chExt cx="0" cy="0"/>
-        </a:xfrm>
-      </p:grpSpPr>
-      <p:sp>
-        <p:nvSpPr>
-          <p:cNvPr id="2" name="Text 0"/>
-          <p:cNvSpPr/>
-          <p:nvPr/>
-        </p:nvSpPr>
-        <p:spPr>
-          <a:xfrm>
-            <a:off x="566928" y="310896"/>
-            <a:ext cx="11027664" cy="219456"/>
-          </a:xfrm>
-          <a:prstGeom prst="rect">
-            <a:avLst/>
-          </a:prstGeom>
-          <a:noFill/>
-          <a:ln/>
-        </p:spPr>
-        <p:txBody>
-          <a:bodyPr wrap="square" lIns="0" tIns="0" rIns="0" bIns="0" rtlCol="0" anchor="ctr"/>
-          <a:lstStyle/>
-          <a:p>
-            <a:pPr indent="0" marL="0">
-              <a:buNone/>
-            </a:pPr>
-            <a:r>
-              <a:rPr lang="en-US" sz="1050" b="1" spc="160" kern="0" dirty="0">
-                <a:solidFill>
-                  <a:srgbClr val="2F6F9F"/>
-                </a:solidFill>
-                <a:latin typeface="Calibri" pitchFamily="34" charset="0"/>
-                <a:ea typeface="Calibri" pitchFamily="34" charset="-122"/>
-                <a:cs typeface="Calibri" pitchFamily="34" charset="-120"/>
-              </a:rPr>
-              <a:t>MODULE 7 · ADA LAYER</a:t>
-            </a:r>
-            <a:endParaRPr lang="en-US" sz="1050" dirty="0"/>
-          </a:p>
-        </p:txBody>
-      </p:sp>
-      <p:sp>
-        <p:nvSpPr>
-          <p:cNvPr id="3" name="Text 1"/>
-          <p:cNvSpPr/>
-          <p:nvPr/>
-        </p:nvSpPr>
-        <p:spPr>
-          <a:xfrm>
-            <a:off x="566928" y="548640"/>
-            <a:ext cx="11027664" cy="548640"/>
-          </a:xfrm>
-          <a:prstGeom prst="rect">
-            <a:avLst/>
-          </a:prstGeom>
-          <a:noFill/>
-          <a:ln/>
-        </p:spPr>
-        <p:txBody>
-          <a:bodyPr wrap="square" lIns="0" tIns="0" rIns="0" bIns="0" rtlCol="0" anchor="ctr"/>
-          <a:lstStyle/>
-          <a:p>
-            <a:pPr indent="0" marL="0">
-              <a:buNone/>
-            </a:pPr>
-            <a:r>
-              <a:rPr lang="en-US" sz="2700" b="1" dirty="0">
-                <a:solidFill>
-                  <a:srgbClr val="12212E"/>
-                </a:solidFill>
-                <a:latin typeface="Cambria" pitchFamily="34" charset="0"/>
-                <a:ea typeface="Cambria" pitchFamily="34" charset="-122"/>
-                <a:cs typeface="Cambria" pitchFamily="34" charset="-120"/>
-              </a:rPr>
-              <a:t>The measured endpoint is an antibody, not a T cell</a:t>
-            </a:r>
-            <a:endParaRPr lang="en-US" sz="2700" dirty="0"/>
-          </a:p>
-        </p:txBody>
-      </p:sp>
-      <p:pic>
-        <p:nvPicPr>
-          <p:cNvPr id="4" name="Image 0" descr="/home/user/ClaudeCode/hla_ligand_immunogenicity/figures/fig4_tb_coincidence.png">    </p:cNvPr>
-          <p:cNvPicPr>
-            <a:picLocks noChangeAspect="1"/>
-          </p:cNvPicPr>
-          <p:nvPr/>
-        </p:nvPicPr>
-        <p:blipFill>
-          <a:blip r:embed="rId1"/>
-          <a:stretch>
-            <a:fillRect/>
-          </a:stretch>
-        </p:blipFill>
-        <p:spPr>
-          <a:xfrm>
-            <a:off x="566928" y="1115568"/>
-            <a:ext cx="11027664" cy="2834640"/>
-          </a:xfrm>
-          <a:prstGeom prst="rect">
-            <a:avLst/>
-          </a:prstGeom>
-        </p:spPr>
-      </p:pic>
-      <p:sp>
-        <p:nvSpPr>
-          <p:cNvPr id="5" name="Text 2"/>
-          <p:cNvSpPr/>
-          <p:nvPr/>
-        </p:nvSpPr>
-        <p:spPr>
-          <a:xfrm>
-            <a:off x="566928" y="4069080"/>
-            <a:ext cx="11027664" cy="502920"/>
-          </a:xfrm>
-          <a:prstGeom prst="rect">
-            <a:avLst/>
-          </a:prstGeom>
-          <a:noFill/>
-          <a:ln/>
-        </p:spPr>
-        <p:txBody>
-          <a:bodyPr wrap="square" lIns="0" tIns="0" rIns="0" bIns="0" rtlCol="0" anchor="ctr"/>
-          <a:lstStyle/>
-          <a:p>
-            <a:pPr indent="0" marL="0">
-              <a:lnSpc>
-                <a:spcPts val="1600"/>
-              </a:lnSpc>
-              <a:buNone/>
-            </a:pPr>
-            <a:r>
-              <a:rPr lang="en-US" sz="1200" dirty="0">
-                <a:solidFill>
-                  <a:srgbClr val="12212E"/>
-                </a:solidFill>
-                <a:latin typeface="Calibri" pitchFamily="34" charset="0"/>
-                <a:ea typeface="Calibri" pitchFamily="34" charset="-122"/>
-                <a:cs typeface="Calibri" pitchFamily="34" charset="-120"/>
-              </a:rPr>
-              <a:t>A B cell only class-switches with help from a CD4 T cell recognising a peptide from the same protein. The regions worth taking into wet-lab work first are those where a non-self DR cluster and a predicted B-cell epitope coincide — shaded above.</a:t>
-            </a:r>
-            <a:endParaRPr lang="en-US" sz="1200" dirty="0"/>
-          </a:p>
-        </p:txBody>
-      </p:sp>
-      <p:graphicFrame>
-        <p:nvGraphicFramePr>
-          <p:cNvPr id="10" name="Table 0"/>
-          <p:cNvGraphicFramePr>
-            <a:graphicFrameLocks noGrp="1"/>
-          </p:cNvGraphicFramePr>
-          <p:nvPr>
-            <p:extLst>
-              <p:ext uri="{D42A27DB-BD31-4B8C-83A1-F6EECF244321}">
-                <p14:modId xmlns:p14="http://schemas.microsoft.com/office/powerpoint/2010/main" val="1579011935"/>
-              </p:ext>
-            </p:extLst>
-          </p:nvPr>
-        </p:nvGraphicFramePr>
-        <p:xfrm>
-          <a:off x="566928" y="4663440"/>
-          <a:ext cx="11027664" cy="914400"/>
-        </p:xfrm>
-        <a:graphic>
-          <a:graphicData uri="http://schemas.openxmlformats.org/drawingml/2006/table">
-            <a:tbl>
-              <a:tblPr/>
-              <a:tblGrid>
-                <a:gridCol w="1371600"/>
-                <a:gridCol w="1188720"/>
-                <a:gridCol w="1554480"/>
-                <a:gridCol w="1371600"/>
-                <a:gridCol w="1097280"/>
-                <a:gridCol w="4443984"/>
-              </a:tblGrid>
-              <a:tr h="292608">
-                <a:tc>
-                  <a:txBody>
-                    <a:bodyPr/>
-                    <a:lstStyle/>
-                    <a:p>
-                      <a:pPr indent="0" marL="0">
-                        <a:buNone/>
-                      </a:pPr>
-                      <a:r>
-                        <a:rPr lang="en-US" sz="850" b="1" spc="60" kern="0" dirty="0">
-                          <a:solidFill>
-                            <a:srgbClr val="63748A"/>
-                          </a:solidFill>
-                          <a:latin typeface="Calibri" pitchFamily="34" charset="0"/>
-                          <a:ea typeface="Calibri" pitchFamily="34" charset="-122"/>
-                          <a:cs typeface="Calibri" pitchFamily="34" charset="-120"/>
-                        </a:rPr>
-                        <a:t>T-cell cluster</a:t>
-                      </a:r>
-                      <a:endParaRPr lang="en-US" sz="850" dirty="0">
-                        <a:latin typeface="Calibri" charset="0"/>
-                        <a:ea typeface="Calibri" charset="0"/>
-                        <a:cs typeface="Calibri" charset="0"/>
-                      </a:endParaRPr>
-                    </a:p>
-                  </a:txBody>
-                  <a:tcPr marL="91440" marR="91440" marT="45720" marB="45720" anchor="ctr">
-                    <a:lnL w="6350" cap="flat" cmpd="sng" algn="ctr">
-                      <a:solidFill>
-                        <a:srgbClr val="DCE4EC"/>
-                      </a:solidFill>
-                      <a:prstDash val="solid"/>
-                      <a:round/>
-                      <a:headEnd type="none" w="med" len="med"/>
-                      <a:tailEnd type="none" w="med" len="med"/>
-                    </a:lnL>
-                    <a:lnR w="6350" cap="flat" cmpd="sng" algn="ctr">
-                      <a:solidFill>
-                        <a:srgbClr val="DCE4EC"/>
-                      </a:solidFill>
-                      <a:prstDash val="solid"/>
-                      <a:round/>
-                      <a:headEnd type="none" w="med" len="med"/>
-                      <a:tailEnd type="none" w="med" len="med"/>
-                    </a:lnR>
-                    <a:lnT w="6350" cap="flat" cmpd="sng" algn="ctr">
-                      <a:solidFill>
-                        <a:srgbClr val="DCE4EC"/>
-                      </a:solidFill>
-                      <a:prstDash val="solid"/>
-                      <a:round/>
-                      <a:headEnd type="none" w="med" len="med"/>
-                      <a:tailEnd type="none" w="med" len="med"/>
-                    </a:lnT>
-                    <a:lnB w="6350" cap="flat" cmpd="sng" algn="ctr">
-                      <a:solidFill>
-                        <a:srgbClr val="DCE4EC"/>
-                      </a:solidFill>
-                      <a:prstDash val="solid"/>
-                      <a:round/>
-                      <a:headEnd type="none" w="med" len="med"/>
-                      <a:tailEnd type="none" w="med" len="med"/>
-                    </a:lnB>
-                    <a:solidFill>
-                      <a:srgbClr val="F2F6F9"/>
-                    </a:solidFill>
-                  </a:tcPr>
-                </a:tc>
-                <a:tc>
-                  <a:txBody>
-                    <a:bodyPr/>
-                    <a:lstStyle/>
-                    <a:p>
-                      <a:pPr indent="0" marL="0">
-                        <a:buNone/>
-                      </a:pPr>
-                      <a:r>
-                        <a:rPr lang="en-US" sz="850" b="1" spc="60" kern="0" dirty="0">
-                          <a:solidFill>
-                            <a:srgbClr val="63748A"/>
-                          </a:solidFill>
-                          <a:latin typeface="Calibri" pitchFamily="34" charset="0"/>
-                          <a:ea typeface="Calibri" pitchFamily="34" charset="-122"/>
-                          <a:cs typeface="Calibri" pitchFamily="34" charset="-120"/>
-                        </a:rPr>
-                        <a:t>Core</a:t>
-                      </a:r>
-                      <a:endParaRPr lang="en-US" sz="850" dirty="0">
-                        <a:latin typeface="Calibri" charset="0"/>
-                        <a:ea typeface="Calibri" charset="0"/>
-                        <a:cs typeface="Calibri" charset="0"/>
-                      </a:endParaRPr>
-                    </a:p>
-                  </a:txBody>
-                  <a:tcPr marL="91440" marR="91440" marT="45720" marB="45720" anchor="ctr">
-                    <a:lnL w="6350" cap="flat" cmpd="sng" algn="ctr">
-                      <a:solidFill>
-                        <a:srgbClr val="DCE4EC"/>
-                      </a:solidFill>
-                      <a:prstDash val="solid"/>
-                      <a:round/>
-                      <a:headEnd type="none" w="med" len="med"/>
-                      <a:tailEnd type="none" w="med" len="med"/>
-                    </a:lnL>
-                    <a:lnR w="6350" cap="flat" cmpd="sng" algn="ctr">
-                      <a:solidFill>
-                        <a:srgbClr val="DCE4EC"/>
-                      </a:solidFill>
-                      <a:prstDash val="solid"/>
-                      <a:round/>
-                      <a:headEnd type="none" w="med" len="med"/>
-                      <a:tailEnd type="none" w="med" len="med"/>
-                    </a:lnR>
-                    <a:lnT w="6350" cap="flat" cmpd="sng" algn="ctr">
-                      <a:solidFill>
-                        <a:srgbClr val="DCE4EC"/>
-                      </a:solidFill>
-                      <a:prstDash val="solid"/>
-                      <a:round/>
-                      <a:headEnd type="none" w="med" len="med"/>
-                      <a:tailEnd type="none" w="med" len="med"/>
-                    </a:lnT>
-                    <a:lnB w="6350" cap="flat" cmpd="sng" algn="ctr">
-                      <a:solidFill>
-                        <a:srgbClr val="DCE4EC"/>
-                      </a:solidFill>
-                      <a:prstDash val="solid"/>
-                      <a:round/>
-                      <a:headEnd type="none" w="med" len="med"/>
-                      <a:tailEnd type="none" w="med" len="med"/>
-                    </a:lnB>
-                    <a:solidFill>
-                      <a:srgbClr val="F2F6F9"/>
-                    </a:solidFill>
-                  </a:tcPr>
-                </a:tc>
-                <a:tc>
-                  <a:txBody>
-                    <a:bodyPr/>
-                    <a:lstStyle/>
-                    <a:p>
-                      <a:pPr indent="0" marL="0">
-                        <a:buNone/>
-                      </a:pPr>
-                      <a:r>
-                        <a:rPr lang="en-US" sz="850" b="1" spc="60" kern="0" dirty="0">
-                          <a:solidFill>
-                            <a:srgbClr val="63748A"/>
-                          </a:solidFill>
-                          <a:latin typeface="Calibri" pitchFamily="34" charset="0"/>
-                          <a:ea typeface="Calibri" pitchFamily="34" charset="-122"/>
-                          <a:cs typeface="Calibri" pitchFamily="34" charset="-120"/>
-                        </a:rPr>
-                        <a:t>% pop presenting</a:t>
-                      </a:r>
-                      <a:endParaRPr lang="en-US" sz="850" dirty="0">
-                        <a:latin typeface="Calibri" charset="0"/>
-                        <a:ea typeface="Calibri" charset="0"/>
-                        <a:cs typeface="Calibri" charset="0"/>
-                      </a:endParaRPr>
-                    </a:p>
-                  </a:txBody>
-                  <a:tcPr marL="91440" marR="91440" marT="45720" marB="45720" anchor="ctr">
-                    <a:lnL w="6350" cap="flat" cmpd="sng" algn="ctr">
-                      <a:solidFill>
-                        <a:srgbClr val="DCE4EC"/>
-                      </a:solidFill>
-                      <a:prstDash val="solid"/>
-                      <a:round/>
-                      <a:headEnd type="none" w="med" len="med"/>
-                      <a:tailEnd type="none" w="med" len="med"/>
-                    </a:lnL>
-                    <a:lnR w="6350" cap="flat" cmpd="sng" algn="ctr">
-                      <a:solidFill>
-                        <a:srgbClr val="DCE4EC"/>
-                      </a:solidFill>
-                      <a:prstDash val="solid"/>
-                      <a:round/>
-                      <a:headEnd type="none" w="med" len="med"/>
-                      <a:tailEnd type="none" w="med" len="med"/>
-                    </a:lnR>
-                    <a:lnT w="6350" cap="flat" cmpd="sng" algn="ctr">
-                      <a:solidFill>
-                        <a:srgbClr val="DCE4EC"/>
-                      </a:solidFill>
-                      <a:prstDash val="solid"/>
-                      <a:round/>
-                      <a:headEnd type="none" w="med" len="med"/>
-                      <a:tailEnd type="none" w="med" len="med"/>
-                    </a:lnT>
-                    <a:lnB w="6350" cap="flat" cmpd="sng" algn="ctr">
-                      <a:solidFill>
-                        <a:srgbClr val="DCE4EC"/>
-                      </a:solidFill>
-                      <a:prstDash val="solid"/>
-                      <a:round/>
-                      <a:headEnd type="none" w="med" len="med"/>
-                      <a:tailEnd type="none" w="med" len="med"/>
-                    </a:lnB>
-                    <a:solidFill>
-                      <a:srgbClr val="F2F6F9"/>
-                    </a:solidFill>
-                  </a:tcPr>
-                </a:tc>
-                <a:tc>
-                  <a:txBody>
-                    <a:bodyPr/>
-                    <a:lstStyle/>
-                    <a:p>
-                      <a:pPr indent="0" marL="0">
-                        <a:buNone/>
-                      </a:pPr>
-                      <a:r>
-                        <a:rPr lang="en-US" sz="850" b="1" spc="60" kern="0" dirty="0">
-                          <a:solidFill>
-                            <a:srgbClr val="63748A"/>
-                          </a:solidFill>
-                          <a:latin typeface="Calibri" pitchFamily="34" charset="0"/>
-                          <a:ea typeface="Calibri" pitchFamily="34" charset="-122"/>
-                          <a:cs typeface="Calibri" pitchFamily="34" charset="-120"/>
-                        </a:rPr>
-                        <a:t>B-cell region</a:t>
-                      </a:r>
-                      <a:endParaRPr lang="en-US" sz="850" dirty="0">
-                        <a:latin typeface="Calibri" charset="0"/>
-                        <a:ea typeface="Calibri" charset="0"/>
-                        <a:cs typeface="Calibri" charset="0"/>
-                      </a:endParaRPr>
-                    </a:p>
-                  </a:txBody>
-                  <a:tcPr marL="91440" marR="91440" marT="45720" marB="45720" anchor="ctr">
-                    <a:lnL w="6350" cap="flat" cmpd="sng" algn="ctr">
-                      <a:solidFill>
-                        <a:srgbClr val="DCE4EC"/>
-                      </a:solidFill>
-                      <a:prstDash val="solid"/>
-                      <a:round/>
-                      <a:headEnd type="none" w="med" len="med"/>
-                      <a:tailEnd type="none" w="med" len="med"/>
-                    </a:lnL>
-                    <a:lnR w="6350" cap="flat" cmpd="sng" algn="ctr">
-                      <a:solidFill>
-                        <a:srgbClr val="DCE4EC"/>
-                      </a:solidFill>
-                      <a:prstDash val="solid"/>
-                      <a:round/>
-                      <a:headEnd type="none" w="med" len="med"/>
-                      <a:tailEnd type="none" w="med" len="med"/>
-                    </a:lnR>
-                    <a:lnT w="6350" cap="flat" cmpd="sng" algn="ctr">
-                      <a:solidFill>
-                        <a:srgbClr val="DCE4EC"/>
-                      </a:solidFill>
-                      <a:prstDash val="solid"/>
-                      <a:round/>
-                      <a:headEnd type="none" w="med" len="med"/>
-                      <a:tailEnd type="none" w="med" len="med"/>
-                    </a:lnT>
-                    <a:lnB w="6350" cap="flat" cmpd="sng" algn="ctr">
-                      <a:solidFill>
-                        <a:srgbClr val="DCE4EC"/>
-                      </a:solidFill>
-                      <a:prstDash val="solid"/>
-                      <a:round/>
-                      <a:headEnd type="none" w="med" len="med"/>
-                      <a:tailEnd type="none" w="med" len="med"/>
-                    </a:lnB>
-                    <a:solidFill>
-                      <a:srgbClr val="F2F6F9"/>
-                    </a:solidFill>
-                  </a:tcPr>
-                </a:tc>
-                <a:tc>
-                  <a:txBody>
-                    <a:bodyPr/>
-                    <a:lstStyle/>
-                    <a:p>
-                      <a:pPr indent="0" marL="0">
-                        <a:buNone/>
-                      </a:pPr>
-                      <a:r>
-                        <a:rPr lang="en-US" sz="850" b="1" spc="60" kern="0" dirty="0">
-                          <a:solidFill>
-                            <a:srgbClr val="63748A"/>
-                          </a:solidFill>
-                          <a:latin typeface="Calibri" pitchFamily="34" charset="0"/>
-                          <a:ea typeface="Calibri" pitchFamily="34" charset="-122"/>
-                          <a:cs typeface="Calibri" pitchFamily="34" charset="-120"/>
-                        </a:rPr>
-                        <a:t>Overlap (aa)</a:t>
-                      </a:r>
-                      <a:endParaRPr lang="en-US" sz="850" dirty="0">
-                        <a:latin typeface="Calibri" charset="0"/>
-                        <a:ea typeface="Calibri" charset="0"/>
-                        <a:cs typeface="Calibri" charset="0"/>
-                      </a:endParaRPr>
-                    </a:p>
-                  </a:txBody>
-                  <a:tcPr marL="91440" marR="91440" marT="45720" marB="45720" anchor="ctr">
-                    <a:lnL w="6350" cap="flat" cmpd="sng" algn="ctr">
-                      <a:solidFill>
-                        <a:srgbClr val="DCE4EC"/>
-                      </a:solidFill>
-                      <a:prstDash val="solid"/>
-                      <a:round/>
-                      <a:headEnd type="none" w="med" len="med"/>
-                      <a:tailEnd type="none" w="med" len="med"/>
-                    </a:lnL>
-                    <a:lnR w="6350" cap="flat" cmpd="sng" algn="ctr">
-                      <a:solidFill>
-                        <a:srgbClr val="DCE4EC"/>
-                      </a:solidFill>
-                      <a:prstDash val="solid"/>
-                      <a:round/>
-                      <a:headEnd type="none" w="med" len="med"/>
-                      <a:tailEnd type="none" w="med" len="med"/>
-                    </a:lnR>
-                    <a:lnT w="6350" cap="flat" cmpd="sng" algn="ctr">
-                      <a:solidFill>
-                        <a:srgbClr val="DCE4EC"/>
-                      </a:solidFill>
-                      <a:prstDash val="solid"/>
-                      <a:round/>
-                      <a:headEnd type="none" w="med" len="med"/>
-                      <a:tailEnd type="none" w="med" len="med"/>
-                    </a:lnT>
-                    <a:lnB w="6350" cap="flat" cmpd="sng" algn="ctr">
-                      <a:solidFill>
-                        <a:srgbClr val="DCE4EC"/>
-                      </a:solidFill>
-                      <a:prstDash val="solid"/>
-                      <a:round/>
-                      <a:headEnd type="none" w="med" len="med"/>
-                      <a:tailEnd type="none" w="med" len="med"/>
-                    </a:lnB>
-                    <a:solidFill>
-                      <a:srgbClr val="F2F6F9"/>
-                    </a:solidFill>
-                  </a:tcPr>
-                </a:tc>
-                <a:tc>
-                  <a:txBody>
-                    <a:bodyPr/>
-                    <a:lstStyle/>
-                    <a:p>
-                      <a:pPr indent="0" marL="0">
-                        <a:buNone/>
-                      </a:pPr>
-                      <a:r>
-                        <a:rPr lang="en-US" sz="850" b="1" spc="60" kern="0" dirty="0">
-                          <a:solidFill>
-                            <a:srgbClr val="63748A"/>
-                          </a:solidFill>
-                          <a:latin typeface="Calibri" pitchFamily="34" charset="0"/>
-                          <a:ea typeface="Calibri" pitchFamily="34" charset="-122"/>
-                          <a:cs typeface="Calibri" pitchFamily="34" charset="-120"/>
-                        </a:rPr>
-                        <a:t>Region sequence</a:t>
-                      </a:r>
-                      <a:endParaRPr lang="en-US" sz="850" dirty="0">
-                        <a:latin typeface="Calibri" charset="0"/>
-                        <a:ea typeface="Calibri" charset="0"/>
-                        <a:cs typeface="Calibri" charset="0"/>
-                      </a:endParaRPr>
-                    </a:p>
-                  </a:txBody>
-                  <a:tcPr marL="91440" marR="91440" marT="45720" marB="45720" anchor="ctr">
-                    <a:lnL w="6350" cap="flat" cmpd="sng" algn="ctr">
-                      <a:solidFill>
-                        <a:srgbClr val="DCE4EC"/>
-                      </a:solidFill>
-                      <a:prstDash val="solid"/>
-                      <a:round/>
-                      <a:headEnd type="none" w="med" len="med"/>
-                      <a:tailEnd type="none" w="med" len="med"/>
-                    </a:lnL>
-                    <a:lnR w="6350" cap="flat" cmpd="sng" algn="ctr">
-                      <a:solidFill>
-                        <a:srgbClr val="DCE4EC"/>
-                      </a:solidFill>
-                      <a:prstDash val="solid"/>
-                      <a:round/>
-                      <a:headEnd type="none" w="med" len="med"/>
-                      <a:tailEnd type="none" w="med" len="med"/>
-                    </a:lnR>
-                    <a:lnT w="6350" cap="flat" cmpd="sng" algn="ctr">
-                      <a:solidFill>
-                        <a:srgbClr val="DCE4EC"/>
-                      </a:solidFill>
-                      <a:prstDash val="solid"/>
-                      <a:round/>
-                      <a:headEnd type="none" w="med" len="med"/>
-                      <a:tailEnd type="none" w="med" len="med"/>
-                    </a:lnT>
-                    <a:lnB w="6350" cap="flat" cmpd="sng" algn="ctr">
-                      <a:solidFill>
-                        <a:srgbClr val="DCE4EC"/>
-                      </a:solidFill>
-                      <a:prstDash val="solid"/>
-                      <a:round/>
-                      <a:headEnd type="none" w="med" len="med"/>
-                      <a:tailEnd type="none" w="med" len="med"/>
-                    </a:lnB>
-                    <a:solidFill>
-                      <a:srgbClr val="F2F6F9"/>
-                    </a:solidFill>
-                  </a:tcPr>
-                </a:tc>
-              </a:tr>
-              <a:tr h="292608">
-                <a:tc>
-                  <a:txBody>
-                    <a:bodyPr/>
-                    <a:lstStyle/>
-                    <a:p>
-                      <a:pPr indent="0" marL="0">
-                        <a:buNone/>
-                      </a:pPr>
-                      <a:r>
-                        <a:rPr lang="en-US" sz="1000" dirty="0">
-                          <a:solidFill>
-                            <a:srgbClr val="12212E"/>
-                          </a:solidFill>
-                          <a:latin typeface="Calibri" pitchFamily="34" charset="0"/>
-                          <a:ea typeface="Calibri" pitchFamily="34" charset="-122"/>
-                          <a:cs typeface="Calibri" pitchFamily="34" charset="-120"/>
-                        </a:rPr>
-                        <a:t>47-56</a:t>
-                      </a:r>
-                      <a:endParaRPr lang="en-US" sz="1000" dirty="0">
-                        <a:latin typeface="Calibri" charset="0"/>
-                        <a:ea typeface="Calibri" charset="0"/>
-                        <a:cs typeface="Calibri" charset="0"/>
-                      </a:endParaRPr>
-                    </a:p>
-                  </a:txBody>
-                  <a:tcPr marL="91440" marR="91440" marT="45720" marB="45720" anchor="ctr">
-                    <a:lnL w="6350" cap="flat" cmpd="sng" algn="ctr">
-                      <a:solidFill>
-                        <a:srgbClr val="DCE4EC"/>
-                      </a:solidFill>
-                      <a:prstDash val="solid"/>
-                      <a:round/>
-                      <a:headEnd type="none" w="med" len="med"/>
-                      <a:tailEnd type="none" w="med" len="med"/>
-                    </a:lnL>
-                    <a:lnR w="6350" cap="flat" cmpd="sng" algn="ctr">
-                      <a:solidFill>
-                        <a:srgbClr val="DCE4EC"/>
-                      </a:solidFill>
-                      <a:prstDash val="solid"/>
-                      <a:round/>
-                      <a:headEnd type="none" w="med" len="med"/>
-                      <a:tailEnd type="none" w="med" len="med"/>
-                    </a:lnR>
-                    <a:lnT w="6350" cap="flat" cmpd="sng" algn="ctr">
-                      <a:solidFill>
-                        <a:srgbClr val="DCE4EC"/>
-                      </a:solidFill>
-                      <a:prstDash val="solid"/>
-                      <a:round/>
-                      <a:headEnd type="none" w="med" len="med"/>
-                      <a:tailEnd type="none" w="med" len="med"/>
-                    </a:lnT>
-                    <a:lnB w="6350" cap="flat" cmpd="sng" algn="ctr">
-                      <a:solidFill>
-                        <a:srgbClr val="DCE4EC"/>
-                      </a:solidFill>
-                      <a:prstDash val="solid"/>
-                      <a:round/>
-                      <a:headEnd type="none" w="med" len="med"/>
-                      <a:tailEnd type="none" w="med" len="med"/>
-                    </a:lnB>
-                  </a:tcPr>
-                </a:tc>
-                <a:tc>
-                  <a:txBody>
-                    <a:bodyPr/>
-                    <a:lstStyle/>
-                    <a:p>
-                      <a:pPr indent="0" marL="0">
-                        <a:buNone/>
-                      </a:pPr>
-                      <a:r>
-                        <a:rPr lang="en-US" sz="1000" b="1" dirty="0">
-                          <a:solidFill>
-                            <a:srgbClr val="12212E"/>
-                          </a:solidFill>
-                          <a:latin typeface="Courier New" pitchFamily="34" charset="0"/>
-                          <a:ea typeface="Courier New" pitchFamily="34" charset="-122"/>
-                          <a:cs typeface="Courier New" pitchFamily="34" charset="-120"/>
-                        </a:rPr>
-                        <a:t>FVAVQDITA</a:t>
-                      </a:r>
-                      <a:endParaRPr lang="en-US" sz="1000" dirty="0">
-                        <a:latin typeface="Courier New" charset="0"/>
-                        <a:ea typeface="Courier New" charset="0"/>
-                        <a:cs typeface="Courier New" charset="0"/>
-                      </a:endParaRPr>
-                    </a:p>
-                  </a:txBody>
-                  <a:tcPr marL="91440" marR="91440" marT="45720" marB="45720" anchor="ctr">
-                    <a:lnL w="6350" cap="flat" cmpd="sng" algn="ctr">
-                      <a:solidFill>
-                        <a:srgbClr val="DCE4EC"/>
-                      </a:solidFill>
-                      <a:prstDash val="solid"/>
-                      <a:round/>
-                      <a:headEnd type="none" w="med" len="med"/>
-                      <a:tailEnd type="none" w="med" len="med"/>
-                    </a:lnL>
-                    <a:lnR w="6350" cap="flat" cmpd="sng" algn="ctr">
-                      <a:solidFill>
-                        <a:srgbClr val="DCE4EC"/>
-                      </a:solidFill>
-                      <a:prstDash val="solid"/>
-                      <a:round/>
-                      <a:headEnd type="none" w="med" len="med"/>
-                      <a:tailEnd type="none" w="med" len="med"/>
-                    </a:lnR>
-                    <a:lnT w="6350" cap="flat" cmpd="sng" algn="ctr">
-                      <a:solidFill>
-                        <a:srgbClr val="DCE4EC"/>
-                      </a:solidFill>
-                      <a:prstDash val="solid"/>
-                      <a:round/>
-                      <a:headEnd type="none" w="med" len="med"/>
-                      <a:tailEnd type="none" w="med" len="med"/>
-                    </a:lnT>
-                    <a:lnB w="6350" cap="flat" cmpd="sng" algn="ctr">
-                      <a:solidFill>
-                        <a:srgbClr val="DCE4EC"/>
-                      </a:solidFill>
-                      <a:prstDash val="solid"/>
-                      <a:round/>
-                      <a:headEnd type="none" w="med" len="med"/>
-                      <a:tailEnd type="none" w="med" len="med"/>
-                    </a:lnB>
-                  </a:tcPr>
-                </a:tc>
-                <a:tc>
-                  <a:txBody>
-                    <a:bodyPr/>
-                    <a:lstStyle/>
-                    <a:p>
-                      <a:pPr algn="r" indent="0" marL="0">
-                        <a:buNone/>
-                      </a:pPr>
-                      <a:r>
-                        <a:rPr lang="en-US" sz="1000" b="1" dirty="0">
-                          <a:solidFill>
-                            <a:srgbClr val="12212E"/>
-                          </a:solidFill>
-                          <a:latin typeface="Calibri" pitchFamily="34" charset="0"/>
-                          <a:ea typeface="Calibri" pitchFamily="34" charset="-122"/>
-                          <a:cs typeface="Calibri" pitchFamily="34" charset="-120"/>
-                        </a:rPr>
-                        <a:t>28.5%</a:t>
-                      </a:r>
-                      <a:endParaRPr lang="en-US" sz="1000" dirty="0">
-                        <a:latin typeface="Calibri" charset="0"/>
-                        <a:ea typeface="Calibri" charset="0"/>
-                        <a:cs typeface="Calibri" charset="0"/>
-                      </a:endParaRPr>
-                    </a:p>
-                  </a:txBody>
-                  <a:tcPr marL="91440" marR="91440" marT="45720" marB="45720" anchor="ctr">
-                    <a:lnL w="6350" cap="flat" cmpd="sng" algn="ctr">
-                      <a:solidFill>
-                        <a:srgbClr val="DCE4EC"/>
-                      </a:solidFill>
-                      <a:prstDash val="solid"/>
-                      <a:round/>
-                      <a:headEnd type="none" w="med" len="med"/>
-                      <a:tailEnd type="none" w="med" len="med"/>
-                    </a:lnL>
-                    <a:lnR w="6350" cap="flat" cmpd="sng" algn="ctr">
-                      <a:solidFill>
-                        <a:srgbClr val="DCE4EC"/>
-                      </a:solidFill>
-                      <a:prstDash val="solid"/>
-                      <a:round/>
-                      <a:headEnd type="none" w="med" len="med"/>
-                      <a:tailEnd type="none" w="med" len="med"/>
-                    </a:lnR>
-                    <a:lnT w="6350" cap="flat" cmpd="sng" algn="ctr">
-                      <a:solidFill>
-                        <a:srgbClr val="DCE4EC"/>
-                      </a:solidFill>
-                      <a:prstDash val="solid"/>
-                      <a:round/>
-                      <a:headEnd type="none" w="med" len="med"/>
-                      <a:tailEnd type="none" w="med" len="med"/>
-                    </a:lnT>
-                    <a:lnB w="6350" cap="flat" cmpd="sng" algn="ctr">
-                      <a:solidFill>
-                        <a:srgbClr val="DCE4EC"/>
-                      </a:solidFill>
-                      <a:prstDash val="solid"/>
-                      <a:round/>
-                      <a:headEnd type="none" w="med" len="med"/>
-                      <a:tailEnd type="none" w="med" len="med"/>
-                    </a:lnB>
-                  </a:tcPr>
-                </a:tc>
-                <a:tc>
-                  <a:txBody>
-                    <a:bodyPr/>
-                    <a:lstStyle/>
-                    <a:p>
-                      <a:pPr indent="0" marL="0">
-                        <a:buNone/>
-                      </a:pPr>
-                      <a:r>
-                        <a:rPr lang="en-US" sz="1000" dirty="0">
-                          <a:solidFill>
-                            <a:srgbClr val="12212E"/>
-                          </a:solidFill>
-                          <a:latin typeface="Calibri" pitchFamily="34" charset="0"/>
-                          <a:ea typeface="Calibri" pitchFamily="34" charset="-122"/>
-                          <a:cs typeface="Calibri" pitchFamily="34" charset="-120"/>
-                        </a:rPr>
-                        <a:t>53-63</a:t>
-                      </a:r>
-                      <a:endParaRPr lang="en-US" sz="1000" dirty="0">
-                        <a:latin typeface="Calibri" charset="0"/>
-                        <a:ea typeface="Calibri" charset="0"/>
-                        <a:cs typeface="Calibri" charset="0"/>
-                      </a:endParaRPr>
-                    </a:p>
-                  </a:txBody>
-                  <a:tcPr marL="91440" marR="91440" marT="45720" marB="45720" anchor="ctr">
-                    <a:lnL w="6350" cap="flat" cmpd="sng" algn="ctr">
-                      <a:solidFill>
-                        <a:srgbClr val="DCE4EC"/>
-                      </a:solidFill>
-                      <a:prstDash val="solid"/>
-                      <a:round/>
-                      <a:headEnd type="none" w="med" len="med"/>
-                      <a:tailEnd type="none" w="med" len="med"/>
-                    </a:lnL>
-                    <a:lnR w="6350" cap="flat" cmpd="sng" algn="ctr">
-                      <a:solidFill>
-                        <a:srgbClr val="DCE4EC"/>
-                      </a:solidFill>
-                      <a:prstDash val="solid"/>
-                      <a:round/>
-                      <a:headEnd type="none" w="med" len="med"/>
-                      <a:tailEnd type="none" w="med" len="med"/>
-                    </a:lnR>
-                    <a:lnT w="6350" cap="flat" cmpd="sng" algn="ctr">
-                      <a:solidFill>
-                        <a:srgbClr val="DCE4EC"/>
-                      </a:solidFill>
-                      <a:prstDash val="solid"/>
-                      <a:round/>
-                      <a:headEnd type="none" w="med" len="med"/>
-                      <a:tailEnd type="none" w="med" len="med"/>
-                    </a:lnT>
-                    <a:lnB w="6350" cap="flat" cmpd="sng" algn="ctr">
-                      <a:solidFill>
-                        <a:srgbClr val="DCE4EC"/>
-                      </a:solidFill>
-                      <a:prstDash val="solid"/>
-                      <a:round/>
-                      <a:headEnd type="none" w="med" len="med"/>
-                      <a:tailEnd type="none" w="med" len="med"/>
-                    </a:lnB>
-                  </a:tcPr>
-                </a:tc>
-                <a:tc>
-                  <a:txBody>
-                    <a:bodyPr/>
-                    <a:lstStyle/>
-                    <a:p>
-                      <a:pPr algn="r" indent="0" marL="0">
-                        <a:buNone/>
-                      </a:pPr>
-                      <a:r>
-                        <a:rPr lang="en-US" sz="1000" dirty="0">
-                          <a:solidFill>
-                            <a:srgbClr val="12212E"/>
-                          </a:solidFill>
-                          <a:latin typeface="Calibri" pitchFamily="34" charset="0"/>
-                          <a:ea typeface="Calibri" pitchFamily="34" charset="-122"/>
-                          <a:cs typeface="Calibri" pitchFamily="34" charset="-120"/>
-                        </a:rPr>
-                        <a:t>4</a:t>
-                      </a:r>
-                      <a:endParaRPr lang="en-US" sz="1000" dirty="0">
-                        <a:latin typeface="Calibri" charset="0"/>
-                        <a:ea typeface="Calibri" charset="0"/>
-                        <a:cs typeface="Calibri" charset="0"/>
-                      </a:endParaRPr>
-                    </a:p>
-                  </a:txBody>
-                  <a:tcPr marL="91440" marR="91440" marT="45720" marB="45720" anchor="ctr">
-                    <a:lnL w="6350" cap="flat" cmpd="sng" algn="ctr">
-                      <a:solidFill>
-                        <a:srgbClr val="DCE4EC"/>
-                      </a:solidFill>
-                      <a:prstDash val="solid"/>
-                      <a:round/>
-                      <a:headEnd type="none" w="med" len="med"/>
-                      <a:tailEnd type="none" w="med" len="med"/>
-                    </a:lnL>
-                    <a:lnR w="6350" cap="flat" cmpd="sng" algn="ctr">
-                      <a:solidFill>
-                        <a:srgbClr val="DCE4EC"/>
-                      </a:solidFill>
-                      <a:prstDash val="solid"/>
-                      <a:round/>
-                      <a:headEnd type="none" w="med" len="med"/>
-                      <a:tailEnd type="none" w="med" len="med"/>
-                    </a:lnR>
-                    <a:lnT w="6350" cap="flat" cmpd="sng" algn="ctr">
-                      <a:solidFill>
-                        <a:srgbClr val="DCE4EC"/>
-                      </a:solidFill>
-                      <a:prstDash val="solid"/>
-                      <a:round/>
-                      <a:headEnd type="none" w="med" len="med"/>
-                      <a:tailEnd type="none" w="med" len="med"/>
-                    </a:lnT>
-                    <a:lnB w="6350" cap="flat" cmpd="sng" algn="ctr">
-                      <a:solidFill>
-                        <a:srgbClr val="DCE4EC"/>
-                      </a:solidFill>
-                      <a:prstDash val="solid"/>
-                      <a:round/>
-                      <a:headEnd type="none" w="med" len="med"/>
-                      <a:tailEnd type="none" w="med" len="med"/>
-                    </a:lnB>
-                  </a:tcPr>
-                </a:tc>
-                <a:tc>
-                  <a:txBody>
-                    <a:bodyPr/>
-                    <a:lstStyle/>
-                    <a:p>
-                      <a:pPr indent="0" marL="0">
-                        <a:buNone/>
-                      </a:pPr>
-                      <a:r>
-                        <a:rPr lang="en-US" sz="850" dirty="0">
-                          <a:solidFill>
-                            <a:srgbClr val="12212E"/>
-                          </a:solidFill>
-                          <a:latin typeface="Courier New" pitchFamily="34" charset="0"/>
-                          <a:ea typeface="Courier New" pitchFamily="34" charset="-122"/>
-                          <a:cs typeface="Courier New" pitchFamily="34" charset="-120"/>
-                        </a:rPr>
-                        <a:t>ITASNTHYSSA</a:t>
-                      </a:r>
-                      <a:endParaRPr lang="en-US" sz="850" dirty="0">
-                        <a:latin typeface="Courier New" charset="0"/>
-                        <a:ea typeface="Courier New" charset="0"/>
-                        <a:cs typeface="Courier New" charset="0"/>
-                      </a:endParaRPr>
-                    </a:p>
-                  </a:txBody>
-                  <a:tcPr marL="91440" marR="91440" marT="45720" marB="45720" anchor="ctr">
-                    <a:lnL w="6350" cap="flat" cmpd="sng" algn="ctr">
-                      <a:solidFill>
-                        <a:srgbClr val="DCE4EC"/>
-                      </a:solidFill>
-                      <a:prstDash val="solid"/>
-                      <a:round/>
-                      <a:headEnd type="none" w="med" len="med"/>
-                      <a:tailEnd type="none" w="med" len="med"/>
-                    </a:lnL>
-                    <a:lnR w="6350" cap="flat" cmpd="sng" algn="ctr">
-                      <a:solidFill>
-                        <a:srgbClr val="DCE4EC"/>
-                      </a:solidFill>
-                      <a:prstDash val="solid"/>
-                      <a:round/>
-                      <a:headEnd type="none" w="med" len="med"/>
-                      <a:tailEnd type="none" w="med" len="med"/>
-                    </a:lnR>
-                    <a:lnT w="6350" cap="flat" cmpd="sng" algn="ctr">
-                      <a:solidFill>
-                        <a:srgbClr val="DCE4EC"/>
-                      </a:solidFill>
-                      <a:prstDash val="solid"/>
-                      <a:round/>
-                      <a:headEnd type="none" w="med" len="med"/>
-                      <a:tailEnd type="none" w="med" len="med"/>
-                    </a:lnT>
-                    <a:lnB w="6350" cap="flat" cmpd="sng" algn="ctr">
-                      <a:solidFill>
-                        <a:srgbClr val="DCE4EC"/>
-                      </a:solidFill>
-                      <a:prstDash val="solid"/>
-                      <a:round/>
-                      <a:headEnd type="none" w="med" len="med"/>
-                      <a:tailEnd type="none" w="med" len="med"/>
-                    </a:lnB>
-                  </a:tcPr>
-                </a:tc>
-              </a:tr>
-            </a:tbl>
-          </a:graphicData>
-        </a:graphic>
-      </p:graphicFrame>
-      <p:sp>
-        <p:nvSpPr>
-          <p:cNvPr id="7" name="Text 3"/>
-          <p:cNvSpPr/>
-          <p:nvPr/>
-        </p:nvSpPr>
-        <p:spPr>
-          <a:xfrm>
-            <a:off x="566928" y="6172200"/>
-            <a:ext cx="11027664" cy="502920"/>
-          </a:xfrm>
-          <a:prstGeom prst="rect">
-            <a:avLst/>
-          </a:prstGeom>
-          <a:noFill/>
-          <a:ln/>
-        </p:spPr>
-        <p:txBody>
-          <a:bodyPr wrap="square" lIns="0" tIns="0" rIns="0" bIns="0" rtlCol="0" anchor="ctr"/>
-          <a:lstStyle/>
-          <a:p>
-            <a:pPr indent="0" marL="0">
-              <a:lnSpc>
-                <a:spcPts val="1200"/>
-              </a:lnSpc>
-              <a:buNone/>
-            </a:pPr>
-            <a:r>
-              <a:rPr lang="en-US" sz="950" i="1" dirty="0">
-                <a:solidFill>
-                  <a:srgbClr val="63748A"/>
-                </a:solidFill>
-                <a:latin typeface="Calibri" pitchFamily="34" charset="0"/>
-                <a:ea typeface="Calibri" pitchFamily="34" charset="-122"/>
-                <a:cs typeface="Calibri" pitchFamily="34" charset="-120"/>
-              </a:rPr>
-              <a:t>BepiPred-2.0 linear B-cell propensity is the weakest model in this pipeline — most real ADA epitopes are conformational. This layer prioritises regions; it is never a standalone claim.</a:t>
-            </a:r>
-            <a:endParaRPr lang="en-US" sz="950" dirty="0"/>
-          </a:p>
-        </p:txBody>
-      </p:sp>
     </p:spTree>
   </p:cSld>
   <p:clrMapOvr>

--- a/hla_ligand_immunogenicity/report.pptx
+++ b/hla_ligand_immunogenicity/report.pptx
@@ -19,9 +19,10 @@
     <p:sldId id="267" r:id="rId13"/>
     <p:sldId id="268" r:id="rId14"/>
     <p:sldId id="269" r:id="rId15"/>
+    <p:sldId id="270" r:id="rId16"/>
   </p:sldIdLst>
   <p:notesMasterIdLst>
-    <p:notesMasterId r:id="rId16"/>
+    <p:notesMasterId r:id="rId17"/>
   </p:notesMasterIdLst>
   <p:sldSz cx="12192000" cy="6858000"/>
   <p:notesSz cx="6858000" cy="12192000"/>
@@ -997,6 +998,94 @@
 </p:notes>
 </file>
 
+<file path=ppt/notesSlides/notesSlide15.xml><?xml version="1.0" encoding="utf-8"?>
+<p:notes xmlns:a="http://schemas.openxmlformats.org/drawingml/2006/main" xmlns:r="http://schemas.openxmlformats.org/officeDocument/2006/relationships" xmlns:p="http://schemas.openxmlformats.org/presentationml/2006/main">
+  <p:cSld>
+    <p:spTree>
+      <p:nvGrpSpPr>
+        <p:cNvPr id="1" name=""/>
+        <p:cNvGrpSpPr/>
+        <p:nvPr/>
+      </p:nvGrpSpPr>
+      <p:grpSpPr>
+        <a:xfrm>
+          <a:off x="0" y="0"/>
+          <a:ext cx="0" cy="0"/>
+          <a:chOff x="0" y="0"/>
+          <a:chExt cx="0" cy="0"/>
+        </a:xfrm>
+      </p:grpSpPr>
+      <p:sp>
+        <p:nvSpPr>
+          <p:cNvPr id="2" name="Slide Image Placeholder 1"/>
+          <p:cNvSpPr>
+            <a:spLocks noGrp="1" noRot="1" noChangeAspect="1"/>
+          </p:cNvSpPr>
+          <p:nvPr>
+            <p:ph type="sldImg"/>
+          </p:nvPr>
+        </p:nvSpPr>
+        <p:spPr/>
+      </p:sp>
+      <p:sp>
+        <p:nvSpPr>
+          <p:cNvPr id="3" name="Notes Placeholder 2"/>
+          <p:cNvSpPr>
+            <a:spLocks noGrp="1"/>
+          </p:cNvSpPr>
+          <p:nvPr>
+            <p:ph type="body" idx="1"/>
+          </p:nvPr>
+        </p:nvSpPr>
+        <p:spPr/>
+        <p:txBody>
+          <a:bodyPr/>
+          <a:lstStyle/>
+          <a:p>
+            <a:r>
+              <a:rPr lang="en-US" dirty="0"/>
+              <a:t/>
+            </a:r>
+            <a:endParaRPr lang="en-US" dirty="0"/>
+          </a:p>
+        </p:txBody>
+      </p:sp>
+      <p:sp>
+        <p:nvSpPr>
+          <p:cNvPr id="4" name="Slide Number Placeholder 3"/>
+          <p:cNvSpPr>
+            <a:spLocks noGrp="1"/>
+          </p:cNvSpPr>
+          <p:nvPr>
+            <p:ph type="sldNum" sz="quarter" idx="10"/>
+          </p:nvPr>
+        </p:nvSpPr>
+        <p:spPr/>
+        <p:txBody>
+          <a:bodyPr/>
+          <a:lstStyle/>
+          <a:p>
+            <a:fld id="{F7021451-1387-4CA6-816F-3879F97B5CBC}" type="slidenum">
+              <a:rPr lang="en-US"/>
+              <a:t>15</a:t>
+            </a:fld>
+            <a:endParaRPr lang="en-US"/>
+          </a:p>
+        </p:txBody>
+      </p:sp>
+    </p:spTree>
+    <p:extLst>
+      <p:ext uri="{BB962C8B-B14F-4D97-AF65-F5344CB8AC3E}">
+        <p14:creationId xmlns:p14="http://schemas.microsoft.com/office/powerpoint/2010/main" val="1024086991"/>
+      </p:ext>
+    </p:extLst>
+  </p:cSld>
+  <p:clrMapOvr>
+    <a:masterClrMapping/>
+  </p:clrMapOvr>
+</p:notes>
+</file>
+
 <file path=ppt/notesSlides/notesSlide2.xml><?xml version="1.0" encoding="utf-8"?>
 <p:notes xmlns:a="http://schemas.openxmlformats.org/drawingml/2006/main" xmlns:r="http://schemas.openxmlformats.org/officeDocument/2006/relationships" xmlns:p="http://schemas.openxmlformats.org/presentationml/2006/main">
   <p:cSld>
@@ -1659,7 +1748,7 @@
           <a:p>
             <a:r>
               <a:rPr lang="en-US" dirty="0"/>
-              <a:t/>
+              <a:t>Fourth measured negative result in this pipeline. Requiring N molecules or ranking on population coverage would trade sensitivity for nothing: breadth &gt;= 2 at %Rank &lt; 1 raises specificity to 0.79 but drops sensitivity to 0.28, and MCC barely moves. The multi-allele stratum is 84% positive, so its result is a small-sample signal that breadth is not adding information even where it is measurable.</a:t>
             </a:r>
             <a:endParaRPr lang="en-US" dirty="0"/>
           </a:p>
@@ -2276,6 +2365,1154 @@
                 <a:ea typeface="Calibri" pitchFamily="34" charset="-122"/>
                 <a:cs typeface="Calibri" pitchFamily="34" charset="-120"/>
               </a:rPr>
+              <a:t>MODULES 5–6 · SCORING</a:t>
+            </a:r>
+            <a:endParaRPr lang="en-US" sz="1050" dirty="0"/>
+          </a:p>
+        </p:txBody>
+      </p:sp>
+      <p:sp>
+        <p:nvSpPr>
+          <p:cNvPr id="3" name="Text 1"/>
+          <p:cNvSpPr/>
+          <p:nvPr/>
+        </p:nvSpPr>
+        <p:spPr>
+          <a:xfrm>
+            <a:off x="566928" y="548640"/>
+            <a:ext cx="11027664" cy="548640"/>
+          </a:xfrm>
+          <a:prstGeom prst="rect">
+            <a:avLst/>
+          </a:prstGeom>
+          <a:noFill/>
+          <a:ln/>
+        </p:spPr>
+        <p:txBody>
+          <a:bodyPr wrap="square" lIns="0" tIns="0" rIns="0" bIns="0" rtlCol="0" anchor="ctr"/>
+          <a:lstStyle/>
+          <a:p>
+            <a:pPr indent="0" marL="0">
+              <a:buNone/>
+            </a:pPr>
+            <a:r>
+              <a:rPr lang="en-US" sz="2700" b="1" dirty="0">
+                <a:solidFill>
+                  <a:srgbClr val="12212E"/>
+                </a:solidFill>
+                <a:latin typeface="Cambria" pitchFamily="34" charset="0"/>
+                <a:ea typeface="Cambria" pitchFamily="34" charset="-122"/>
+                <a:cs typeface="Cambria" pitchFamily="34" charset="-120"/>
+              </a:rPr>
+              <a:t>Calibrated against benchmarks and controls in the same batch</a:t>
+            </a:r>
+            <a:endParaRPr lang="en-US" sz="2700" dirty="0"/>
+          </a:p>
+        </p:txBody>
+      </p:sp>
+      <p:pic>
+        <p:nvPicPr>
+          <p:cNvPr id="4" name="Image 0" descr="/home/user/ClaudeCode/hla_ligand_immunogenicity/figures/fig3_calibrated_ranking.png">    </p:cNvPr>
+          <p:cNvPicPr>
+            <a:picLocks noChangeAspect="1"/>
+          </p:cNvPicPr>
+          <p:nvPr/>
+        </p:nvPicPr>
+        <p:blipFill>
+          <a:blip r:embed="rId1"/>
+          <a:stretch>
+            <a:fillRect/>
+          </a:stretch>
+        </p:blipFill>
+        <p:spPr>
+          <a:xfrm>
+            <a:off x="566928" y="1097280"/>
+            <a:ext cx="11027664" cy="3566160"/>
+          </a:xfrm>
+          <a:prstGeom prst="rect">
+            <a:avLst/>
+          </a:prstGeom>
+        </p:spPr>
+      </p:pic>
+      <p:graphicFrame>
+        <p:nvGraphicFramePr>
+          <p:cNvPr id="11" name="Table 0"/>
+          <p:cNvGraphicFramePr>
+            <a:graphicFrameLocks noGrp="1"/>
+          </p:cNvGraphicFramePr>
+          <p:nvPr>
+            <p:extLst>
+              <p:ext uri="{D42A27DB-BD31-4B8C-83A1-F6EECF244321}">
+                <p14:modId xmlns:p14="http://schemas.microsoft.com/office/powerpoint/2010/main" val="1579011935"/>
+              </p:ext>
+            </p:extLst>
+          </p:nvPr>
+        </p:nvGraphicFramePr>
+        <p:xfrm>
+          <a:off x="566928" y="4800600"/>
+          <a:ext cx="11027664" cy="914400"/>
+        </p:xfrm>
+        <a:graphic>
+          <a:graphicData uri="http://schemas.openxmlformats.org/drawingml/2006/table">
+            <a:tbl>
+              <a:tblPr/>
+              <a:tblGrid>
+                <a:gridCol w="3108960"/>
+                <a:gridCol w="7095744"/>
+                <a:gridCol w="822960"/>
+              </a:tblGrid>
+              <a:tr h="310896">
+                <a:tc>
+                  <a:txBody>
+                    <a:bodyPr/>
+                    <a:lstStyle/>
+                    <a:p>
+                      <a:pPr indent="0" marL="0">
+                        <a:buNone/>
+                      </a:pPr>
+                      <a:r>
+                        <a:rPr lang="en-US" sz="850" b="1" spc="60" kern="0" dirty="0">
+                          <a:solidFill>
+                            <a:srgbClr val="63748A"/>
+                          </a:solidFill>
+                          <a:latin typeface="Calibri" pitchFamily="34" charset="0"/>
+                          <a:ea typeface="Calibri" pitchFamily="34" charset="-122"/>
+                          <a:cs typeface="Calibri" pitchFamily="34" charset="-120"/>
+                        </a:rPr>
+                        <a:t>System suitability check</a:t>
+                      </a:r>
+                      <a:endParaRPr lang="en-US" sz="850" dirty="0">
+                        <a:latin typeface="Calibri" charset="0"/>
+                        <a:ea typeface="Calibri" charset="0"/>
+                        <a:cs typeface="Calibri" charset="0"/>
+                      </a:endParaRPr>
+                    </a:p>
+                  </a:txBody>
+                  <a:tcPr marL="91440" marR="91440" marT="45720" marB="45720" anchor="ctr">
+                    <a:lnL w="6350" cap="flat" cmpd="sng" algn="ctr">
+                      <a:solidFill>
+                        <a:srgbClr val="DCE4EC"/>
+                      </a:solidFill>
+                      <a:prstDash val="solid"/>
+                      <a:round/>
+                      <a:headEnd type="none" w="med" len="med"/>
+                      <a:tailEnd type="none" w="med" len="med"/>
+                    </a:lnL>
+                    <a:lnR w="6350" cap="flat" cmpd="sng" algn="ctr">
+                      <a:solidFill>
+                        <a:srgbClr val="DCE4EC"/>
+                      </a:solidFill>
+                      <a:prstDash val="solid"/>
+                      <a:round/>
+                      <a:headEnd type="none" w="med" len="med"/>
+                      <a:tailEnd type="none" w="med" len="med"/>
+                    </a:lnR>
+                    <a:lnT w="6350" cap="flat" cmpd="sng" algn="ctr">
+                      <a:solidFill>
+                        <a:srgbClr val="DCE4EC"/>
+                      </a:solidFill>
+                      <a:prstDash val="solid"/>
+                      <a:round/>
+                      <a:headEnd type="none" w="med" len="med"/>
+                      <a:tailEnd type="none" w="med" len="med"/>
+                    </a:lnT>
+                    <a:lnB w="6350" cap="flat" cmpd="sng" algn="ctr">
+                      <a:solidFill>
+                        <a:srgbClr val="DCE4EC"/>
+                      </a:solidFill>
+                      <a:prstDash val="solid"/>
+                      <a:round/>
+                      <a:headEnd type="none" w="med" len="med"/>
+                      <a:tailEnd type="none" w="med" len="med"/>
+                    </a:lnB>
+                    <a:solidFill>
+                      <a:srgbClr val="F2F6F9"/>
+                    </a:solidFill>
+                  </a:tcPr>
+                </a:tc>
+                <a:tc>
+                  <a:txBody>
+                    <a:bodyPr/>
+                    <a:lstStyle/>
+                    <a:p>
+                      <a:pPr indent="0" marL="0">
+                        <a:buNone/>
+                      </a:pPr>
+                      <a:r>
+                        <a:rPr lang="en-US" sz="850" b="1" spc="60" kern="0" dirty="0">
+                          <a:solidFill>
+                            <a:srgbClr val="63748A"/>
+                          </a:solidFill>
+                          <a:latin typeface="Calibri" pitchFamily="34" charset="0"/>
+                          <a:ea typeface="Calibri" pitchFamily="34" charset="-122"/>
+                          <a:cs typeface="Calibri" pitchFamily="34" charset="-120"/>
+                        </a:rPr>
+                        <a:t>Observed</a:t>
+                      </a:r>
+                      <a:endParaRPr lang="en-US" sz="850" dirty="0">
+                        <a:latin typeface="Calibri" charset="0"/>
+                        <a:ea typeface="Calibri" charset="0"/>
+                        <a:cs typeface="Calibri" charset="0"/>
+                      </a:endParaRPr>
+                    </a:p>
+                  </a:txBody>
+                  <a:tcPr marL="91440" marR="91440" marT="45720" marB="45720" anchor="ctr">
+                    <a:lnL w="6350" cap="flat" cmpd="sng" algn="ctr">
+                      <a:solidFill>
+                        <a:srgbClr val="DCE4EC"/>
+                      </a:solidFill>
+                      <a:prstDash val="solid"/>
+                      <a:round/>
+                      <a:headEnd type="none" w="med" len="med"/>
+                      <a:tailEnd type="none" w="med" len="med"/>
+                    </a:lnL>
+                    <a:lnR w="6350" cap="flat" cmpd="sng" algn="ctr">
+                      <a:solidFill>
+                        <a:srgbClr val="DCE4EC"/>
+                      </a:solidFill>
+                      <a:prstDash val="solid"/>
+                      <a:round/>
+                      <a:headEnd type="none" w="med" len="med"/>
+                      <a:tailEnd type="none" w="med" len="med"/>
+                    </a:lnR>
+                    <a:lnT w="6350" cap="flat" cmpd="sng" algn="ctr">
+                      <a:solidFill>
+                        <a:srgbClr val="DCE4EC"/>
+                      </a:solidFill>
+                      <a:prstDash val="solid"/>
+                      <a:round/>
+                      <a:headEnd type="none" w="med" len="med"/>
+                      <a:tailEnd type="none" w="med" len="med"/>
+                    </a:lnT>
+                    <a:lnB w="6350" cap="flat" cmpd="sng" algn="ctr">
+                      <a:solidFill>
+                        <a:srgbClr val="DCE4EC"/>
+                      </a:solidFill>
+                      <a:prstDash val="solid"/>
+                      <a:round/>
+                      <a:headEnd type="none" w="med" len="med"/>
+                      <a:tailEnd type="none" w="med" len="med"/>
+                    </a:lnB>
+                    <a:solidFill>
+                      <a:srgbClr val="F2F6F9"/>
+                    </a:solidFill>
+                  </a:tcPr>
+                </a:tc>
+                <a:tc>
+                  <a:txBody>
+                    <a:bodyPr/>
+                    <a:lstStyle/>
+                    <a:p>
+                      <a:pPr indent="0" marL="0">
+                        <a:buNone/>
+                      </a:pPr>
+                      <a:endParaRPr lang="en-US" sz="850" dirty="0">
+                        <a:latin typeface="Calibri" charset="0"/>
+                        <a:ea typeface="Calibri" charset="0"/>
+                        <a:cs typeface="Calibri" charset="0"/>
+                      </a:endParaRPr>
+                    </a:p>
+                  </a:txBody>
+                  <a:tcPr marL="91440" marR="91440" marT="45720" marB="45720" anchor="ctr">
+                    <a:lnL w="6350" cap="flat" cmpd="sng" algn="ctr">
+                      <a:solidFill>
+                        <a:srgbClr val="DCE4EC"/>
+                      </a:solidFill>
+                      <a:prstDash val="solid"/>
+                      <a:round/>
+                      <a:headEnd type="none" w="med" len="med"/>
+                      <a:tailEnd type="none" w="med" len="med"/>
+                    </a:lnL>
+                    <a:lnR w="6350" cap="flat" cmpd="sng" algn="ctr">
+                      <a:solidFill>
+                        <a:srgbClr val="DCE4EC"/>
+                      </a:solidFill>
+                      <a:prstDash val="solid"/>
+                      <a:round/>
+                      <a:headEnd type="none" w="med" len="med"/>
+                      <a:tailEnd type="none" w="med" len="med"/>
+                    </a:lnR>
+                    <a:lnT w="6350" cap="flat" cmpd="sng" algn="ctr">
+                      <a:solidFill>
+                        <a:srgbClr val="DCE4EC"/>
+                      </a:solidFill>
+                      <a:prstDash val="solid"/>
+                      <a:round/>
+                      <a:headEnd type="none" w="med" len="med"/>
+                      <a:tailEnd type="none" w="med" len="med"/>
+                    </a:lnT>
+                    <a:lnB w="6350" cap="flat" cmpd="sng" algn="ctr">
+                      <a:solidFill>
+                        <a:srgbClr val="DCE4EC"/>
+                      </a:solidFill>
+                      <a:prstDash val="solid"/>
+                      <a:round/>
+                      <a:headEnd type="none" w="med" len="med"/>
+                      <a:tailEnd type="none" w="med" len="med"/>
+                    </a:lnB>
+                    <a:solidFill>
+                      <a:srgbClr val="F2F6F9"/>
+                    </a:solidFill>
+                  </a:tcPr>
+                </a:tc>
+              </a:tr>
+              <a:tr h="310896">
+                <a:tc>
+                  <a:txBody>
+                    <a:bodyPr/>
+                    <a:lstStyle/>
+                    <a:p>
+                      <a:pPr indent="0" marL="0">
+                        <a:buNone/>
+                      </a:pPr>
+                      <a:r>
+                        <a:rPr lang="en-US" sz="950" b="1" dirty="0">
+                          <a:solidFill>
+                            <a:srgbClr val="12212E"/>
+                          </a:solidFill>
+                          <a:latin typeface="Calibri" pitchFamily="34" charset="0"/>
+                          <a:ea typeface="Calibri" pitchFamily="34" charset="-122"/>
+                          <a:cs typeface="Calibri" pitchFamily="34" charset="-120"/>
+                        </a:rPr>
+                        <a:t>universal epitopes detected with multi-allele breadth</a:t>
+                      </a:r>
+                      <a:endParaRPr lang="en-US" sz="950" dirty="0">
+                        <a:latin typeface="Calibri" charset="0"/>
+                        <a:ea typeface="Calibri" charset="0"/>
+                        <a:cs typeface="Calibri" charset="0"/>
+                      </a:endParaRPr>
+                    </a:p>
+                  </a:txBody>
+                  <a:tcPr marL="91440" marR="91440" marT="45720" marB="45720" anchor="ctr">
+                    <a:lnL w="6350" cap="flat" cmpd="sng" algn="ctr">
+                      <a:solidFill>
+                        <a:srgbClr val="DCE4EC"/>
+                      </a:solidFill>
+                      <a:prstDash val="solid"/>
+                      <a:round/>
+                      <a:headEnd type="none" w="med" len="med"/>
+                      <a:tailEnd type="none" w="med" len="med"/>
+                    </a:lnL>
+                    <a:lnR w="6350" cap="flat" cmpd="sng" algn="ctr">
+                      <a:solidFill>
+                        <a:srgbClr val="DCE4EC"/>
+                      </a:solidFill>
+                      <a:prstDash val="solid"/>
+                      <a:round/>
+                      <a:headEnd type="none" w="med" len="med"/>
+                      <a:tailEnd type="none" w="med" len="med"/>
+                    </a:lnR>
+                    <a:lnT w="6350" cap="flat" cmpd="sng" algn="ctr">
+                      <a:solidFill>
+                        <a:srgbClr val="DCE4EC"/>
+                      </a:solidFill>
+                      <a:prstDash val="solid"/>
+                      <a:round/>
+                      <a:headEnd type="none" w="med" len="med"/>
+                      <a:tailEnd type="none" w="med" len="med"/>
+                    </a:lnT>
+                    <a:lnB w="6350" cap="flat" cmpd="sng" algn="ctr">
+                      <a:solidFill>
+                        <a:srgbClr val="DCE4EC"/>
+                      </a:solidFill>
+                      <a:prstDash val="solid"/>
+                      <a:round/>
+                      <a:headEnd type="none" w="med" len="med"/>
+                      <a:tailEnd type="none" w="med" len="med"/>
+                    </a:lnB>
+                  </a:tcPr>
+                </a:tc>
+                <a:tc>
+                  <a:txBody>
+                    <a:bodyPr/>
+                    <a:lstStyle/>
+                    <a:p>
+                      <a:pPr indent="0" marL="0">
+                        <a:buNone/>
+                      </a:pPr>
+                      <a:r>
+                        <a:rPr lang="en-US" sz="900" dirty="0">
+                          <a:solidFill>
+                            <a:srgbClr val="3B4A5A"/>
+                          </a:solidFill>
+                          <a:latin typeface="Calibri" pitchFamily="34" charset="0"/>
+                          <a:ea typeface="Calibri" pitchFamily="34" charset="-122"/>
+                          <a:cs typeface="Calibri" pitchFamily="34" charset="-120"/>
+                        </a:rPr>
+                        <a:t>HA_306_318_region 8/25 DR at %Rank&lt;5 (2 at &lt;1, best 0.46); TT_p2_region 15/25 DR at %Rank&lt;5 (6 at &lt;1, best 0.06); TT_p30_region 5/25 DR at %Rank&lt;5 (2 at &lt;1, best 0.64)</a:t>
+                      </a:r>
+                      <a:endParaRPr lang="en-US" sz="900" dirty="0">
+                        <a:latin typeface="Calibri" charset="0"/>
+                        <a:ea typeface="Calibri" charset="0"/>
+                        <a:cs typeface="Calibri" charset="0"/>
+                      </a:endParaRPr>
+                    </a:p>
+                  </a:txBody>
+                  <a:tcPr marL="91440" marR="91440" marT="45720" marB="45720" anchor="ctr">
+                    <a:lnL w="6350" cap="flat" cmpd="sng" algn="ctr">
+                      <a:solidFill>
+                        <a:srgbClr val="DCE4EC"/>
+                      </a:solidFill>
+                      <a:prstDash val="solid"/>
+                      <a:round/>
+                      <a:headEnd type="none" w="med" len="med"/>
+                      <a:tailEnd type="none" w="med" len="med"/>
+                    </a:lnL>
+                    <a:lnR w="6350" cap="flat" cmpd="sng" algn="ctr">
+                      <a:solidFill>
+                        <a:srgbClr val="DCE4EC"/>
+                      </a:solidFill>
+                      <a:prstDash val="solid"/>
+                      <a:round/>
+                      <a:headEnd type="none" w="med" len="med"/>
+                      <a:tailEnd type="none" w="med" len="med"/>
+                    </a:lnR>
+                    <a:lnT w="6350" cap="flat" cmpd="sng" algn="ctr">
+                      <a:solidFill>
+                        <a:srgbClr val="DCE4EC"/>
+                      </a:solidFill>
+                      <a:prstDash val="solid"/>
+                      <a:round/>
+                      <a:headEnd type="none" w="med" len="med"/>
+                      <a:tailEnd type="none" w="med" len="med"/>
+                    </a:lnT>
+                    <a:lnB w="6350" cap="flat" cmpd="sng" algn="ctr">
+                      <a:solidFill>
+                        <a:srgbClr val="DCE4EC"/>
+                      </a:solidFill>
+                      <a:prstDash val="solid"/>
+                      <a:round/>
+                      <a:headEnd type="none" w="med" len="med"/>
+                      <a:tailEnd type="none" w="med" len="med"/>
+                    </a:lnB>
+                  </a:tcPr>
+                </a:tc>
+                <a:tc>
+                  <a:txBody>
+                    <a:bodyPr/>
+                    <a:lstStyle/>
+                    <a:p>
+                      <a:pPr algn="ctr" indent="0" marL="0">
+                        <a:buNone/>
+                      </a:pPr>
+                      <a:r>
+                        <a:rPr lang="en-US" sz="950" b="1" dirty="0">
+                          <a:solidFill>
+                            <a:srgbClr val="3D8A6B"/>
+                          </a:solidFill>
+                          <a:latin typeface="Calibri" pitchFamily="34" charset="0"/>
+                          <a:ea typeface="Calibri" pitchFamily="34" charset="-122"/>
+                          <a:cs typeface="Calibri" pitchFamily="34" charset="-120"/>
+                        </a:rPr>
+                        <a:t>PASS</a:t>
+                      </a:r>
+                      <a:endParaRPr lang="en-US" sz="950" dirty="0">
+                        <a:latin typeface="Calibri" charset="0"/>
+                        <a:ea typeface="Calibri" charset="0"/>
+                        <a:cs typeface="Calibri" charset="0"/>
+                      </a:endParaRPr>
+                    </a:p>
+                  </a:txBody>
+                  <a:tcPr marL="91440" marR="91440" marT="45720" marB="45720" anchor="ctr">
+                    <a:lnL w="6350" cap="flat" cmpd="sng" algn="ctr">
+                      <a:solidFill>
+                        <a:srgbClr val="DCE4EC"/>
+                      </a:solidFill>
+                      <a:prstDash val="solid"/>
+                      <a:round/>
+                      <a:headEnd type="none" w="med" len="med"/>
+                      <a:tailEnd type="none" w="med" len="med"/>
+                    </a:lnL>
+                    <a:lnR w="6350" cap="flat" cmpd="sng" algn="ctr">
+                      <a:solidFill>
+                        <a:srgbClr val="DCE4EC"/>
+                      </a:solidFill>
+                      <a:prstDash val="solid"/>
+                      <a:round/>
+                      <a:headEnd type="none" w="med" len="med"/>
+                      <a:tailEnd type="none" w="med" len="med"/>
+                    </a:lnR>
+                    <a:lnT w="6350" cap="flat" cmpd="sng" algn="ctr">
+                      <a:solidFill>
+                        <a:srgbClr val="DCE4EC"/>
+                      </a:solidFill>
+                      <a:prstDash val="solid"/>
+                      <a:round/>
+                      <a:headEnd type="none" w="med" len="med"/>
+                      <a:tailEnd type="none" w="med" len="med"/>
+                    </a:lnT>
+                    <a:lnB w="6350" cap="flat" cmpd="sng" algn="ctr">
+                      <a:solidFill>
+                        <a:srgbClr val="DCE4EC"/>
+                      </a:solidFill>
+                      <a:prstDash val="solid"/>
+                      <a:round/>
+                      <a:headEnd type="none" w="med" len="med"/>
+                      <a:tailEnd type="none" w="med" len="med"/>
+                    </a:lnB>
+                  </a:tcPr>
+                </a:tc>
+              </a:tr>
+              <a:tr h="310896">
+                <a:tc>
+                  <a:txBody>
+                    <a:bodyPr/>
+                    <a:lstStyle/>
+                    <a:p>
+                      <a:pPr indent="0" marL="0">
+                        <a:buNone/>
+                      </a:pPr>
+                      <a:r>
+                        <a:rPr lang="en-US" sz="950" b="1" dirty="0">
+                          <a:solidFill>
+                            <a:srgbClr val="12212E"/>
+                          </a:solidFill>
+                          <a:latin typeface="Calibri" pitchFamily="34" charset="0"/>
+                          <a:ea typeface="Calibri" pitchFamily="34" charset="-122"/>
+                          <a:cs typeface="Calibri" pitchFamily="34" charset="-120"/>
+                        </a:rPr>
+                        <a:t>self controls suppressed by tolerance filter</a:t>
+                      </a:r>
+                      <a:endParaRPr lang="en-US" sz="950" dirty="0">
+                        <a:latin typeface="Calibri" charset="0"/>
+                        <a:ea typeface="Calibri" charset="0"/>
+                        <a:cs typeface="Calibri" charset="0"/>
+                      </a:endParaRPr>
+                    </a:p>
+                  </a:txBody>
+                  <a:tcPr marL="91440" marR="91440" marT="45720" marB="45720" anchor="ctr">
+                    <a:lnL w="6350" cap="flat" cmpd="sng" algn="ctr">
+                      <a:solidFill>
+                        <a:srgbClr val="DCE4EC"/>
+                      </a:solidFill>
+                      <a:prstDash val="solid"/>
+                      <a:round/>
+                      <a:headEnd type="none" w="med" len="med"/>
+                      <a:tailEnd type="none" w="med" len="med"/>
+                    </a:lnL>
+                    <a:lnR w="6350" cap="flat" cmpd="sng" algn="ctr">
+                      <a:solidFill>
+                        <a:srgbClr val="DCE4EC"/>
+                      </a:solidFill>
+                      <a:prstDash val="solid"/>
+                      <a:round/>
+                      <a:headEnd type="none" w="med" len="med"/>
+                      <a:tailEnd type="none" w="med" len="med"/>
+                    </a:lnR>
+                    <a:lnT w="6350" cap="flat" cmpd="sng" algn="ctr">
+                      <a:solidFill>
+                        <a:srgbClr val="DCE4EC"/>
+                      </a:solidFill>
+                      <a:prstDash val="solid"/>
+                      <a:round/>
+                      <a:headEnd type="none" w="med" len="med"/>
+                      <a:tailEnd type="none" w="med" len="med"/>
+                    </a:lnT>
+                    <a:lnB w="6350" cap="flat" cmpd="sng" algn="ctr">
+                      <a:solidFill>
+                        <a:srgbClr val="DCE4EC"/>
+                      </a:solidFill>
+                      <a:prstDash val="solid"/>
+                      <a:round/>
+                      <a:headEnd type="none" w="med" len="med"/>
+                      <a:tailEnd type="none" w="med" len="med"/>
+                    </a:lnB>
+                  </a:tcPr>
+                </a:tc>
+                <a:tc>
+                  <a:txBody>
+                    <a:bodyPr/>
+                    <a:lstStyle/>
+                    <a:p>
+                      <a:pPr indent="0" marL="0">
+                        <a:buNone/>
+                      </a:pPr>
+                      <a:r>
+                        <a:rPr lang="en-US" sz="900" dirty="0">
+                          <a:solidFill>
+                            <a:srgbClr val="3B4A5A"/>
+                          </a:solidFill>
+                          <a:latin typeface="Calibri" pitchFamily="34" charset="0"/>
+                          <a:ea typeface="Calibri" pitchFamily="34" charset="-122"/>
+                          <a:cs typeface="Calibri" pitchFamily="34" charset="-120"/>
+                        </a:rPr>
+                        <a:t>HumanVH3_23_germline pIRS 0.00 (raw 0.37); HSA_D1 pIRS 0.00 (raw 0.13)</a:t>
+                      </a:r>
+                      <a:endParaRPr lang="en-US" sz="900" dirty="0">
+                        <a:latin typeface="Calibri" charset="0"/>
+                        <a:ea typeface="Calibri" charset="0"/>
+                        <a:cs typeface="Calibri" charset="0"/>
+                      </a:endParaRPr>
+                    </a:p>
+                  </a:txBody>
+                  <a:tcPr marL="91440" marR="91440" marT="45720" marB="45720" anchor="ctr">
+                    <a:lnL w="6350" cap="flat" cmpd="sng" algn="ctr">
+                      <a:solidFill>
+                        <a:srgbClr val="DCE4EC"/>
+                      </a:solidFill>
+                      <a:prstDash val="solid"/>
+                      <a:round/>
+                      <a:headEnd type="none" w="med" len="med"/>
+                      <a:tailEnd type="none" w="med" len="med"/>
+                    </a:lnL>
+                    <a:lnR w="6350" cap="flat" cmpd="sng" algn="ctr">
+                      <a:solidFill>
+                        <a:srgbClr val="DCE4EC"/>
+                      </a:solidFill>
+                      <a:prstDash val="solid"/>
+                      <a:round/>
+                      <a:headEnd type="none" w="med" len="med"/>
+                      <a:tailEnd type="none" w="med" len="med"/>
+                    </a:lnR>
+                    <a:lnT w="6350" cap="flat" cmpd="sng" algn="ctr">
+                      <a:solidFill>
+                        <a:srgbClr val="DCE4EC"/>
+                      </a:solidFill>
+                      <a:prstDash val="solid"/>
+                      <a:round/>
+                      <a:headEnd type="none" w="med" len="med"/>
+                      <a:tailEnd type="none" w="med" len="med"/>
+                    </a:lnT>
+                    <a:lnB w="6350" cap="flat" cmpd="sng" algn="ctr">
+                      <a:solidFill>
+                        <a:srgbClr val="DCE4EC"/>
+                      </a:solidFill>
+                      <a:prstDash val="solid"/>
+                      <a:round/>
+                      <a:headEnd type="none" w="med" len="med"/>
+                      <a:tailEnd type="none" w="med" len="med"/>
+                    </a:lnB>
+                  </a:tcPr>
+                </a:tc>
+                <a:tc>
+                  <a:txBody>
+                    <a:bodyPr/>
+                    <a:lstStyle/>
+                    <a:p>
+                      <a:pPr algn="ctr" indent="0" marL="0">
+                        <a:buNone/>
+                      </a:pPr>
+                      <a:r>
+                        <a:rPr lang="en-US" sz="950" b="1" dirty="0">
+                          <a:solidFill>
+                            <a:srgbClr val="3D8A6B"/>
+                          </a:solidFill>
+                          <a:latin typeface="Calibri" pitchFamily="34" charset="0"/>
+                          <a:ea typeface="Calibri" pitchFamily="34" charset="-122"/>
+                          <a:cs typeface="Calibri" pitchFamily="34" charset="-120"/>
+                        </a:rPr>
+                        <a:t>PASS</a:t>
+                      </a:r>
+                      <a:endParaRPr lang="en-US" sz="950" dirty="0">
+                        <a:latin typeface="Calibri" charset="0"/>
+                        <a:ea typeface="Calibri" charset="0"/>
+                        <a:cs typeface="Calibri" charset="0"/>
+                      </a:endParaRPr>
+                    </a:p>
+                  </a:txBody>
+                  <a:tcPr marL="91440" marR="91440" marT="45720" marB="45720" anchor="ctr">
+                    <a:lnL w="6350" cap="flat" cmpd="sng" algn="ctr">
+                      <a:solidFill>
+                        <a:srgbClr val="DCE4EC"/>
+                      </a:solidFill>
+                      <a:prstDash val="solid"/>
+                      <a:round/>
+                      <a:headEnd type="none" w="med" len="med"/>
+                      <a:tailEnd type="none" w="med" len="med"/>
+                    </a:lnL>
+                    <a:lnR w="6350" cap="flat" cmpd="sng" algn="ctr">
+                      <a:solidFill>
+                        <a:srgbClr val="DCE4EC"/>
+                      </a:solidFill>
+                      <a:prstDash val="solid"/>
+                      <a:round/>
+                      <a:headEnd type="none" w="med" len="med"/>
+                      <a:tailEnd type="none" w="med" len="med"/>
+                    </a:lnR>
+                    <a:lnT w="6350" cap="flat" cmpd="sng" algn="ctr">
+                      <a:solidFill>
+                        <a:srgbClr val="DCE4EC"/>
+                      </a:solidFill>
+                      <a:prstDash val="solid"/>
+                      <a:round/>
+                      <a:headEnd type="none" w="med" len="med"/>
+                      <a:tailEnd type="none" w="med" len="med"/>
+                    </a:lnT>
+                    <a:lnB w="6350" cap="flat" cmpd="sng" algn="ctr">
+                      <a:solidFill>
+                        <a:srgbClr val="DCE4EC"/>
+                      </a:solidFill>
+                      <a:prstDash val="solid"/>
+                      <a:round/>
+                      <a:headEnd type="none" w="med" len="med"/>
+                      <a:tailEnd type="none" w="med" len="med"/>
+                    </a:lnB>
+                  </a:tcPr>
+                </a:tc>
+              </a:tr>
+              <a:tr h="310896">
+                <a:tc>
+                  <a:txBody>
+                    <a:bodyPr/>
+                    <a:lstStyle/>
+                    <a:p>
+                      <a:pPr indent="0" marL="0">
+                        <a:buNone/>
+                      </a:pPr>
+                      <a:r>
+                        <a:rPr lang="en-US" sz="950" b="1" dirty="0">
+                          <a:solidFill>
+                            <a:srgbClr val="12212E"/>
+                          </a:solidFill>
+                          <a:latin typeface="Calibri" pitchFamily="34" charset="0"/>
+                          <a:ea typeface="Calibri" pitchFamily="34" charset="-122"/>
+                          <a:cs typeface="Calibri" pitchFamily="34" charset="-120"/>
+                        </a:rPr>
+                        <a:t>tolerance filter discriminates self from foreign</a:t>
+                      </a:r>
+                      <a:endParaRPr lang="en-US" sz="950" dirty="0">
+                        <a:latin typeface="Calibri" charset="0"/>
+                        <a:ea typeface="Calibri" charset="0"/>
+                        <a:cs typeface="Calibri" charset="0"/>
+                      </a:endParaRPr>
+                    </a:p>
+                  </a:txBody>
+                  <a:tcPr marL="91440" marR="91440" marT="45720" marB="45720" anchor="ctr">
+                    <a:lnL w="6350" cap="flat" cmpd="sng" algn="ctr">
+                      <a:solidFill>
+                        <a:srgbClr val="DCE4EC"/>
+                      </a:solidFill>
+                      <a:prstDash val="solid"/>
+                      <a:round/>
+                      <a:headEnd type="none" w="med" len="med"/>
+                      <a:tailEnd type="none" w="med" len="med"/>
+                    </a:lnL>
+                    <a:lnR w="6350" cap="flat" cmpd="sng" algn="ctr">
+                      <a:solidFill>
+                        <a:srgbClr val="DCE4EC"/>
+                      </a:solidFill>
+                      <a:prstDash val="solid"/>
+                      <a:round/>
+                      <a:headEnd type="none" w="med" len="med"/>
+                      <a:tailEnd type="none" w="med" len="med"/>
+                    </a:lnR>
+                    <a:lnT w="6350" cap="flat" cmpd="sng" algn="ctr">
+                      <a:solidFill>
+                        <a:srgbClr val="DCE4EC"/>
+                      </a:solidFill>
+                      <a:prstDash val="solid"/>
+                      <a:round/>
+                      <a:headEnd type="none" w="med" len="med"/>
+                      <a:tailEnd type="none" w="med" len="med"/>
+                    </a:lnT>
+                    <a:lnB w="6350" cap="flat" cmpd="sng" algn="ctr">
+                      <a:solidFill>
+                        <a:srgbClr val="DCE4EC"/>
+                      </a:solidFill>
+                      <a:prstDash val="solid"/>
+                      <a:round/>
+                      <a:headEnd type="none" w="med" len="med"/>
+                      <a:tailEnd type="none" w="med" len="med"/>
+                    </a:lnB>
+                  </a:tcPr>
+                </a:tc>
+                <a:tc>
+                  <a:txBody>
+                    <a:bodyPr/>
+                    <a:lstStyle/>
+                    <a:p>
+                      <a:pPr indent="0" marL="0">
+                        <a:buNone/>
+                      </a:pPr>
+                      <a:r>
+                        <a:rPr lang="en-US" sz="900" dirty="0">
+                          <a:solidFill>
+                            <a:srgbClr val="3B4A5A"/>
+                          </a:solidFill>
+                          <a:latin typeface="Calibri" pitchFamily="34" charset="0"/>
+                          <a:ea typeface="Calibri" pitchFamily="34" charset="-122"/>
+                          <a:cs typeface="Calibri" pitchFamily="34" charset="-120"/>
+                        </a:rPr>
+                        <a:t>mean score drop: self 100.0% vs ligands 9.0%</a:t>
+                      </a:r>
+                      <a:endParaRPr lang="en-US" sz="900" dirty="0">
+                        <a:latin typeface="Calibri" charset="0"/>
+                        <a:ea typeface="Calibri" charset="0"/>
+                        <a:cs typeface="Calibri" charset="0"/>
+                      </a:endParaRPr>
+                    </a:p>
+                  </a:txBody>
+                  <a:tcPr marL="91440" marR="91440" marT="45720" marB="45720" anchor="ctr">
+                    <a:lnL w="6350" cap="flat" cmpd="sng" algn="ctr">
+                      <a:solidFill>
+                        <a:srgbClr val="DCE4EC"/>
+                      </a:solidFill>
+                      <a:prstDash val="solid"/>
+                      <a:round/>
+                      <a:headEnd type="none" w="med" len="med"/>
+                      <a:tailEnd type="none" w="med" len="med"/>
+                    </a:lnL>
+                    <a:lnR w="6350" cap="flat" cmpd="sng" algn="ctr">
+                      <a:solidFill>
+                        <a:srgbClr val="DCE4EC"/>
+                      </a:solidFill>
+                      <a:prstDash val="solid"/>
+                      <a:round/>
+                      <a:headEnd type="none" w="med" len="med"/>
+                      <a:tailEnd type="none" w="med" len="med"/>
+                    </a:lnR>
+                    <a:lnT w="6350" cap="flat" cmpd="sng" algn="ctr">
+                      <a:solidFill>
+                        <a:srgbClr val="DCE4EC"/>
+                      </a:solidFill>
+                      <a:prstDash val="solid"/>
+                      <a:round/>
+                      <a:headEnd type="none" w="med" len="med"/>
+                      <a:tailEnd type="none" w="med" len="med"/>
+                    </a:lnT>
+                    <a:lnB w="6350" cap="flat" cmpd="sng" algn="ctr">
+                      <a:solidFill>
+                        <a:srgbClr val="DCE4EC"/>
+                      </a:solidFill>
+                      <a:prstDash val="solid"/>
+                      <a:round/>
+                      <a:headEnd type="none" w="med" len="med"/>
+                      <a:tailEnd type="none" w="med" len="med"/>
+                    </a:lnB>
+                  </a:tcPr>
+                </a:tc>
+                <a:tc>
+                  <a:txBody>
+                    <a:bodyPr/>
+                    <a:lstStyle/>
+                    <a:p>
+                      <a:pPr algn="ctr" indent="0" marL="0">
+                        <a:buNone/>
+                      </a:pPr>
+                      <a:r>
+                        <a:rPr lang="en-US" sz="950" b="1" dirty="0">
+                          <a:solidFill>
+                            <a:srgbClr val="3D8A6B"/>
+                          </a:solidFill>
+                          <a:latin typeface="Calibri" pitchFamily="34" charset="0"/>
+                          <a:ea typeface="Calibri" pitchFamily="34" charset="-122"/>
+                          <a:cs typeface="Calibri" pitchFamily="34" charset="-120"/>
+                        </a:rPr>
+                        <a:t>PASS</a:t>
+                      </a:r>
+                      <a:endParaRPr lang="en-US" sz="950" dirty="0">
+                        <a:latin typeface="Calibri" charset="0"/>
+                        <a:ea typeface="Calibri" charset="0"/>
+                        <a:cs typeface="Calibri" charset="0"/>
+                      </a:endParaRPr>
+                    </a:p>
+                  </a:txBody>
+                  <a:tcPr marL="91440" marR="91440" marT="45720" marB="45720" anchor="ctr">
+                    <a:lnL w="6350" cap="flat" cmpd="sng" algn="ctr">
+                      <a:solidFill>
+                        <a:srgbClr val="DCE4EC"/>
+                      </a:solidFill>
+                      <a:prstDash val="solid"/>
+                      <a:round/>
+                      <a:headEnd type="none" w="med" len="med"/>
+                      <a:tailEnd type="none" w="med" len="med"/>
+                    </a:lnL>
+                    <a:lnR w="6350" cap="flat" cmpd="sng" algn="ctr">
+                      <a:solidFill>
+                        <a:srgbClr val="DCE4EC"/>
+                      </a:solidFill>
+                      <a:prstDash val="solid"/>
+                      <a:round/>
+                      <a:headEnd type="none" w="med" len="med"/>
+                      <a:tailEnd type="none" w="med" len="med"/>
+                    </a:lnR>
+                    <a:lnT w="6350" cap="flat" cmpd="sng" algn="ctr">
+                      <a:solidFill>
+                        <a:srgbClr val="DCE4EC"/>
+                      </a:solidFill>
+                      <a:prstDash val="solid"/>
+                      <a:round/>
+                      <a:headEnd type="none" w="med" len="med"/>
+                      <a:tailEnd type="none" w="med" len="med"/>
+                    </a:lnT>
+                    <a:lnB w="6350" cap="flat" cmpd="sng" algn="ctr">
+                      <a:solidFill>
+                        <a:srgbClr val="DCE4EC"/>
+                      </a:solidFill>
+                      <a:prstDash val="solid"/>
+                      <a:round/>
+                      <a:headEnd type="none" w="med" len="med"/>
+                      <a:tailEnd type="none" w="med" len="med"/>
+                    </a:lnB>
+                  </a:tcPr>
+                </a:tc>
+              </a:tr>
+              <a:tr h="310896">
+                <a:tc>
+                  <a:txBody>
+                    <a:bodyPr/>
+                    <a:lstStyle/>
+                    <a:p>
+                      <a:pPr indent="0" marL="0">
+                        <a:buNone/>
+                      </a:pPr>
+                      <a:r>
+                        <a:rPr lang="en-US" sz="950" b="1" dirty="0">
+                          <a:solidFill>
+                            <a:srgbClr val="12212E"/>
+                          </a:solidFill>
+                          <a:latin typeface="Calibri" pitchFamily="34" charset="0"/>
+                          <a:ea typeface="Calibri" pitchFamily="34" charset="-122"/>
+                          <a:cs typeface="Calibri" pitchFamily="34" charset="-120"/>
+                        </a:rPr>
+                        <a:t>benchmark anchor scored</a:t>
+                      </a:r>
+                      <a:endParaRPr lang="en-US" sz="950" dirty="0">
+                        <a:latin typeface="Calibri" charset="0"/>
+                        <a:ea typeface="Calibri" charset="0"/>
+                        <a:cs typeface="Calibri" charset="0"/>
+                      </a:endParaRPr>
+                    </a:p>
+                  </a:txBody>
+                  <a:tcPr marL="91440" marR="91440" marT="45720" marB="45720" anchor="ctr">
+                    <a:lnL w="6350" cap="flat" cmpd="sng" algn="ctr">
+                      <a:solidFill>
+                        <a:srgbClr val="DCE4EC"/>
+                      </a:solidFill>
+                      <a:prstDash val="solid"/>
+                      <a:round/>
+                      <a:headEnd type="none" w="med" len="med"/>
+                      <a:tailEnd type="none" w="med" len="med"/>
+                    </a:lnL>
+                    <a:lnR w="6350" cap="flat" cmpd="sng" algn="ctr">
+                      <a:solidFill>
+                        <a:srgbClr val="DCE4EC"/>
+                      </a:solidFill>
+                      <a:prstDash val="solid"/>
+                      <a:round/>
+                      <a:headEnd type="none" w="med" len="med"/>
+                      <a:tailEnd type="none" w="med" len="med"/>
+                    </a:lnR>
+                    <a:lnT w="6350" cap="flat" cmpd="sng" algn="ctr">
+                      <a:solidFill>
+                        <a:srgbClr val="DCE4EC"/>
+                      </a:solidFill>
+                      <a:prstDash val="solid"/>
+                      <a:round/>
+                      <a:headEnd type="none" w="med" len="med"/>
+                      <a:tailEnd type="none" w="med" len="med"/>
+                    </a:lnT>
+                    <a:lnB w="6350" cap="flat" cmpd="sng" algn="ctr">
+                      <a:solidFill>
+                        <a:srgbClr val="DCE4EC"/>
+                      </a:solidFill>
+                      <a:prstDash val="solid"/>
+                      <a:round/>
+                      <a:headEnd type="none" w="med" len="med"/>
+                      <a:tailEnd type="none" w="med" len="med"/>
+                    </a:lnB>
+                  </a:tcPr>
+                </a:tc>
+                <a:tc>
+                  <a:txBody>
+                    <a:bodyPr/>
+                    <a:lstStyle/>
+                    <a:p>
+                      <a:pPr indent="0" marL="0">
+                        <a:buNone/>
+                      </a:pPr>
+                      <a:r>
+                        <a:rPr lang="en-US" sz="900" dirty="0">
+                          <a:solidFill>
+                            <a:srgbClr val="3B4A5A"/>
+                          </a:solidFill>
+                          <a:latin typeface="Calibri" pitchFamily="34" charset="0"/>
+                          <a:ea typeface="Calibri" pitchFamily="34" charset="-122"/>
+                          <a:cs typeface="Calibri" pitchFamily="34" charset="-120"/>
+                        </a:rPr>
+                        <a:t>ProteinA_Z pIRS 0.45</a:t>
+                      </a:r>
+                      <a:endParaRPr lang="en-US" sz="900" dirty="0">
+                        <a:latin typeface="Calibri" charset="0"/>
+                        <a:ea typeface="Calibri" charset="0"/>
+                        <a:cs typeface="Calibri" charset="0"/>
+                      </a:endParaRPr>
+                    </a:p>
+                  </a:txBody>
+                  <a:tcPr marL="91440" marR="91440" marT="45720" marB="45720" anchor="ctr">
+                    <a:lnL w="6350" cap="flat" cmpd="sng" algn="ctr">
+                      <a:solidFill>
+                        <a:srgbClr val="DCE4EC"/>
+                      </a:solidFill>
+                      <a:prstDash val="solid"/>
+                      <a:round/>
+                      <a:headEnd type="none" w="med" len="med"/>
+                      <a:tailEnd type="none" w="med" len="med"/>
+                    </a:lnL>
+                    <a:lnR w="6350" cap="flat" cmpd="sng" algn="ctr">
+                      <a:solidFill>
+                        <a:srgbClr val="DCE4EC"/>
+                      </a:solidFill>
+                      <a:prstDash val="solid"/>
+                      <a:round/>
+                      <a:headEnd type="none" w="med" len="med"/>
+                      <a:tailEnd type="none" w="med" len="med"/>
+                    </a:lnR>
+                    <a:lnT w="6350" cap="flat" cmpd="sng" algn="ctr">
+                      <a:solidFill>
+                        <a:srgbClr val="DCE4EC"/>
+                      </a:solidFill>
+                      <a:prstDash val="solid"/>
+                      <a:round/>
+                      <a:headEnd type="none" w="med" len="med"/>
+                      <a:tailEnd type="none" w="med" len="med"/>
+                    </a:lnT>
+                    <a:lnB w="6350" cap="flat" cmpd="sng" algn="ctr">
+                      <a:solidFill>
+                        <a:srgbClr val="DCE4EC"/>
+                      </a:solidFill>
+                      <a:prstDash val="solid"/>
+                      <a:round/>
+                      <a:headEnd type="none" w="med" len="med"/>
+                      <a:tailEnd type="none" w="med" len="med"/>
+                    </a:lnB>
+                  </a:tcPr>
+                </a:tc>
+                <a:tc>
+                  <a:txBody>
+                    <a:bodyPr/>
+                    <a:lstStyle/>
+                    <a:p>
+                      <a:pPr algn="ctr" indent="0" marL="0">
+                        <a:buNone/>
+                      </a:pPr>
+                      <a:r>
+                        <a:rPr lang="en-US" sz="950" b="1" dirty="0">
+                          <a:solidFill>
+                            <a:srgbClr val="3D8A6B"/>
+                          </a:solidFill>
+                          <a:latin typeface="Calibri" pitchFamily="34" charset="0"/>
+                          <a:ea typeface="Calibri" pitchFamily="34" charset="-122"/>
+                          <a:cs typeface="Calibri" pitchFamily="34" charset="-120"/>
+                        </a:rPr>
+                        <a:t>PASS</a:t>
+                      </a:r>
+                      <a:endParaRPr lang="en-US" sz="950" dirty="0">
+                        <a:latin typeface="Calibri" charset="0"/>
+                        <a:ea typeface="Calibri" charset="0"/>
+                        <a:cs typeface="Calibri" charset="0"/>
+                      </a:endParaRPr>
+                    </a:p>
+                  </a:txBody>
+                  <a:tcPr marL="91440" marR="91440" marT="45720" marB="45720" anchor="ctr">
+                    <a:lnL w="6350" cap="flat" cmpd="sng" algn="ctr">
+                      <a:solidFill>
+                        <a:srgbClr val="DCE4EC"/>
+                      </a:solidFill>
+                      <a:prstDash val="solid"/>
+                      <a:round/>
+                      <a:headEnd type="none" w="med" len="med"/>
+                      <a:tailEnd type="none" w="med" len="med"/>
+                    </a:lnL>
+                    <a:lnR w="6350" cap="flat" cmpd="sng" algn="ctr">
+                      <a:solidFill>
+                        <a:srgbClr val="DCE4EC"/>
+                      </a:solidFill>
+                      <a:prstDash val="solid"/>
+                      <a:round/>
+                      <a:headEnd type="none" w="med" len="med"/>
+                      <a:tailEnd type="none" w="med" len="med"/>
+                    </a:lnR>
+                    <a:lnT w="6350" cap="flat" cmpd="sng" algn="ctr">
+                      <a:solidFill>
+                        <a:srgbClr val="DCE4EC"/>
+                      </a:solidFill>
+                      <a:prstDash val="solid"/>
+                      <a:round/>
+                      <a:headEnd type="none" w="med" len="med"/>
+                      <a:tailEnd type="none" w="med" len="med"/>
+                    </a:lnT>
+                    <a:lnB w="6350" cap="flat" cmpd="sng" algn="ctr">
+                      <a:solidFill>
+                        <a:srgbClr val="DCE4EC"/>
+                      </a:solidFill>
+                      <a:prstDash val="solid"/>
+                      <a:round/>
+                      <a:headEnd type="none" w="med" len="med"/>
+                      <a:tailEnd type="none" w="med" len="med"/>
+                    </a:lnB>
+                  </a:tcPr>
+                </a:tc>
+              </a:tr>
+            </a:tbl>
+          </a:graphicData>
+        </a:graphic>
+      </p:graphicFrame>
+    </p:spTree>
+  </p:cSld>
+  <p:clrMapOvr>
+    <a:masterClrMapping/>
+  </p:clrMapOvr>
+</p:sld>
+</file>
+
+<file path=ppt/slides/slide11.xml><?xml version="1.0" encoding="utf-8"?>
+<p:sld xmlns:a="http://schemas.openxmlformats.org/drawingml/2006/main" xmlns:r="http://schemas.openxmlformats.org/officeDocument/2006/relationships" xmlns:p="http://schemas.openxmlformats.org/presentationml/2006/main">
+  <p:cSld name="Slide 11">
+    <p:bg>
+      <p:bgPr>
+        <a:solidFill>
+          <a:srgbClr val="FFFFFF"/>
+        </a:solidFill>
+      </p:bgPr>
+    </p:bg>
+    <p:spTree>
+      <p:nvGrpSpPr>
+        <p:cNvPr id="1" name=""/>
+        <p:cNvGrpSpPr/>
+        <p:nvPr/>
+      </p:nvGrpSpPr>
+      <p:grpSpPr>
+        <a:xfrm>
+          <a:off x="0" y="0"/>
+          <a:ext cx="0" cy="0"/>
+          <a:chOff x="0" y="0"/>
+          <a:chExt cx="0" cy="0"/>
+        </a:xfrm>
+      </p:grpSpPr>
+      <p:sp>
+        <p:nvSpPr>
+          <p:cNvPr id="2" name="Text 0"/>
+          <p:cNvSpPr/>
+          <p:nvPr/>
+        </p:nvSpPr>
+        <p:spPr>
+          <a:xfrm>
+            <a:off x="566928" y="310896"/>
+            <a:ext cx="11027664" cy="219456"/>
+          </a:xfrm>
+          <a:prstGeom prst="rect">
+            <a:avLst/>
+          </a:prstGeom>
+          <a:noFill/>
+          <a:ln/>
+        </p:spPr>
+        <p:txBody>
+          <a:bodyPr wrap="square" lIns="0" tIns="0" rIns="0" bIns="0" rtlCol="0" anchor="ctr"/>
+          <a:lstStyle/>
+          <a:p>
+            <a:pPr indent="0" marL="0">
+              <a:buNone/>
+            </a:pPr>
+            <a:r>
+              <a:rPr lang="en-US" sz="1050" b="1" spc="160" kern="0" dirty="0">
+                <a:solidFill>
+                  <a:srgbClr val="2F6F9F"/>
+                </a:solidFill>
+                <a:latin typeface="Calibri" pitchFamily="34" charset="0"/>
+                <a:ea typeface="Calibri" pitchFamily="34" charset="-122"/>
+                <a:cs typeface="Calibri" pitchFamily="34" charset="-120"/>
+              </a:rPr>
               <a:t>MODULE 5 · EPITOPE CLUSTERS</a:t>
             </a:r>
             <a:endParaRPr lang="en-US" sz="1050" dirty="0"/>
@@ -2323,7 +3560,7 @@
       </p:sp>
       <p:graphicFrame>
         <p:nvGraphicFramePr>
-          <p:cNvPr id="11" name="Table 0"/>
+          <p:cNvPr id="12" name="Table 0"/>
           <p:cNvGraphicFramePr>
             <a:graphicFrameLocks noGrp="1"/>
           </p:cNvGraphicFramePr>
@@ -5032,7 +6269,7 @@
       </p:sp>
       <p:graphicFrame>
         <p:nvGraphicFramePr>
-          <p:cNvPr id="21" name="Table 1"/>
+          <p:cNvPr id="23" name="Table 1"/>
           <p:cNvGraphicFramePr>
             <a:graphicFrameLocks noGrp="1"/>
           </p:cNvGraphicFramePr>
@@ -8230,9 +9467,9 @@
 </p:sld>
 </file>
 
-<file path=ppt/slides/slide11.xml><?xml version="1.0" encoding="utf-8"?>
+<file path=ppt/slides/slide12.xml><?xml version="1.0" encoding="utf-8"?>
 <p:sld xmlns:a="http://schemas.openxmlformats.org/drawingml/2006/main" xmlns:r="http://schemas.openxmlformats.org/officeDocument/2006/relationships" xmlns:p="http://schemas.openxmlformats.org/presentationml/2006/main">
-  <p:cSld name="Slide 11">
+  <p:cSld name="Slide 12">
     <p:bg>
       <p:bgPr>
         <a:solidFill>
@@ -8400,7 +9637,7 @@
       </p:sp>
       <p:graphicFrame>
         <p:nvGraphicFramePr>
-          <p:cNvPr id="12" name="Table 0"/>
+          <p:cNvPr id="13" name="Table 0"/>
           <p:cNvGraphicFramePr>
             <a:graphicFrameLocks noGrp="1"/>
           </p:cNvGraphicFramePr>
@@ -9284,9 +10521,9 @@
 </p:sld>
 </file>
 
-<file path=ppt/slides/slide12.xml><?xml version="1.0" encoding="utf-8"?>
+<file path=ppt/slides/slide13.xml><?xml version="1.0" encoding="utf-8"?>
 <p:sld xmlns:a="http://schemas.openxmlformats.org/drawingml/2006/main" xmlns:r="http://schemas.openxmlformats.org/officeDocument/2006/relationships" xmlns:p="http://schemas.openxmlformats.org/presentationml/2006/main">
-  <p:cSld name="Slide 12">
+  <p:cSld name="Slide 13">
     <p:bg>
       <p:bgPr>
         <a:solidFill>
@@ -9388,7 +10625,7 @@
       </p:sp>
       <p:graphicFrame>
         <p:nvGraphicFramePr>
-          <p:cNvPr id="13" name="Table 0"/>
+          <p:cNvPr id="14" name="Table 0"/>
           <p:cNvGraphicFramePr>
             <a:graphicFrameLocks noGrp="1"/>
           </p:cNvGraphicFramePr>
@@ -11095,9 +12332,9 @@
 </p:sld>
 </file>
 
-<file path=ppt/slides/slide13.xml><?xml version="1.0" encoding="utf-8"?>
+<file path=ppt/slides/slide14.xml><?xml version="1.0" encoding="utf-8"?>
 <p:sld xmlns:a="http://schemas.openxmlformats.org/drawingml/2006/main" xmlns:r="http://schemas.openxmlformats.org/officeDocument/2006/relationships" xmlns:p="http://schemas.openxmlformats.org/presentationml/2006/main">
-  <p:cSld name="Slide 13">
+  <p:cSld name="Slide 14">
     <p:bg>
       <p:bgPr>
         <a:solidFill>
@@ -11312,7 +12549,7 @@
       </p:sp>
       <p:graphicFrame>
         <p:nvGraphicFramePr>
-          <p:cNvPr id="14" name="Table 0"/>
+          <p:cNvPr id="15" name="Table 0"/>
           <p:cNvGraphicFramePr>
             <a:graphicFrameLocks noGrp="1"/>
           </p:cNvGraphicFramePr>
@@ -15596,9 +16833,9 @@
 </p:sld>
 </file>
 
-<file path=ppt/slides/slide14.xml><?xml version="1.0" encoding="utf-8"?>
+<file path=ppt/slides/slide15.xml><?xml version="1.0" encoding="utf-8"?>
 <p:sld xmlns:a="http://schemas.openxmlformats.org/drawingml/2006/main" xmlns:r="http://schemas.openxmlformats.org/officeDocument/2006/relationships" xmlns:p="http://schemas.openxmlformats.org/presentationml/2006/main">
-  <p:cSld name="Slide 14">
+  <p:cSld name="Slide 15">
     <p:bg>
       <p:bgPr>
         <a:solidFill>
@@ -22480,7 +23717,7 @@
                 <a:ea typeface="Calibri" pitchFamily="34" charset="-122"/>
                 <a:cs typeface="Calibri" pitchFamily="34" charset="-120"/>
               </a:rPr>
-              <a:t>MODULES 5–6 · SCORING</a:t>
+              <a:t>MODULE 13 · THE LAST SPECIFICITY LEVER</a:t>
             </a:r>
             <a:endParaRPr lang="en-US" sz="1050" dirty="0"/>
           </a:p>
@@ -22519,15 +23756,57 @@
                 <a:ea typeface="Cambria" pitchFamily="34" charset="-122"/>
                 <a:cs typeface="Cambria" pitchFamily="34" charset="-120"/>
               </a:rPr>
-              <a:t>Calibrated against benchmarks and controls in the same batch</a:t>
+              <a:t>Does breadth beat the best single rank?</a:t>
             </a:r>
             <a:endParaRPr lang="en-US" sz="2700" dirty="0"/>
           </a:p>
         </p:txBody>
       </p:sp>
+      <p:sp>
+        <p:nvSpPr>
+          <p:cNvPr id="4" name="Text 2"/>
+          <p:cNvSpPr/>
+          <p:nvPr/>
+        </p:nvSpPr>
+        <p:spPr>
+          <a:xfrm>
+            <a:off x="566928" y="1060704"/>
+            <a:ext cx="11027664" cy="457200"/>
+          </a:xfrm>
+          <a:prstGeom prst="rect">
+            <a:avLst/>
+          </a:prstGeom>
+          <a:noFill/>
+          <a:ln/>
+        </p:spPr>
+        <p:txBody>
+          <a:bodyPr wrap="square" lIns="0" tIns="0" rIns="0" bIns="0" rtlCol="0" anchor="ctr"/>
+          <a:lstStyle/>
+          <a:p>
+            <a:pPr indent="0" marL="0">
+              <a:lnSpc>
+                <a:spcPts val="1500"/>
+              </a:lnSpc>
+              <a:buNone/>
+            </a:pPr>
+            <a:r>
+              <a:rPr lang="en-US" sz="1150" dirty="0">
+                <a:solidFill>
+                  <a:srgbClr val="12212E"/>
+                </a:solidFill>
+                <a:latin typeface="Calibri" pitchFamily="34" charset="0"/>
+                <a:ea typeface="Calibri" pitchFamily="34" charset="-122"/>
+                <a:cs typeface="Calibri" pitchFamily="34" charset="-120"/>
+              </a:rPr>
+              <a:t>Each of the 1,200 benchmark peptides was scored against all 25 panel molecules, so “broadly presented” could be tested as a decision rule against “best single-allele %Rank” — one peptide per 9-mer cluster, paired cluster bootstrap on the AUC difference.</a:t>
+            </a:r>
+            <a:endParaRPr lang="en-US" sz="1150" dirty="0"/>
+          </a:p>
+        </p:txBody>
+      </p:sp>
       <p:pic>
         <p:nvPicPr>
-          <p:cNvPr id="4" name="Image 0" descr="/home/user/ClaudeCode/hla_ligand_immunogenicity/figures/fig3_calibrated_ranking.png">    </p:cNvPr>
+          <p:cNvPr id="5" name="Image 0" descr="/home/user/ClaudeCode/hla_ligand_immunogenicity/figures/fig7_promiscuity.png">    </p:cNvPr>
           <p:cNvPicPr>
             <a:picLocks noChangeAspect="1"/>
           </p:cNvPicPr>
@@ -22541,1028 +23820,100 @@
         </p:blipFill>
         <p:spPr>
           <a:xfrm>
-            <a:off x="566928" y="1097280"/>
-            <a:ext cx="11027664" cy="3566160"/>
+            <a:off x="786384" y="1591056"/>
+            <a:ext cx="10588752" cy="3977640"/>
           </a:xfrm>
           <a:prstGeom prst="rect">
             <a:avLst/>
           </a:prstGeom>
         </p:spPr>
       </p:pic>
-      <p:graphicFrame>
-        <p:nvGraphicFramePr>
-          <p:cNvPr id="10" name="Table 0"/>
-          <p:cNvGraphicFramePr>
-            <a:graphicFrameLocks noGrp="1"/>
-          </p:cNvGraphicFramePr>
-          <p:nvPr>
-            <p:extLst>
-              <p:ext uri="{D42A27DB-BD31-4B8C-83A1-F6EECF244321}">
-                <p14:modId xmlns:p14="http://schemas.microsoft.com/office/powerpoint/2010/main" val="1579011935"/>
-              </p:ext>
-            </p:extLst>
-          </p:nvPr>
-        </p:nvGraphicFramePr>
-        <p:xfrm>
-          <a:off x="566928" y="4800600"/>
-          <a:ext cx="11027664" cy="914400"/>
-        </p:xfrm>
-        <a:graphic>
-          <a:graphicData uri="http://schemas.openxmlformats.org/drawingml/2006/table">
-            <a:tbl>
-              <a:tblPr/>
-              <a:tblGrid>
-                <a:gridCol w="3108960"/>
-                <a:gridCol w="7095744"/>
-                <a:gridCol w="822960"/>
-              </a:tblGrid>
-              <a:tr h="310896">
-                <a:tc>
-                  <a:txBody>
-                    <a:bodyPr/>
-                    <a:lstStyle/>
-                    <a:p>
-                      <a:pPr indent="0" marL="0">
-                        <a:buNone/>
-                      </a:pPr>
-                      <a:r>
-                        <a:rPr lang="en-US" sz="850" b="1" spc="60" kern="0" dirty="0">
-                          <a:solidFill>
-                            <a:srgbClr val="63748A"/>
-                          </a:solidFill>
-                          <a:latin typeface="Calibri" pitchFamily="34" charset="0"/>
-                          <a:ea typeface="Calibri" pitchFamily="34" charset="-122"/>
-                          <a:cs typeface="Calibri" pitchFamily="34" charset="-120"/>
-                        </a:rPr>
-                        <a:t>System suitability check</a:t>
-                      </a:r>
-                      <a:endParaRPr lang="en-US" sz="850" dirty="0">
-                        <a:latin typeface="Calibri" charset="0"/>
-                        <a:ea typeface="Calibri" charset="0"/>
-                        <a:cs typeface="Calibri" charset="0"/>
-                      </a:endParaRPr>
-                    </a:p>
-                  </a:txBody>
-                  <a:tcPr marL="91440" marR="91440" marT="45720" marB="45720" anchor="ctr">
-                    <a:lnL w="6350" cap="flat" cmpd="sng" algn="ctr">
-                      <a:solidFill>
-                        <a:srgbClr val="DCE4EC"/>
-                      </a:solidFill>
-                      <a:prstDash val="solid"/>
-                      <a:round/>
-                      <a:headEnd type="none" w="med" len="med"/>
-                      <a:tailEnd type="none" w="med" len="med"/>
-                    </a:lnL>
-                    <a:lnR w="6350" cap="flat" cmpd="sng" algn="ctr">
-                      <a:solidFill>
-                        <a:srgbClr val="DCE4EC"/>
-                      </a:solidFill>
-                      <a:prstDash val="solid"/>
-                      <a:round/>
-                      <a:headEnd type="none" w="med" len="med"/>
-                      <a:tailEnd type="none" w="med" len="med"/>
-                    </a:lnR>
-                    <a:lnT w="6350" cap="flat" cmpd="sng" algn="ctr">
-                      <a:solidFill>
-                        <a:srgbClr val="DCE4EC"/>
-                      </a:solidFill>
-                      <a:prstDash val="solid"/>
-                      <a:round/>
-                      <a:headEnd type="none" w="med" len="med"/>
-                      <a:tailEnd type="none" w="med" len="med"/>
-                    </a:lnT>
-                    <a:lnB w="6350" cap="flat" cmpd="sng" algn="ctr">
-                      <a:solidFill>
-                        <a:srgbClr val="DCE4EC"/>
-                      </a:solidFill>
-                      <a:prstDash val="solid"/>
-                      <a:round/>
-                      <a:headEnd type="none" w="med" len="med"/>
-                      <a:tailEnd type="none" w="med" len="med"/>
-                    </a:lnB>
-                    <a:solidFill>
-                      <a:srgbClr val="F2F6F9"/>
-                    </a:solidFill>
-                  </a:tcPr>
-                </a:tc>
-                <a:tc>
-                  <a:txBody>
-                    <a:bodyPr/>
-                    <a:lstStyle/>
-                    <a:p>
-                      <a:pPr indent="0" marL="0">
-                        <a:buNone/>
-                      </a:pPr>
-                      <a:r>
-                        <a:rPr lang="en-US" sz="850" b="1" spc="60" kern="0" dirty="0">
-                          <a:solidFill>
-                            <a:srgbClr val="63748A"/>
-                          </a:solidFill>
-                          <a:latin typeface="Calibri" pitchFamily="34" charset="0"/>
-                          <a:ea typeface="Calibri" pitchFamily="34" charset="-122"/>
-                          <a:cs typeface="Calibri" pitchFamily="34" charset="-120"/>
-                        </a:rPr>
-                        <a:t>Observed</a:t>
-                      </a:r>
-                      <a:endParaRPr lang="en-US" sz="850" dirty="0">
-                        <a:latin typeface="Calibri" charset="0"/>
-                        <a:ea typeface="Calibri" charset="0"/>
-                        <a:cs typeface="Calibri" charset="0"/>
-                      </a:endParaRPr>
-                    </a:p>
-                  </a:txBody>
-                  <a:tcPr marL="91440" marR="91440" marT="45720" marB="45720" anchor="ctr">
-                    <a:lnL w="6350" cap="flat" cmpd="sng" algn="ctr">
-                      <a:solidFill>
-                        <a:srgbClr val="DCE4EC"/>
-                      </a:solidFill>
-                      <a:prstDash val="solid"/>
-                      <a:round/>
-                      <a:headEnd type="none" w="med" len="med"/>
-                      <a:tailEnd type="none" w="med" len="med"/>
-                    </a:lnL>
-                    <a:lnR w="6350" cap="flat" cmpd="sng" algn="ctr">
-                      <a:solidFill>
-                        <a:srgbClr val="DCE4EC"/>
-                      </a:solidFill>
-                      <a:prstDash val="solid"/>
-                      <a:round/>
-                      <a:headEnd type="none" w="med" len="med"/>
-                      <a:tailEnd type="none" w="med" len="med"/>
-                    </a:lnR>
-                    <a:lnT w="6350" cap="flat" cmpd="sng" algn="ctr">
-                      <a:solidFill>
-                        <a:srgbClr val="DCE4EC"/>
-                      </a:solidFill>
-                      <a:prstDash val="solid"/>
-                      <a:round/>
-                      <a:headEnd type="none" w="med" len="med"/>
-                      <a:tailEnd type="none" w="med" len="med"/>
-                    </a:lnT>
-                    <a:lnB w="6350" cap="flat" cmpd="sng" algn="ctr">
-                      <a:solidFill>
-                        <a:srgbClr val="DCE4EC"/>
-                      </a:solidFill>
-                      <a:prstDash val="solid"/>
-                      <a:round/>
-                      <a:headEnd type="none" w="med" len="med"/>
-                      <a:tailEnd type="none" w="med" len="med"/>
-                    </a:lnB>
-                    <a:solidFill>
-                      <a:srgbClr val="F2F6F9"/>
-                    </a:solidFill>
-                  </a:tcPr>
-                </a:tc>
-                <a:tc>
-                  <a:txBody>
-                    <a:bodyPr/>
-                    <a:lstStyle/>
-                    <a:p>
-                      <a:pPr indent="0" marL="0">
-                        <a:buNone/>
-                      </a:pPr>
-                      <a:endParaRPr lang="en-US" sz="850" dirty="0">
-                        <a:latin typeface="Calibri" charset="0"/>
-                        <a:ea typeface="Calibri" charset="0"/>
-                        <a:cs typeface="Calibri" charset="0"/>
-                      </a:endParaRPr>
-                    </a:p>
-                  </a:txBody>
-                  <a:tcPr marL="91440" marR="91440" marT="45720" marB="45720" anchor="ctr">
-                    <a:lnL w="6350" cap="flat" cmpd="sng" algn="ctr">
-                      <a:solidFill>
-                        <a:srgbClr val="DCE4EC"/>
-                      </a:solidFill>
-                      <a:prstDash val="solid"/>
-                      <a:round/>
-                      <a:headEnd type="none" w="med" len="med"/>
-                      <a:tailEnd type="none" w="med" len="med"/>
-                    </a:lnL>
-                    <a:lnR w="6350" cap="flat" cmpd="sng" algn="ctr">
-                      <a:solidFill>
-                        <a:srgbClr val="DCE4EC"/>
-                      </a:solidFill>
-                      <a:prstDash val="solid"/>
-                      <a:round/>
-                      <a:headEnd type="none" w="med" len="med"/>
-                      <a:tailEnd type="none" w="med" len="med"/>
-                    </a:lnR>
-                    <a:lnT w="6350" cap="flat" cmpd="sng" algn="ctr">
-                      <a:solidFill>
-                        <a:srgbClr val="DCE4EC"/>
-                      </a:solidFill>
-                      <a:prstDash val="solid"/>
-                      <a:round/>
-                      <a:headEnd type="none" w="med" len="med"/>
-                      <a:tailEnd type="none" w="med" len="med"/>
-                    </a:lnT>
-                    <a:lnB w="6350" cap="flat" cmpd="sng" algn="ctr">
-                      <a:solidFill>
-                        <a:srgbClr val="DCE4EC"/>
-                      </a:solidFill>
-                      <a:prstDash val="solid"/>
-                      <a:round/>
-                      <a:headEnd type="none" w="med" len="med"/>
-                      <a:tailEnd type="none" w="med" len="med"/>
-                    </a:lnB>
-                    <a:solidFill>
-                      <a:srgbClr val="F2F6F9"/>
-                    </a:solidFill>
-                  </a:tcPr>
-                </a:tc>
-              </a:tr>
-              <a:tr h="310896">
-                <a:tc>
-                  <a:txBody>
-                    <a:bodyPr/>
-                    <a:lstStyle/>
-                    <a:p>
-                      <a:pPr indent="0" marL="0">
-                        <a:buNone/>
-                      </a:pPr>
-                      <a:r>
-                        <a:rPr lang="en-US" sz="950" b="1" dirty="0">
-                          <a:solidFill>
-                            <a:srgbClr val="12212E"/>
-                          </a:solidFill>
-                          <a:latin typeface="Calibri" pitchFamily="34" charset="0"/>
-                          <a:ea typeface="Calibri" pitchFamily="34" charset="-122"/>
-                          <a:cs typeface="Calibri" pitchFamily="34" charset="-120"/>
-                        </a:rPr>
-                        <a:t>universal epitopes detected with multi-allele breadth</a:t>
-                      </a:r>
-                      <a:endParaRPr lang="en-US" sz="950" dirty="0">
-                        <a:latin typeface="Calibri" charset="0"/>
-                        <a:ea typeface="Calibri" charset="0"/>
-                        <a:cs typeface="Calibri" charset="0"/>
-                      </a:endParaRPr>
-                    </a:p>
-                  </a:txBody>
-                  <a:tcPr marL="91440" marR="91440" marT="45720" marB="45720" anchor="ctr">
-                    <a:lnL w="6350" cap="flat" cmpd="sng" algn="ctr">
-                      <a:solidFill>
-                        <a:srgbClr val="DCE4EC"/>
-                      </a:solidFill>
-                      <a:prstDash val="solid"/>
-                      <a:round/>
-                      <a:headEnd type="none" w="med" len="med"/>
-                      <a:tailEnd type="none" w="med" len="med"/>
-                    </a:lnL>
-                    <a:lnR w="6350" cap="flat" cmpd="sng" algn="ctr">
-                      <a:solidFill>
-                        <a:srgbClr val="DCE4EC"/>
-                      </a:solidFill>
-                      <a:prstDash val="solid"/>
-                      <a:round/>
-                      <a:headEnd type="none" w="med" len="med"/>
-                      <a:tailEnd type="none" w="med" len="med"/>
-                    </a:lnR>
-                    <a:lnT w="6350" cap="flat" cmpd="sng" algn="ctr">
-                      <a:solidFill>
-                        <a:srgbClr val="DCE4EC"/>
-                      </a:solidFill>
-                      <a:prstDash val="solid"/>
-                      <a:round/>
-                      <a:headEnd type="none" w="med" len="med"/>
-                      <a:tailEnd type="none" w="med" len="med"/>
-                    </a:lnT>
-                    <a:lnB w="6350" cap="flat" cmpd="sng" algn="ctr">
-                      <a:solidFill>
-                        <a:srgbClr val="DCE4EC"/>
-                      </a:solidFill>
-                      <a:prstDash val="solid"/>
-                      <a:round/>
-                      <a:headEnd type="none" w="med" len="med"/>
-                      <a:tailEnd type="none" w="med" len="med"/>
-                    </a:lnB>
-                  </a:tcPr>
-                </a:tc>
-                <a:tc>
-                  <a:txBody>
-                    <a:bodyPr/>
-                    <a:lstStyle/>
-                    <a:p>
-                      <a:pPr indent="0" marL="0">
-                        <a:buNone/>
-                      </a:pPr>
-                      <a:r>
-                        <a:rPr lang="en-US" sz="900" dirty="0">
-                          <a:solidFill>
-                            <a:srgbClr val="3B4A5A"/>
-                          </a:solidFill>
-                          <a:latin typeface="Calibri" pitchFamily="34" charset="0"/>
-                          <a:ea typeface="Calibri" pitchFamily="34" charset="-122"/>
-                          <a:cs typeface="Calibri" pitchFamily="34" charset="-120"/>
-                        </a:rPr>
-                        <a:t>HA_306_318_region 8/25 DR at %Rank&lt;5 (2 at &lt;1, best 0.46); TT_p2_region 15/25 DR at %Rank&lt;5 (6 at &lt;1, best 0.06); TT_p30_region 5/25 DR at %Rank&lt;5 (2 at &lt;1, best 0.64)</a:t>
-                      </a:r>
-                      <a:endParaRPr lang="en-US" sz="900" dirty="0">
-                        <a:latin typeface="Calibri" charset="0"/>
-                        <a:ea typeface="Calibri" charset="0"/>
-                        <a:cs typeface="Calibri" charset="0"/>
-                      </a:endParaRPr>
-                    </a:p>
-                  </a:txBody>
-                  <a:tcPr marL="91440" marR="91440" marT="45720" marB="45720" anchor="ctr">
-                    <a:lnL w="6350" cap="flat" cmpd="sng" algn="ctr">
-                      <a:solidFill>
-                        <a:srgbClr val="DCE4EC"/>
-                      </a:solidFill>
-                      <a:prstDash val="solid"/>
-                      <a:round/>
-                      <a:headEnd type="none" w="med" len="med"/>
-                      <a:tailEnd type="none" w="med" len="med"/>
-                    </a:lnL>
-                    <a:lnR w="6350" cap="flat" cmpd="sng" algn="ctr">
-                      <a:solidFill>
-                        <a:srgbClr val="DCE4EC"/>
-                      </a:solidFill>
-                      <a:prstDash val="solid"/>
-                      <a:round/>
-                      <a:headEnd type="none" w="med" len="med"/>
-                      <a:tailEnd type="none" w="med" len="med"/>
-                    </a:lnR>
-                    <a:lnT w="6350" cap="flat" cmpd="sng" algn="ctr">
-                      <a:solidFill>
-                        <a:srgbClr val="DCE4EC"/>
-                      </a:solidFill>
-                      <a:prstDash val="solid"/>
-                      <a:round/>
-                      <a:headEnd type="none" w="med" len="med"/>
-                      <a:tailEnd type="none" w="med" len="med"/>
-                    </a:lnT>
-                    <a:lnB w="6350" cap="flat" cmpd="sng" algn="ctr">
-                      <a:solidFill>
-                        <a:srgbClr val="DCE4EC"/>
-                      </a:solidFill>
-                      <a:prstDash val="solid"/>
-                      <a:round/>
-                      <a:headEnd type="none" w="med" len="med"/>
-                      <a:tailEnd type="none" w="med" len="med"/>
-                    </a:lnB>
-                  </a:tcPr>
-                </a:tc>
-                <a:tc>
-                  <a:txBody>
-                    <a:bodyPr/>
-                    <a:lstStyle/>
-                    <a:p>
-                      <a:pPr algn="ctr" indent="0" marL="0">
-                        <a:buNone/>
-                      </a:pPr>
-                      <a:r>
-                        <a:rPr lang="en-US" sz="950" b="1" dirty="0">
-                          <a:solidFill>
-                            <a:srgbClr val="3D8A6B"/>
-                          </a:solidFill>
-                          <a:latin typeface="Calibri" pitchFamily="34" charset="0"/>
-                          <a:ea typeface="Calibri" pitchFamily="34" charset="-122"/>
-                          <a:cs typeface="Calibri" pitchFamily="34" charset="-120"/>
-                        </a:rPr>
-                        <a:t>PASS</a:t>
-                      </a:r>
-                      <a:endParaRPr lang="en-US" sz="950" dirty="0">
-                        <a:latin typeface="Calibri" charset="0"/>
-                        <a:ea typeface="Calibri" charset="0"/>
-                        <a:cs typeface="Calibri" charset="0"/>
-                      </a:endParaRPr>
-                    </a:p>
-                  </a:txBody>
-                  <a:tcPr marL="91440" marR="91440" marT="45720" marB="45720" anchor="ctr">
-                    <a:lnL w="6350" cap="flat" cmpd="sng" algn="ctr">
-                      <a:solidFill>
-                        <a:srgbClr val="DCE4EC"/>
-                      </a:solidFill>
-                      <a:prstDash val="solid"/>
-                      <a:round/>
-                      <a:headEnd type="none" w="med" len="med"/>
-                      <a:tailEnd type="none" w="med" len="med"/>
-                    </a:lnL>
-                    <a:lnR w="6350" cap="flat" cmpd="sng" algn="ctr">
-                      <a:solidFill>
-                        <a:srgbClr val="DCE4EC"/>
-                      </a:solidFill>
-                      <a:prstDash val="solid"/>
-                      <a:round/>
-                      <a:headEnd type="none" w="med" len="med"/>
-                      <a:tailEnd type="none" w="med" len="med"/>
-                    </a:lnR>
-                    <a:lnT w="6350" cap="flat" cmpd="sng" algn="ctr">
-                      <a:solidFill>
-                        <a:srgbClr val="DCE4EC"/>
-                      </a:solidFill>
-                      <a:prstDash val="solid"/>
-                      <a:round/>
-                      <a:headEnd type="none" w="med" len="med"/>
-                      <a:tailEnd type="none" w="med" len="med"/>
-                    </a:lnT>
-                    <a:lnB w="6350" cap="flat" cmpd="sng" algn="ctr">
-                      <a:solidFill>
-                        <a:srgbClr val="DCE4EC"/>
-                      </a:solidFill>
-                      <a:prstDash val="solid"/>
-                      <a:round/>
-                      <a:headEnd type="none" w="med" len="med"/>
-                      <a:tailEnd type="none" w="med" len="med"/>
-                    </a:lnB>
-                  </a:tcPr>
-                </a:tc>
-              </a:tr>
-              <a:tr h="310896">
-                <a:tc>
-                  <a:txBody>
-                    <a:bodyPr/>
-                    <a:lstStyle/>
-                    <a:p>
-                      <a:pPr indent="0" marL="0">
-                        <a:buNone/>
-                      </a:pPr>
-                      <a:r>
-                        <a:rPr lang="en-US" sz="950" b="1" dirty="0">
-                          <a:solidFill>
-                            <a:srgbClr val="12212E"/>
-                          </a:solidFill>
-                          <a:latin typeface="Calibri" pitchFamily="34" charset="0"/>
-                          <a:ea typeface="Calibri" pitchFamily="34" charset="-122"/>
-                          <a:cs typeface="Calibri" pitchFamily="34" charset="-120"/>
-                        </a:rPr>
-                        <a:t>self controls suppressed by tolerance filter</a:t>
-                      </a:r>
-                      <a:endParaRPr lang="en-US" sz="950" dirty="0">
-                        <a:latin typeface="Calibri" charset="0"/>
-                        <a:ea typeface="Calibri" charset="0"/>
-                        <a:cs typeface="Calibri" charset="0"/>
-                      </a:endParaRPr>
-                    </a:p>
-                  </a:txBody>
-                  <a:tcPr marL="91440" marR="91440" marT="45720" marB="45720" anchor="ctr">
-                    <a:lnL w="6350" cap="flat" cmpd="sng" algn="ctr">
-                      <a:solidFill>
-                        <a:srgbClr val="DCE4EC"/>
-                      </a:solidFill>
-                      <a:prstDash val="solid"/>
-                      <a:round/>
-                      <a:headEnd type="none" w="med" len="med"/>
-                      <a:tailEnd type="none" w="med" len="med"/>
-                    </a:lnL>
-                    <a:lnR w="6350" cap="flat" cmpd="sng" algn="ctr">
-                      <a:solidFill>
-                        <a:srgbClr val="DCE4EC"/>
-                      </a:solidFill>
-                      <a:prstDash val="solid"/>
-                      <a:round/>
-                      <a:headEnd type="none" w="med" len="med"/>
-                      <a:tailEnd type="none" w="med" len="med"/>
-                    </a:lnR>
-                    <a:lnT w="6350" cap="flat" cmpd="sng" algn="ctr">
-                      <a:solidFill>
-                        <a:srgbClr val="DCE4EC"/>
-                      </a:solidFill>
-                      <a:prstDash val="solid"/>
-                      <a:round/>
-                      <a:headEnd type="none" w="med" len="med"/>
-                      <a:tailEnd type="none" w="med" len="med"/>
-                    </a:lnT>
-                    <a:lnB w="6350" cap="flat" cmpd="sng" algn="ctr">
-                      <a:solidFill>
-                        <a:srgbClr val="DCE4EC"/>
-                      </a:solidFill>
-                      <a:prstDash val="solid"/>
-                      <a:round/>
-                      <a:headEnd type="none" w="med" len="med"/>
-                      <a:tailEnd type="none" w="med" len="med"/>
-                    </a:lnB>
-                  </a:tcPr>
-                </a:tc>
-                <a:tc>
-                  <a:txBody>
-                    <a:bodyPr/>
-                    <a:lstStyle/>
-                    <a:p>
-                      <a:pPr indent="0" marL="0">
-                        <a:buNone/>
-                      </a:pPr>
-                      <a:r>
-                        <a:rPr lang="en-US" sz="900" dirty="0">
-                          <a:solidFill>
-                            <a:srgbClr val="3B4A5A"/>
-                          </a:solidFill>
-                          <a:latin typeface="Calibri" pitchFamily="34" charset="0"/>
-                          <a:ea typeface="Calibri" pitchFamily="34" charset="-122"/>
-                          <a:cs typeface="Calibri" pitchFamily="34" charset="-120"/>
-                        </a:rPr>
-                        <a:t>HumanVH3_23_germline pIRS 0.00 (raw 0.37); HSA_D1 pIRS 0.00 (raw 0.13)</a:t>
-                      </a:r>
-                      <a:endParaRPr lang="en-US" sz="900" dirty="0">
-                        <a:latin typeface="Calibri" charset="0"/>
-                        <a:ea typeface="Calibri" charset="0"/>
-                        <a:cs typeface="Calibri" charset="0"/>
-                      </a:endParaRPr>
-                    </a:p>
-                  </a:txBody>
-                  <a:tcPr marL="91440" marR="91440" marT="45720" marB="45720" anchor="ctr">
-                    <a:lnL w="6350" cap="flat" cmpd="sng" algn="ctr">
-                      <a:solidFill>
-                        <a:srgbClr val="DCE4EC"/>
-                      </a:solidFill>
-                      <a:prstDash val="solid"/>
-                      <a:round/>
-                      <a:headEnd type="none" w="med" len="med"/>
-                      <a:tailEnd type="none" w="med" len="med"/>
-                    </a:lnL>
-                    <a:lnR w="6350" cap="flat" cmpd="sng" algn="ctr">
-                      <a:solidFill>
-                        <a:srgbClr val="DCE4EC"/>
-                      </a:solidFill>
-                      <a:prstDash val="solid"/>
-                      <a:round/>
-                      <a:headEnd type="none" w="med" len="med"/>
-                      <a:tailEnd type="none" w="med" len="med"/>
-                    </a:lnR>
-                    <a:lnT w="6350" cap="flat" cmpd="sng" algn="ctr">
-                      <a:solidFill>
-                        <a:srgbClr val="DCE4EC"/>
-                      </a:solidFill>
-                      <a:prstDash val="solid"/>
-                      <a:round/>
-                      <a:headEnd type="none" w="med" len="med"/>
-                      <a:tailEnd type="none" w="med" len="med"/>
-                    </a:lnT>
-                    <a:lnB w="6350" cap="flat" cmpd="sng" algn="ctr">
-                      <a:solidFill>
-                        <a:srgbClr val="DCE4EC"/>
-                      </a:solidFill>
-                      <a:prstDash val="solid"/>
-                      <a:round/>
-                      <a:headEnd type="none" w="med" len="med"/>
-                      <a:tailEnd type="none" w="med" len="med"/>
-                    </a:lnB>
-                  </a:tcPr>
-                </a:tc>
-                <a:tc>
-                  <a:txBody>
-                    <a:bodyPr/>
-                    <a:lstStyle/>
-                    <a:p>
-                      <a:pPr algn="ctr" indent="0" marL="0">
-                        <a:buNone/>
-                      </a:pPr>
-                      <a:r>
-                        <a:rPr lang="en-US" sz="950" b="1" dirty="0">
-                          <a:solidFill>
-                            <a:srgbClr val="3D8A6B"/>
-                          </a:solidFill>
-                          <a:latin typeface="Calibri" pitchFamily="34" charset="0"/>
-                          <a:ea typeface="Calibri" pitchFamily="34" charset="-122"/>
-                          <a:cs typeface="Calibri" pitchFamily="34" charset="-120"/>
-                        </a:rPr>
-                        <a:t>PASS</a:t>
-                      </a:r>
-                      <a:endParaRPr lang="en-US" sz="950" dirty="0">
-                        <a:latin typeface="Calibri" charset="0"/>
-                        <a:ea typeface="Calibri" charset="0"/>
-                        <a:cs typeface="Calibri" charset="0"/>
-                      </a:endParaRPr>
-                    </a:p>
-                  </a:txBody>
-                  <a:tcPr marL="91440" marR="91440" marT="45720" marB="45720" anchor="ctr">
-                    <a:lnL w="6350" cap="flat" cmpd="sng" algn="ctr">
-                      <a:solidFill>
-                        <a:srgbClr val="DCE4EC"/>
-                      </a:solidFill>
-                      <a:prstDash val="solid"/>
-                      <a:round/>
-                      <a:headEnd type="none" w="med" len="med"/>
-                      <a:tailEnd type="none" w="med" len="med"/>
-                    </a:lnL>
-                    <a:lnR w="6350" cap="flat" cmpd="sng" algn="ctr">
-                      <a:solidFill>
-                        <a:srgbClr val="DCE4EC"/>
-                      </a:solidFill>
-                      <a:prstDash val="solid"/>
-                      <a:round/>
-                      <a:headEnd type="none" w="med" len="med"/>
-                      <a:tailEnd type="none" w="med" len="med"/>
-                    </a:lnR>
-                    <a:lnT w="6350" cap="flat" cmpd="sng" algn="ctr">
-                      <a:solidFill>
-                        <a:srgbClr val="DCE4EC"/>
-                      </a:solidFill>
-                      <a:prstDash val="solid"/>
-                      <a:round/>
-                      <a:headEnd type="none" w="med" len="med"/>
-                      <a:tailEnd type="none" w="med" len="med"/>
-                    </a:lnT>
-                    <a:lnB w="6350" cap="flat" cmpd="sng" algn="ctr">
-                      <a:solidFill>
-                        <a:srgbClr val="DCE4EC"/>
-                      </a:solidFill>
-                      <a:prstDash val="solid"/>
-                      <a:round/>
-                      <a:headEnd type="none" w="med" len="med"/>
-                      <a:tailEnd type="none" w="med" len="med"/>
-                    </a:lnB>
-                  </a:tcPr>
-                </a:tc>
-              </a:tr>
-              <a:tr h="310896">
-                <a:tc>
-                  <a:txBody>
-                    <a:bodyPr/>
-                    <a:lstStyle/>
-                    <a:p>
-                      <a:pPr indent="0" marL="0">
-                        <a:buNone/>
-                      </a:pPr>
-                      <a:r>
-                        <a:rPr lang="en-US" sz="950" b="1" dirty="0">
-                          <a:solidFill>
-                            <a:srgbClr val="12212E"/>
-                          </a:solidFill>
-                          <a:latin typeface="Calibri" pitchFamily="34" charset="0"/>
-                          <a:ea typeface="Calibri" pitchFamily="34" charset="-122"/>
-                          <a:cs typeface="Calibri" pitchFamily="34" charset="-120"/>
-                        </a:rPr>
-                        <a:t>tolerance filter discriminates self from foreign</a:t>
-                      </a:r>
-                      <a:endParaRPr lang="en-US" sz="950" dirty="0">
-                        <a:latin typeface="Calibri" charset="0"/>
-                        <a:ea typeface="Calibri" charset="0"/>
-                        <a:cs typeface="Calibri" charset="0"/>
-                      </a:endParaRPr>
-                    </a:p>
-                  </a:txBody>
-                  <a:tcPr marL="91440" marR="91440" marT="45720" marB="45720" anchor="ctr">
-                    <a:lnL w="6350" cap="flat" cmpd="sng" algn="ctr">
-                      <a:solidFill>
-                        <a:srgbClr val="DCE4EC"/>
-                      </a:solidFill>
-                      <a:prstDash val="solid"/>
-                      <a:round/>
-                      <a:headEnd type="none" w="med" len="med"/>
-                      <a:tailEnd type="none" w="med" len="med"/>
-                    </a:lnL>
-                    <a:lnR w="6350" cap="flat" cmpd="sng" algn="ctr">
-                      <a:solidFill>
-                        <a:srgbClr val="DCE4EC"/>
-                      </a:solidFill>
-                      <a:prstDash val="solid"/>
-                      <a:round/>
-                      <a:headEnd type="none" w="med" len="med"/>
-                      <a:tailEnd type="none" w="med" len="med"/>
-                    </a:lnR>
-                    <a:lnT w="6350" cap="flat" cmpd="sng" algn="ctr">
-                      <a:solidFill>
-                        <a:srgbClr val="DCE4EC"/>
-                      </a:solidFill>
-                      <a:prstDash val="solid"/>
-                      <a:round/>
-                      <a:headEnd type="none" w="med" len="med"/>
-                      <a:tailEnd type="none" w="med" len="med"/>
-                    </a:lnT>
-                    <a:lnB w="6350" cap="flat" cmpd="sng" algn="ctr">
-                      <a:solidFill>
-                        <a:srgbClr val="DCE4EC"/>
-                      </a:solidFill>
-                      <a:prstDash val="solid"/>
-                      <a:round/>
-                      <a:headEnd type="none" w="med" len="med"/>
-                      <a:tailEnd type="none" w="med" len="med"/>
-                    </a:lnB>
-                  </a:tcPr>
-                </a:tc>
-                <a:tc>
-                  <a:txBody>
-                    <a:bodyPr/>
-                    <a:lstStyle/>
-                    <a:p>
-                      <a:pPr indent="0" marL="0">
-                        <a:buNone/>
-                      </a:pPr>
-                      <a:r>
-                        <a:rPr lang="en-US" sz="900" dirty="0">
-                          <a:solidFill>
-                            <a:srgbClr val="3B4A5A"/>
-                          </a:solidFill>
-                          <a:latin typeface="Calibri" pitchFamily="34" charset="0"/>
-                          <a:ea typeface="Calibri" pitchFamily="34" charset="-122"/>
-                          <a:cs typeface="Calibri" pitchFamily="34" charset="-120"/>
-                        </a:rPr>
-                        <a:t>mean score drop: self 100.0% vs ligands 9.0%</a:t>
-                      </a:r>
-                      <a:endParaRPr lang="en-US" sz="900" dirty="0">
-                        <a:latin typeface="Calibri" charset="0"/>
-                        <a:ea typeface="Calibri" charset="0"/>
-                        <a:cs typeface="Calibri" charset="0"/>
-                      </a:endParaRPr>
-                    </a:p>
-                  </a:txBody>
-                  <a:tcPr marL="91440" marR="91440" marT="45720" marB="45720" anchor="ctr">
-                    <a:lnL w="6350" cap="flat" cmpd="sng" algn="ctr">
-                      <a:solidFill>
-                        <a:srgbClr val="DCE4EC"/>
-                      </a:solidFill>
-                      <a:prstDash val="solid"/>
-                      <a:round/>
-                      <a:headEnd type="none" w="med" len="med"/>
-                      <a:tailEnd type="none" w="med" len="med"/>
-                    </a:lnL>
-                    <a:lnR w="6350" cap="flat" cmpd="sng" algn="ctr">
-                      <a:solidFill>
-                        <a:srgbClr val="DCE4EC"/>
-                      </a:solidFill>
-                      <a:prstDash val="solid"/>
-                      <a:round/>
-                      <a:headEnd type="none" w="med" len="med"/>
-                      <a:tailEnd type="none" w="med" len="med"/>
-                    </a:lnR>
-                    <a:lnT w="6350" cap="flat" cmpd="sng" algn="ctr">
-                      <a:solidFill>
-                        <a:srgbClr val="DCE4EC"/>
-                      </a:solidFill>
-                      <a:prstDash val="solid"/>
-                      <a:round/>
-                      <a:headEnd type="none" w="med" len="med"/>
-                      <a:tailEnd type="none" w="med" len="med"/>
-                    </a:lnT>
-                    <a:lnB w="6350" cap="flat" cmpd="sng" algn="ctr">
-                      <a:solidFill>
-                        <a:srgbClr val="DCE4EC"/>
-                      </a:solidFill>
-                      <a:prstDash val="solid"/>
-                      <a:round/>
-                      <a:headEnd type="none" w="med" len="med"/>
-                      <a:tailEnd type="none" w="med" len="med"/>
-                    </a:lnB>
-                  </a:tcPr>
-                </a:tc>
-                <a:tc>
-                  <a:txBody>
-                    <a:bodyPr/>
-                    <a:lstStyle/>
-                    <a:p>
-                      <a:pPr algn="ctr" indent="0" marL="0">
-                        <a:buNone/>
-                      </a:pPr>
-                      <a:r>
-                        <a:rPr lang="en-US" sz="950" b="1" dirty="0">
-                          <a:solidFill>
-                            <a:srgbClr val="3D8A6B"/>
-                          </a:solidFill>
-                          <a:latin typeface="Calibri" pitchFamily="34" charset="0"/>
-                          <a:ea typeface="Calibri" pitchFamily="34" charset="-122"/>
-                          <a:cs typeface="Calibri" pitchFamily="34" charset="-120"/>
-                        </a:rPr>
-                        <a:t>PASS</a:t>
-                      </a:r>
-                      <a:endParaRPr lang="en-US" sz="950" dirty="0">
-                        <a:latin typeface="Calibri" charset="0"/>
-                        <a:ea typeface="Calibri" charset="0"/>
-                        <a:cs typeface="Calibri" charset="0"/>
-                      </a:endParaRPr>
-                    </a:p>
-                  </a:txBody>
-                  <a:tcPr marL="91440" marR="91440" marT="45720" marB="45720" anchor="ctr">
-                    <a:lnL w="6350" cap="flat" cmpd="sng" algn="ctr">
-                      <a:solidFill>
-                        <a:srgbClr val="DCE4EC"/>
-                      </a:solidFill>
-                      <a:prstDash val="solid"/>
-                      <a:round/>
-                      <a:headEnd type="none" w="med" len="med"/>
-                      <a:tailEnd type="none" w="med" len="med"/>
-                    </a:lnL>
-                    <a:lnR w="6350" cap="flat" cmpd="sng" algn="ctr">
-                      <a:solidFill>
-                        <a:srgbClr val="DCE4EC"/>
-                      </a:solidFill>
-                      <a:prstDash val="solid"/>
-                      <a:round/>
-                      <a:headEnd type="none" w="med" len="med"/>
-                      <a:tailEnd type="none" w="med" len="med"/>
-                    </a:lnR>
-                    <a:lnT w="6350" cap="flat" cmpd="sng" algn="ctr">
-                      <a:solidFill>
-                        <a:srgbClr val="DCE4EC"/>
-                      </a:solidFill>
-                      <a:prstDash val="solid"/>
-                      <a:round/>
-                      <a:headEnd type="none" w="med" len="med"/>
-                      <a:tailEnd type="none" w="med" len="med"/>
-                    </a:lnT>
-                    <a:lnB w="6350" cap="flat" cmpd="sng" algn="ctr">
-                      <a:solidFill>
-                        <a:srgbClr val="DCE4EC"/>
-                      </a:solidFill>
-                      <a:prstDash val="solid"/>
-                      <a:round/>
-                      <a:headEnd type="none" w="med" len="med"/>
-                      <a:tailEnd type="none" w="med" len="med"/>
-                    </a:lnB>
-                  </a:tcPr>
-                </a:tc>
-              </a:tr>
-              <a:tr h="310896">
-                <a:tc>
-                  <a:txBody>
-                    <a:bodyPr/>
-                    <a:lstStyle/>
-                    <a:p>
-                      <a:pPr indent="0" marL="0">
-                        <a:buNone/>
-                      </a:pPr>
-                      <a:r>
-                        <a:rPr lang="en-US" sz="950" b="1" dirty="0">
-                          <a:solidFill>
-                            <a:srgbClr val="12212E"/>
-                          </a:solidFill>
-                          <a:latin typeface="Calibri" pitchFamily="34" charset="0"/>
-                          <a:ea typeface="Calibri" pitchFamily="34" charset="-122"/>
-                          <a:cs typeface="Calibri" pitchFamily="34" charset="-120"/>
-                        </a:rPr>
-                        <a:t>benchmark anchor scored</a:t>
-                      </a:r>
-                      <a:endParaRPr lang="en-US" sz="950" dirty="0">
-                        <a:latin typeface="Calibri" charset="0"/>
-                        <a:ea typeface="Calibri" charset="0"/>
-                        <a:cs typeface="Calibri" charset="0"/>
-                      </a:endParaRPr>
-                    </a:p>
-                  </a:txBody>
-                  <a:tcPr marL="91440" marR="91440" marT="45720" marB="45720" anchor="ctr">
-                    <a:lnL w="6350" cap="flat" cmpd="sng" algn="ctr">
-                      <a:solidFill>
-                        <a:srgbClr val="DCE4EC"/>
-                      </a:solidFill>
-                      <a:prstDash val="solid"/>
-                      <a:round/>
-                      <a:headEnd type="none" w="med" len="med"/>
-                      <a:tailEnd type="none" w="med" len="med"/>
-                    </a:lnL>
-                    <a:lnR w="6350" cap="flat" cmpd="sng" algn="ctr">
-                      <a:solidFill>
-                        <a:srgbClr val="DCE4EC"/>
-                      </a:solidFill>
-                      <a:prstDash val="solid"/>
-                      <a:round/>
-                      <a:headEnd type="none" w="med" len="med"/>
-                      <a:tailEnd type="none" w="med" len="med"/>
-                    </a:lnR>
-                    <a:lnT w="6350" cap="flat" cmpd="sng" algn="ctr">
-                      <a:solidFill>
-                        <a:srgbClr val="DCE4EC"/>
-                      </a:solidFill>
-                      <a:prstDash val="solid"/>
-                      <a:round/>
-                      <a:headEnd type="none" w="med" len="med"/>
-                      <a:tailEnd type="none" w="med" len="med"/>
-                    </a:lnT>
-                    <a:lnB w="6350" cap="flat" cmpd="sng" algn="ctr">
-                      <a:solidFill>
-                        <a:srgbClr val="DCE4EC"/>
-                      </a:solidFill>
-                      <a:prstDash val="solid"/>
-                      <a:round/>
-                      <a:headEnd type="none" w="med" len="med"/>
-                      <a:tailEnd type="none" w="med" len="med"/>
-                    </a:lnB>
-                  </a:tcPr>
-                </a:tc>
-                <a:tc>
-                  <a:txBody>
-                    <a:bodyPr/>
-                    <a:lstStyle/>
-                    <a:p>
-                      <a:pPr indent="0" marL="0">
-                        <a:buNone/>
-                      </a:pPr>
-                      <a:r>
-                        <a:rPr lang="en-US" sz="900" dirty="0">
-                          <a:solidFill>
-                            <a:srgbClr val="3B4A5A"/>
-                          </a:solidFill>
-                          <a:latin typeface="Calibri" pitchFamily="34" charset="0"/>
-                          <a:ea typeface="Calibri" pitchFamily="34" charset="-122"/>
-                          <a:cs typeface="Calibri" pitchFamily="34" charset="-120"/>
-                        </a:rPr>
-                        <a:t>ProteinA_Z pIRS 0.45</a:t>
-                      </a:r>
-                      <a:endParaRPr lang="en-US" sz="900" dirty="0">
-                        <a:latin typeface="Calibri" charset="0"/>
-                        <a:ea typeface="Calibri" charset="0"/>
-                        <a:cs typeface="Calibri" charset="0"/>
-                      </a:endParaRPr>
-                    </a:p>
-                  </a:txBody>
-                  <a:tcPr marL="91440" marR="91440" marT="45720" marB="45720" anchor="ctr">
-                    <a:lnL w="6350" cap="flat" cmpd="sng" algn="ctr">
-                      <a:solidFill>
-                        <a:srgbClr val="DCE4EC"/>
-                      </a:solidFill>
-                      <a:prstDash val="solid"/>
-                      <a:round/>
-                      <a:headEnd type="none" w="med" len="med"/>
-                      <a:tailEnd type="none" w="med" len="med"/>
-                    </a:lnL>
-                    <a:lnR w="6350" cap="flat" cmpd="sng" algn="ctr">
-                      <a:solidFill>
-                        <a:srgbClr val="DCE4EC"/>
-                      </a:solidFill>
-                      <a:prstDash val="solid"/>
-                      <a:round/>
-                      <a:headEnd type="none" w="med" len="med"/>
-                      <a:tailEnd type="none" w="med" len="med"/>
-                    </a:lnR>
-                    <a:lnT w="6350" cap="flat" cmpd="sng" algn="ctr">
-                      <a:solidFill>
-                        <a:srgbClr val="DCE4EC"/>
-                      </a:solidFill>
-                      <a:prstDash val="solid"/>
-                      <a:round/>
-                      <a:headEnd type="none" w="med" len="med"/>
-                      <a:tailEnd type="none" w="med" len="med"/>
-                    </a:lnT>
-                    <a:lnB w="6350" cap="flat" cmpd="sng" algn="ctr">
-                      <a:solidFill>
-                        <a:srgbClr val="DCE4EC"/>
-                      </a:solidFill>
-                      <a:prstDash val="solid"/>
-                      <a:round/>
-                      <a:headEnd type="none" w="med" len="med"/>
-                      <a:tailEnd type="none" w="med" len="med"/>
-                    </a:lnB>
-                  </a:tcPr>
-                </a:tc>
-                <a:tc>
-                  <a:txBody>
-                    <a:bodyPr/>
-                    <a:lstStyle/>
-                    <a:p>
-                      <a:pPr algn="ctr" indent="0" marL="0">
-                        <a:buNone/>
-                      </a:pPr>
-                      <a:r>
-                        <a:rPr lang="en-US" sz="950" b="1" dirty="0">
-                          <a:solidFill>
-                            <a:srgbClr val="3D8A6B"/>
-                          </a:solidFill>
-                          <a:latin typeface="Calibri" pitchFamily="34" charset="0"/>
-                          <a:ea typeface="Calibri" pitchFamily="34" charset="-122"/>
-                          <a:cs typeface="Calibri" pitchFamily="34" charset="-120"/>
-                        </a:rPr>
-                        <a:t>PASS</a:t>
-                      </a:r>
-                      <a:endParaRPr lang="en-US" sz="950" dirty="0">
-                        <a:latin typeface="Calibri" charset="0"/>
-                        <a:ea typeface="Calibri" charset="0"/>
-                        <a:cs typeface="Calibri" charset="0"/>
-                      </a:endParaRPr>
-                    </a:p>
-                  </a:txBody>
-                  <a:tcPr marL="91440" marR="91440" marT="45720" marB="45720" anchor="ctr">
-                    <a:lnL w="6350" cap="flat" cmpd="sng" algn="ctr">
-                      <a:solidFill>
-                        <a:srgbClr val="DCE4EC"/>
-                      </a:solidFill>
-                      <a:prstDash val="solid"/>
-                      <a:round/>
-                      <a:headEnd type="none" w="med" len="med"/>
-                      <a:tailEnd type="none" w="med" len="med"/>
-                    </a:lnL>
-                    <a:lnR w="6350" cap="flat" cmpd="sng" algn="ctr">
-                      <a:solidFill>
-                        <a:srgbClr val="DCE4EC"/>
-                      </a:solidFill>
-                      <a:prstDash val="solid"/>
-                      <a:round/>
-                      <a:headEnd type="none" w="med" len="med"/>
-                      <a:tailEnd type="none" w="med" len="med"/>
-                    </a:lnR>
-                    <a:lnT w="6350" cap="flat" cmpd="sng" algn="ctr">
-                      <a:solidFill>
-                        <a:srgbClr val="DCE4EC"/>
-                      </a:solidFill>
-                      <a:prstDash val="solid"/>
-                      <a:round/>
-                      <a:headEnd type="none" w="med" len="med"/>
-                      <a:tailEnd type="none" w="med" len="med"/>
-                    </a:lnT>
-                    <a:lnB w="6350" cap="flat" cmpd="sng" algn="ctr">
-                      <a:solidFill>
-                        <a:srgbClr val="DCE4EC"/>
-                      </a:solidFill>
-                      <a:prstDash val="solid"/>
-                      <a:round/>
-                      <a:headEnd type="none" w="med" len="med"/>
-                      <a:tailEnd type="none" w="med" len="med"/>
-                    </a:lnB>
-                  </a:tcPr>
-                </a:tc>
-              </a:tr>
-            </a:tbl>
-          </a:graphicData>
-        </a:graphic>
-      </p:graphicFrame>
+      <p:sp>
+        <p:nvSpPr>
+          <p:cNvPr id="6" name="Shape 3"/>
+          <p:cNvSpPr/>
+          <p:nvPr/>
+        </p:nvSpPr>
+        <p:spPr>
+          <a:xfrm>
+            <a:off x="566928" y="5614416"/>
+            <a:ext cx="11027664" cy="896112"/>
+          </a:xfrm>
+          <a:prstGeom prst="roundRect">
+            <a:avLst>
+              <a:gd name="adj" fmla="val 6122"/>
+            </a:avLst>
+          </a:prstGeom>
+          <a:solidFill>
+            <a:srgbClr val="F2F6F9"/>
+          </a:solidFill>
+          <a:ln w="9525">
+            <a:solidFill>
+              <a:srgbClr val="DCE4EC"/>
+            </a:solidFill>
+            <a:prstDash val="solid"/>
+          </a:ln>
+        </p:spPr>
+      </p:sp>
+      <p:sp>
+        <p:nvSpPr>
+          <p:cNvPr id="7" name="Text 4"/>
+          <p:cNvSpPr/>
+          <p:nvPr/>
+        </p:nvSpPr>
+        <p:spPr>
+          <a:xfrm>
+            <a:off x="768096" y="5687568"/>
+            <a:ext cx="10625328" cy="749808"/>
+          </a:xfrm>
+          <a:prstGeom prst="rect">
+            <a:avLst/>
+          </a:prstGeom>
+          <a:noFill/>
+          <a:ln/>
+        </p:spPr>
+        <p:txBody>
+          <a:bodyPr wrap="square" lIns="0" tIns="0" rIns="0" bIns="0" rtlCol="0" anchor="ctr"/>
+          <a:lstStyle/>
+          <a:p>
+            <a:pPr indent="0" marL="0">
+              <a:lnSpc>
+                <a:spcPts val="1100"/>
+              </a:lnSpc>
+              <a:buNone/>
+            </a:pPr>
+            <a:r>
+              <a:rPr lang="en-US" sz="900" b="1" dirty="0">
+                <a:solidFill>
+                  <a:srgbClr val="B23B3B"/>
+                </a:solidFill>
+                <a:latin typeface="Calibri" pitchFamily="34" charset="0"/>
+                <a:ea typeface="Calibri" pitchFamily="34" charset="-122"/>
+                <a:cs typeface="Calibri" pitchFamily="34" charset="-120"/>
+              </a:rPr>
+              <a:t>The lever does not exist.  </a:t>
+            </a:r>
+            <a:pPr indent="0" marL="0">
+              <a:lnSpc>
+                <a:spcPts val="1100"/>
+              </a:lnSpc>
+              <a:buNone/>
+            </a:pPr>
+            <a:r>
+              <a:rPr lang="en-US" sz="900" dirty="0">
+                <a:solidFill>
+                  <a:srgbClr val="12212E"/>
+                </a:solidFill>
+                <a:latin typeface="Calibri" pitchFamily="34" charset="0"/>
+                <a:ea typeface="Calibri" pitchFamily="34" charset="-122"/>
+                <a:cs typeface="Calibri" pitchFamily="34" charset="-120"/>
+              </a:rPr>
+              <a:t>Breadth at %Rank &lt; 1 is worth +0.0005 AUC against the best single rank, 95% CI [−0.0156, +0.0169]; population-weighted presentation +0.0013, [−0.0197, +0.0221]. In the 1,069 peptides tested on exactly one molecule — the only stratum where breadth cannot be inflated by how many molecules IEDB happened to test — it is still flat (+0.0054, [−0.0113, +0.0221]), and in the 131 multi-allele peptides it is significantly worse (−0.0877, [−0.1599, −0.0145]). Test count alone reaches AUC 0.575 — higher than any sequence-derived predictor here — with the positive rate climbing 46% → 80% → 96% across 1, 2 and 3 molecules tested. That is ascertainment, not biology. The pipeline keeps flagging per molecule on %Rank and keeps population weighting as an aggregation, not a criterion.</a:t>
+            </a:r>
+            <a:endParaRPr lang="en-US" sz="900" dirty="0"/>
+          </a:p>
+        </p:txBody>
+      </p:sp>
     </p:spTree>
   </p:cSld>
   <p:clrMapOvr>
